--- a/tutorials/week_4/4.recursion.pptx
+++ b/tutorials/week_4/4.recursion.pptx
@@ -2,22 +2,133 @@
 <file path=ppt/presentation.xml><?xml version="1.0" encoding="utf-8"?>
 <p:presentation xmlns:a="http://schemas.openxmlformats.org/drawingml/2006/main" xmlns:r="http://schemas.openxmlformats.org/officeDocument/2006/relationships" xmlns:p="http://schemas.openxmlformats.org/presentationml/2006/main" saveSubsetFonts="1">
   <p:sldMasterIdLst>
-    <p:sldMasterId r:id="rId1" id="2147483648"/>
+    <p:sldMasterId id="2147483648" r:id="rId1"/>
   </p:sldMasterIdLst>
   <p:sldIdLst>
-    <p:sldId r:id="rId2" id="256"/>
-    <p:sldId r:id="rId7" id="257"/>
-    <p:sldId r:id="rId8" id="258"/>
-    <p:sldId r:id="rId9" id="259"/>
-    <p:sldId r:id="rId10" id="260"/>
-    <p:sldId r:id="rId11" id="261"/>
-    <p:sldId r:id="rId12" id="262"/>
-    <p:sldId r:id="rId13" id="263"/>
-    <p:sldId r:id="rId14" id="264"/>
-    <p:sldId r:id="rId15" id="265"/>
+    <p:sldId id="256" r:id="rId2"/>
+    <p:sldId id="257" r:id="rId3"/>
+    <p:sldId id="258" r:id="rId4"/>
+    <p:sldId id="259" r:id="rId5"/>
+    <p:sldId id="260" r:id="rId6"/>
+    <p:sldId id="261" r:id="rId7"/>
+    <p:sldId id="262" r:id="rId8"/>
+    <p:sldId id="263" r:id="rId9"/>
+    <p:sldId id="264" r:id="rId10"/>
+    <p:sldId id="265" r:id="rId11"/>
   </p:sldIdLst>
   <p:sldSz cx="12192000" cy="6858000"/>
   <p:notesSz cx="6858000" cy="9144000"/>
+  <p:defaultTextStyle>
+    <a:defPPr>
+      <a:defRPr lang="en-US"/>
+    </a:defPPr>
+    <a:lvl1pPr marL="0" algn="l" defTabSz="914400" rtl="0" eaLnBrk="1" latinLnBrk="0" hangingPunct="1">
+      <a:defRPr sz="1800" kern="1200">
+        <a:solidFill>
+          <a:schemeClr val="tx1"/>
+        </a:solidFill>
+        <a:latin typeface="+mn-lt"/>
+        <a:ea typeface="+mn-ea"/>
+        <a:cs typeface="+mn-cs"/>
+      </a:defRPr>
+    </a:lvl1pPr>
+    <a:lvl2pPr marL="457200" algn="l" defTabSz="914400" rtl="0" eaLnBrk="1" latinLnBrk="0" hangingPunct="1">
+      <a:defRPr sz="1800" kern="1200">
+        <a:solidFill>
+          <a:schemeClr val="tx1"/>
+        </a:solidFill>
+        <a:latin typeface="+mn-lt"/>
+        <a:ea typeface="+mn-ea"/>
+        <a:cs typeface="+mn-cs"/>
+      </a:defRPr>
+    </a:lvl2pPr>
+    <a:lvl3pPr marL="914400" algn="l" defTabSz="914400" rtl="0" eaLnBrk="1" latinLnBrk="0" hangingPunct="1">
+      <a:defRPr sz="1800" kern="1200">
+        <a:solidFill>
+          <a:schemeClr val="tx1"/>
+        </a:solidFill>
+        <a:latin typeface="+mn-lt"/>
+        <a:ea typeface="+mn-ea"/>
+        <a:cs typeface="+mn-cs"/>
+      </a:defRPr>
+    </a:lvl3pPr>
+    <a:lvl4pPr marL="1371600" algn="l" defTabSz="914400" rtl="0" eaLnBrk="1" latinLnBrk="0" hangingPunct="1">
+      <a:defRPr sz="1800" kern="1200">
+        <a:solidFill>
+          <a:schemeClr val="tx1"/>
+        </a:solidFill>
+        <a:latin typeface="+mn-lt"/>
+        <a:ea typeface="+mn-ea"/>
+        <a:cs typeface="+mn-cs"/>
+      </a:defRPr>
+    </a:lvl4pPr>
+    <a:lvl5pPr marL="1828800" algn="l" defTabSz="914400" rtl="0" eaLnBrk="1" latinLnBrk="0" hangingPunct="1">
+      <a:defRPr sz="1800" kern="1200">
+        <a:solidFill>
+          <a:schemeClr val="tx1"/>
+        </a:solidFill>
+        <a:latin typeface="+mn-lt"/>
+        <a:ea typeface="+mn-ea"/>
+        <a:cs typeface="+mn-cs"/>
+      </a:defRPr>
+    </a:lvl5pPr>
+    <a:lvl6pPr marL="2286000" algn="l" defTabSz="914400" rtl="0" eaLnBrk="1" latinLnBrk="0" hangingPunct="1">
+      <a:defRPr sz="1800" kern="1200">
+        <a:solidFill>
+          <a:schemeClr val="tx1"/>
+        </a:solidFill>
+        <a:latin typeface="+mn-lt"/>
+        <a:ea typeface="+mn-ea"/>
+        <a:cs typeface="+mn-cs"/>
+      </a:defRPr>
+    </a:lvl6pPr>
+    <a:lvl7pPr marL="2743200" algn="l" defTabSz="914400" rtl="0" eaLnBrk="1" latinLnBrk="0" hangingPunct="1">
+      <a:defRPr sz="1800" kern="1200">
+        <a:solidFill>
+          <a:schemeClr val="tx1"/>
+        </a:solidFill>
+        <a:latin typeface="+mn-lt"/>
+        <a:ea typeface="+mn-ea"/>
+        <a:cs typeface="+mn-cs"/>
+      </a:defRPr>
+    </a:lvl7pPr>
+    <a:lvl8pPr marL="3200400" algn="l" defTabSz="914400" rtl="0" eaLnBrk="1" latinLnBrk="0" hangingPunct="1">
+      <a:defRPr sz="1800" kern="1200">
+        <a:solidFill>
+          <a:schemeClr val="tx1"/>
+        </a:solidFill>
+        <a:latin typeface="+mn-lt"/>
+        <a:ea typeface="+mn-ea"/>
+        <a:cs typeface="+mn-cs"/>
+      </a:defRPr>
+    </a:lvl8pPr>
+    <a:lvl9pPr marL="3657600" algn="l" defTabSz="914400" rtl="0" eaLnBrk="1" latinLnBrk="0" hangingPunct="1">
+      <a:defRPr sz="1800" kern="1200">
+        <a:solidFill>
+          <a:schemeClr val="tx1"/>
+        </a:solidFill>
+        <a:latin typeface="+mn-lt"/>
+        <a:ea typeface="+mn-ea"/>
+        <a:cs typeface="+mn-cs"/>
+      </a:defRPr>
+    </a:lvl9pPr>
+  </p:defaultTextStyle>
+  <p:extLst>
+    <p:ext uri="{EFAFB233-063F-42B5-8137-9DF3F51BA10A}">
+      <p15:sldGuideLst xmlns:p15="http://schemas.microsoft.com/office/powerpoint/2012/main">
+        <p15:guide id="1" orient="horz" pos="2160">
+          <p15:clr>
+            <a:srgbClr val="A4A3A4"/>
+          </p15:clr>
+        </p15:guide>
+        <p15:guide id="2" pos="2880">
+          <p15:clr>
+            <a:srgbClr val="A4A3A4"/>
+          </p15:clr>
+        </p15:guide>
+      </p15:sldGuideLst>
+    </p:ext>
+  </p:extLst>
 </p:presentation>
 </file>
 
@@ -41,7 +152,9 @@
       <p:sp>
         <p:nvSpPr>
           <p:cNvPr id="2" name="Title 1"/>
-          <p:cNvSpPr/>
+          <p:cNvSpPr>
+            <a:spLocks noGrp="1"/>
+          </p:cNvSpPr>
           <p:nvPr>
             <p:ph type="ctrTitle"/>
           </p:nvPr>
@@ -58,19 +171,19 @@
             <a:defPPr/>
           </a:lstStyle>
           <a:p>
-            <a:pPr/>
-            <a:r>
-              <a:rPr lang="en-US" dirty="1" smtClean="0"/>
+            <a:r>
+              <a:rPr lang="en-US"/>
               <a:t>Click to edit Master title style</a:t>
             </a:r>
-            <a:endParaRPr lang="en-US"/>
           </a:p>
         </p:txBody>
       </p:sp>
       <p:sp>
         <p:nvSpPr>
           <p:cNvPr id="3" name="Subtitle 2"/>
-          <p:cNvSpPr/>
+          <p:cNvSpPr>
+            <a:spLocks noGrp="1"/>
+          </p:cNvSpPr>
           <p:nvPr>
             <p:ph type="subTitle" idx="1"/>
           </p:nvPr>
@@ -96,19 +209,19 @@
             <a:lvl9pPr/>
           </a:lstStyle>
           <a:p>
-            <a:pPr/>
-            <a:r>
-              <a:rPr lang="en-US" dirty="1" smtClean="0"/>
+            <a:r>
+              <a:rPr lang="en-US"/>
               <a:t>Click to edit Master subtitle style</a:t>
             </a:r>
-            <a:endParaRPr lang="en-US"/>
           </a:p>
         </p:txBody>
       </p:sp>
       <p:sp>
         <p:nvSpPr>
           <p:cNvPr id="4" name="Date Placeholder 3"/>
-          <p:cNvSpPr/>
+          <p:cNvSpPr>
+            <a:spLocks noGrp="1"/>
+          </p:cNvSpPr>
           <p:nvPr>
             <p:ph type="dt" sz="half" idx="10"/>
           </p:nvPr>
@@ -120,10 +233,9 @@
             <a:defPPr/>
           </a:lstStyle>
           <a:p>
-            <a:pPr/>
             <a:fld id="{E8FD0B7A-F5DD-4F40-B4CB-3B2C354B893A}" type="datetimeFigureOut">
               <a:rPr lang="en-US" smtClean="0"/>
-              <a:t>3/4/2014</a:t>
+              <a:t>10/16/2025</a:t>
             </a:fld>
             <a:endParaRPr lang="en-US"/>
           </a:p>
@@ -132,7 +244,9 @@
       <p:sp>
         <p:nvSpPr>
           <p:cNvPr id="5" name="Footer Placeholder 4"/>
-          <p:cNvSpPr/>
+          <p:cNvSpPr>
+            <a:spLocks noGrp="1"/>
+          </p:cNvSpPr>
           <p:nvPr>
             <p:ph type="ftr" sz="quarter" idx="11"/>
           </p:nvPr>
@@ -144,7 +258,6 @@
             <a:defPPr/>
           </a:lstStyle>
           <a:p>
-            <a:pPr/>
             <a:endParaRPr lang="en-US"/>
           </a:p>
         </p:txBody>
@@ -152,7 +265,9 @@
       <p:sp>
         <p:nvSpPr>
           <p:cNvPr id="6" name="Slide Number Placeholder 5"/>
-          <p:cNvSpPr/>
+          <p:cNvSpPr>
+            <a:spLocks noGrp="1"/>
+          </p:cNvSpPr>
           <p:nvPr>
             <p:ph type="sldNum" sz="quarter" idx="12"/>
           </p:nvPr>
@@ -164,7 +279,6 @@
             <a:defPPr/>
           </a:lstStyle>
           <a:p>
-            <a:pPr/>
             <a:fld id="{93AE1883-0942-4AA3-9DB2-9C7C3A0314B1}" type="slidenum">
               <a:rPr lang="en-US" smtClean="0"/>
               <a:t>‹#›</a:t>
@@ -201,7 +315,9 @@
       <p:sp>
         <p:nvSpPr>
           <p:cNvPr id="2" name="Title 1"/>
-          <p:cNvSpPr/>
+          <p:cNvSpPr>
+            <a:spLocks noGrp="1"/>
+          </p:cNvSpPr>
           <p:nvPr>
             <p:ph type="title"/>
           </p:nvPr>
@@ -213,19 +329,19 @@
             <a:defPPr/>
           </a:lstStyle>
           <a:p>
-            <a:pPr/>
-            <a:r>
-              <a:rPr lang="en-US" dirty="1" smtClean="0"/>
+            <a:r>
+              <a:rPr lang="en-US"/>
               <a:t>Click to edit Master title style</a:t>
             </a:r>
-            <a:endParaRPr lang="en-US"/>
           </a:p>
         </p:txBody>
       </p:sp>
       <p:sp>
         <p:nvSpPr>
           <p:cNvPr id="3" name="Vertical Text Placeholder 2"/>
-          <p:cNvSpPr/>
+          <p:cNvSpPr>
+            <a:spLocks noGrp="1"/>
+          </p:cNvSpPr>
           <p:nvPr>
             <p:ph type="body" orient="vert" idx="1"/>
           </p:nvPr>
@@ -239,45 +355,46 @@
           <a:p>
             <a:pPr lvl="0"/>
             <a:r>
-              <a:rPr lang="en-US" dirty="1" smtClean="0"/>
+              <a:rPr lang="en-US"/>
               <a:t>Click to edit Master text styles</a:t>
             </a:r>
           </a:p>
           <a:p>
             <a:pPr lvl="1"/>
             <a:r>
-              <a:rPr lang="en-US" dirty="1" smtClean="0"/>
+              <a:rPr lang="en-US"/>
               <a:t>Second level</a:t>
             </a:r>
           </a:p>
           <a:p>
             <a:pPr lvl="2"/>
             <a:r>
-              <a:rPr lang="en-US" dirty="1" smtClean="0"/>
+              <a:rPr lang="en-US"/>
               <a:t>Third level</a:t>
             </a:r>
           </a:p>
           <a:p>
             <a:pPr lvl="3"/>
             <a:r>
-              <a:rPr lang="en-US" dirty="1" smtClean="0"/>
+              <a:rPr lang="en-US"/>
               <a:t>Fourth level</a:t>
             </a:r>
           </a:p>
           <a:p>
             <a:pPr lvl="4"/>
             <a:r>
-              <a:rPr lang="en-US" dirty="1" smtClean="0"/>
+              <a:rPr lang="en-US"/>
               <a:t>Fifth level</a:t>
             </a:r>
-            <a:endParaRPr lang="en-US"/>
           </a:p>
         </p:txBody>
       </p:sp>
       <p:sp>
         <p:nvSpPr>
           <p:cNvPr id="4" name="Date Placeholder 3"/>
-          <p:cNvSpPr/>
+          <p:cNvSpPr>
+            <a:spLocks noGrp="1"/>
+          </p:cNvSpPr>
           <p:nvPr>
             <p:ph type="dt" sz="half" idx="10"/>
           </p:nvPr>
@@ -289,10 +406,9 @@
             <a:defPPr/>
           </a:lstStyle>
           <a:p>
-            <a:pPr/>
             <a:fld id="{E8FD0B7A-F5DD-4F40-B4CB-3B2C354B893A}" type="datetimeFigureOut">
               <a:rPr lang="en-US" smtClean="0"/>
-              <a:t>3/4/2014</a:t>
+              <a:t>10/16/2025</a:t>
             </a:fld>
             <a:endParaRPr lang="en-US"/>
           </a:p>
@@ -301,7 +417,9 @@
       <p:sp>
         <p:nvSpPr>
           <p:cNvPr id="5" name="Footer Placeholder 4"/>
-          <p:cNvSpPr/>
+          <p:cNvSpPr>
+            <a:spLocks noGrp="1"/>
+          </p:cNvSpPr>
           <p:nvPr>
             <p:ph type="ftr" sz="quarter" idx="11"/>
           </p:nvPr>
@@ -313,7 +431,6 @@
             <a:defPPr/>
           </a:lstStyle>
           <a:p>
-            <a:pPr/>
             <a:endParaRPr lang="en-US"/>
           </a:p>
         </p:txBody>
@@ -321,7 +438,9 @@
       <p:sp>
         <p:nvSpPr>
           <p:cNvPr id="6" name="Slide Number Placeholder 5"/>
-          <p:cNvSpPr/>
+          <p:cNvSpPr>
+            <a:spLocks noGrp="1"/>
+          </p:cNvSpPr>
           <p:nvPr>
             <p:ph type="sldNum" sz="quarter" idx="12"/>
           </p:nvPr>
@@ -333,7 +452,6 @@
             <a:defPPr/>
           </a:lstStyle>
           <a:p>
-            <a:pPr/>
             <a:fld id="{93AE1883-0942-4AA3-9DB2-9C7C3A0314B1}" type="slidenum">
               <a:rPr lang="en-US" smtClean="0"/>
               <a:t>‹#›</a:t>
@@ -370,7 +488,9 @@
       <p:sp>
         <p:nvSpPr>
           <p:cNvPr id="2" name="Vertical Title 1"/>
-          <p:cNvSpPr/>
+          <p:cNvSpPr>
+            <a:spLocks noGrp="1"/>
+          </p:cNvSpPr>
           <p:nvPr>
             <p:ph type="title" orient="vert"/>
           </p:nvPr>
@@ -387,19 +507,19 @@
             <a:defPPr/>
           </a:lstStyle>
           <a:p>
-            <a:pPr/>
-            <a:r>
-              <a:rPr lang="en-US" dirty="1" smtClean="0"/>
+            <a:r>
+              <a:rPr lang="en-US"/>
               <a:t>Click to edit Master title style</a:t>
             </a:r>
-            <a:endParaRPr lang="en-US"/>
           </a:p>
         </p:txBody>
       </p:sp>
       <p:sp>
         <p:nvSpPr>
           <p:cNvPr id="3" name="Vertical Text Placeholder 2"/>
-          <p:cNvSpPr/>
+          <p:cNvSpPr>
+            <a:spLocks noGrp="1"/>
+          </p:cNvSpPr>
           <p:nvPr>
             <p:ph type="body" orient="vert" idx="1"/>
           </p:nvPr>
@@ -418,45 +538,46 @@
           <a:p>
             <a:pPr lvl="0"/>
             <a:r>
-              <a:rPr lang="en-US" dirty="1" smtClean="0"/>
+              <a:rPr lang="en-US"/>
               <a:t>Click to edit Master text styles</a:t>
             </a:r>
           </a:p>
           <a:p>
             <a:pPr lvl="1"/>
             <a:r>
-              <a:rPr lang="en-US" dirty="1" smtClean="0"/>
+              <a:rPr lang="en-US"/>
               <a:t>Second level</a:t>
             </a:r>
           </a:p>
           <a:p>
             <a:pPr lvl="2"/>
             <a:r>
-              <a:rPr lang="en-US" dirty="1" smtClean="0"/>
+              <a:rPr lang="en-US"/>
               <a:t>Third level</a:t>
             </a:r>
           </a:p>
           <a:p>
             <a:pPr lvl="3"/>
             <a:r>
-              <a:rPr lang="en-US" dirty="1" smtClean="0"/>
+              <a:rPr lang="en-US"/>
               <a:t>Fourth level</a:t>
             </a:r>
           </a:p>
           <a:p>
             <a:pPr lvl="4"/>
             <a:r>
-              <a:rPr lang="en-US" dirty="1" smtClean="0"/>
+              <a:rPr lang="en-US"/>
               <a:t>Fifth level</a:t>
             </a:r>
-            <a:endParaRPr lang="en-US"/>
           </a:p>
         </p:txBody>
       </p:sp>
       <p:sp>
         <p:nvSpPr>
           <p:cNvPr id="4" name="Date Placeholder 3"/>
-          <p:cNvSpPr/>
+          <p:cNvSpPr>
+            <a:spLocks noGrp="1"/>
+          </p:cNvSpPr>
           <p:nvPr>
             <p:ph type="dt" sz="half" idx="10"/>
           </p:nvPr>
@@ -468,10 +589,9 @@
             <a:defPPr/>
           </a:lstStyle>
           <a:p>
-            <a:pPr/>
             <a:fld id="{E8FD0B7A-F5DD-4F40-B4CB-3B2C354B893A}" type="datetimeFigureOut">
               <a:rPr lang="en-US" smtClean="0"/>
-              <a:t>3/4/2014</a:t>
+              <a:t>10/16/2025</a:t>
             </a:fld>
             <a:endParaRPr lang="en-US"/>
           </a:p>
@@ -480,7 +600,9 @@
       <p:sp>
         <p:nvSpPr>
           <p:cNvPr id="5" name="Footer Placeholder 4"/>
-          <p:cNvSpPr/>
+          <p:cNvSpPr>
+            <a:spLocks noGrp="1"/>
+          </p:cNvSpPr>
           <p:nvPr>
             <p:ph type="ftr" sz="quarter" idx="11"/>
           </p:nvPr>
@@ -492,7 +614,6 @@
             <a:defPPr/>
           </a:lstStyle>
           <a:p>
-            <a:pPr/>
             <a:endParaRPr lang="en-US"/>
           </a:p>
         </p:txBody>
@@ -500,7 +621,9 @@
       <p:sp>
         <p:nvSpPr>
           <p:cNvPr id="6" name="Slide Number Placeholder 5"/>
-          <p:cNvSpPr/>
+          <p:cNvSpPr>
+            <a:spLocks noGrp="1"/>
+          </p:cNvSpPr>
           <p:nvPr>
             <p:ph type="sldNum" sz="quarter" idx="12"/>
           </p:nvPr>
@@ -512,7 +635,6 @@
             <a:defPPr/>
           </a:lstStyle>
           <a:p>
-            <a:pPr/>
             <a:fld id="{93AE1883-0942-4AA3-9DB2-9C7C3A0314B1}" type="slidenum">
               <a:rPr lang="en-US" smtClean="0"/>
               <a:t>‹#›</a:t>
@@ -549,7 +671,9 @@
       <p:sp>
         <p:nvSpPr>
           <p:cNvPr id="2" name="Title 1"/>
-          <p:cNvSpPr/>
+          <p:cNvSpPr>
+            <a:spLocks noGrp="1"/>
+          </p:cNvSpPr>
           <p:nvPr>
             <p:ph type="title"/>
           </p:nvPr>
@@ -561,21 +685,21 @@
             <a:defPPr/>
           </a:lstStyle>
           <a:p>
-            <a:pPr/>
-            <a:r>
-              <a:rPr lang="en-US" dirty="1" smtClean="0"/>
+            <a:r>
+              <a:rPr lang="en-US"/>
               <a:t>Click to edit Master title style</a:t>
             </a:r>
-            <a:endParaRPr lang="en-US"/>
           </a:p>
         </p:txBody>
       </p:sp>
       <p:sp>
         <p:nvSpPr>
           <p:cNvPr id="3" name="Content Placeholder 2"/>
-          <p:cNvSpPr/>
+          <p:cNvSpPr>
+            <a:spLocks noGrp="1"/>
+          </p:cNvSpPr>
           <p:nvPr>
-            <p:ph type="obj" idx="1"/>
+            <p:ph idx="1"/>
           </p:nvPr>
         </p:nvSpPr>
         <p:spPr/>
@@ -587,45 +711,46 @@
           <a:p>
             <a:pPr lvl="0"/>
             <a:r>
-              <a:rPr lang="en-US" dirty="1" smtClean="0"/>
+              <a:rPr lang="en-US"/>
               <a:t>Click to edit Master text styles</a:t>
             </a:r>
           </a:p>
           <a:p>
             <a:pPr lvl="1"/>
             <a:r>
-              <a:rPr lang="en-US" dirty="1" smtClean="0"/>
+              <a:rPr lang="en-US"/>
               <a:t>Second level</a:t>
             </a:r>
           </a:p>
           <a:p>
             <a:pPr lvl="2"/>
             <a:r>
-              <a:rPr lang="en-US" dirty="1" smtClean="0"/>
+              <a:rPr lang="en-US"/>
               <a:t>Third level</a:t>
             </a:r>
           </a:p>
           <a:p>
             <a:pPr lvl="3"/>
             <a:r>
-              <a:rPr lang="en-US" dirty="1" smtClean="0"/>
+              <a:rPr lang="en-US"/>
               <a:t>Fourth level</a:t>
             </a:r>
           </a:p>
           <a:p>
             <a:pPr lvl="4"/>
             <a:r>
-              <a:rPr lang="en-US" dirty="1" smtClean="0"/>
+              <a:rPr lang="en-US"/>
               <a:t>Fifth level</a:t>
             </a:r>
-            <a:endParaRPr lang="en-US"/>
           </a:p>
         </p:txBody>
       </p:sp>
       <p:sp>
         <p:nvSpPr>
           <p:cNvPr id="4" name="Date Placeholder 3"/>
-          <p:cNvSpPr/>
+          <p:cNvSpPr>
+            <a:spLocks noGrp="1"/>
+          </p:cNvSpPr>
           <p:nvPr>
             <p:ph type="dt" sz="half" idx="10"/>
           </p:nvPr>
@@ -637,10 +762,9 @@
             <a:defPPr/>
           </a:lstStyle>
           <a:p>
-            <a:pPr/>
             <a:fld id="{E8FD0B7A-F5DD-4F40-B4CB-3B2C354B893A}" type="datetimeFigureOut">
               <a:rPr lang="en-US" smtClean="0"/>
-              <a:t>3/4/2014</a:t>
+              <a:t>10/16/2025</a:t>
             </a:fld>
             <a:endParaRPr lang="en-US"/>
           </a:p>
@@ -649,7 +773,9 @@
       <p:sp>
         <p:nvSpPr>
           <p:cNvPr id="5" name="Footer Placeholder 4"/>
-          <p:cNvSpPr/>
+          <p:cNvSpPr>
+            <a:spLocks noGrp="1"/>
+          </p:cNvSpPr>
           <p:nvPr>
             <p:ph type="ftr" sz="quarter" idx="11"/>
           </p:nvPr>
@@ -661,7 +787,6 @@
             <a:defPPr/>
           </a:lstStyle>
           <a:p>
-            <a:pPr/>
             <a:endParaRPr lang="en-US"/>
           </a:p>
         </p:txBody>
@@ -669,7 +794,9 @@
       <p:sp>
         <p:nvSpPr>
           <p:cNvPr id="6" name="Slide Number Placeholder 5"/>
-          <p:cNvSpPr/>
+          <p:cNvSpPr>
+            <a:spLocks noGrp="1"/>
+          </p:cNvSpPr>
           <p:nvPr>
             <p:ph type="sldNum" sz="quarter" idx="12"/>
           </p:nvPr>
@@ -681,7 +808,6 @@
             <a:defPPr/>
           </a:lstStyle>
           <a:p>
-            <a:pPr/>
             <a:fld id="{93AE1883-0942-4AA3-9DB2-9C7C3A0314B1}" type="slidenum">
               <a:rPr lang="en-US" smtClean="0"/>
               <a:t>‹#›</a:t>
@@ -718,7 +844,9 @@
       <p:sp>
         <p:nvSpPr>
           <p:cNvPr id="2" name="Title 1"/>
-          <p:cNvSpPr/>
+          <p:cNvSpPr>
+            <a:spLocks noGrp="1"/>
+          </p:cNvSpPr>
           <p:nvPr>
             <p:ph type="title"/>
           </p:nvPr>
@@ -736,19 +864,19 @@
             <a:lvl1pPr/>
           </a:lstStyle>
           <a:p>
-            <a:pPr/>
-            <a:r>
-              <a:rPr lang="en-US" dirty="1" smtClean="0"/>
+            <a:r>
+              <a:rPr lang="en-US"/>
               <a:t>Click to edit Master title style</a:t>
             </a:r>
-            <a:endParaRPr lang="en-US"/>
           </a:p>
         </p:txBody>
       </p:sp>
       <p:sp>
         <p:nvSpPr>
           <p:cNvPr id="3" name="Text Placeholder 2"/>
-          <p:cNvSpPr/>
+          <p:cNvSpPr>
+            <a:spLocks noGrp="1"/>
+          </p:cNvSpPr>
           <p:nvPr>
             <p:ph type="body" idx="1"/>
           </p:nvPr>
@@ -776,7 +904,7 @@
           <a:p>
             <a:pPr lvl="0"/>
             <a:r>
-              <a:rPr lang="en-US" dirty="1" smtClean="0"/>
+              <a:rPr lang="en-US"/>
               <a:t>Click to edit Master text styles</a:t>
             </a:r>
           </a:p>
@@ -785,7 +913,9 @@
       <p:sp>
         <p:nvSpPr>
           <p:cNvPr id="4" name="Date Placeholder 3"/>
-          <p:cNvSpPr/>
+          <p:cNvSpPr>
+            <a:spLocks noGrp="1"/>
+          </p:cNvSpPr>
           <p:nvPr>
             <p:ph type="dt" sz="half" idx="10"/>
           </p:nvPr>
@@ -797,10 +927,9 @@
             <a:defPPr/>
           </a:lstStyle>
           <a:p>
-            <a:pPr/>
             <a:fld id="{E8FD0B7A-F5DD-4F40-B4CB-3B2C354B893A}" type="datetimeFigureOut">
               <a:rPr lang="en-US" smtClean="0"/>
-              <a:t>3/4/2014</a:t>
+              <a:t>10/16/2025</a:t>
             </a:fld>
             <a:endParaRPr lang="en-US"/>
           </a:p>
@@ -809,7 +938,9 @@
       <p:sp>
         <p:nvSpPr>
           <p:cNvPr id="5" name="Footer Placeholder 4"/>
-          <p:cNvSpPr/>
+          <p:cNvSpPr>
+            <a:spLocks noGrp="1"/>
+          </p:cNvSpPr>
           <p:nvPr>
             <p:ph type="ftr" sz="quarter" idx="11"/>
           </p:nvPr>
@@ -821,7 +952,6 @@
             <a:defPPr/>
           </a:lstStyle>
           <a:p>
-            <a:pPr/>
             <a:endParaRPr lang="en-US"/>
           </a:p>
         </p:txBody>
@@ -829,7 +959,9 @@
       <p:sp>
         <p:nvSpPr>
           <p:cNvPr id="6" name="Slide Number Placeholder 5"/>
-          <p:cNvSpPr/>
+          <p:cNvSpPr>
+            <a:spLocks noGrp="1"/>
+          </p:cNvSpPr>
           <p:nvPr>
             <p:ph type="sldNum" sz="quarter" idx="12"/>
           </p:nvPr>
@@ -841,7 +973,6 @@
             <a:defPPr/>
           </a:lstStyle>
           <a:p>
-            <a:pPr/>
             <a:fld id="{93AE1883-0942-4AA3-9DB2-9C7C3A0314B1}" type="slidenum">
               <a:rPr lang="en-US" smtClean="0"/>
               <a:t>‹#›</a:t>
@@ -878,7 +1009,9 @@
       <p:sp>
         <p:nvSpPr>
           <p:cNvPr id="2" name="Title 1"/>
-          <p:cNvSpPr/>
+          <p:cNvSpPr>
+            <a:spLocks noGrp="1"/>
+          </p:cNvSpPr>
           <p:nvPr>
             <p:ph type="title"/>
           </p:nvPr>
@@ -890,21 +1023,21 @@
             <a:defPPr/>
           </a:lstStyle>
           <a:p>
-            <a:pPr/>
-            <a:r>
-              <a:rPr lang="en-US" dirty="1" smtClean="0"/>
+            <a:r>
+              <a:rPr lang="en-US"/>
               <a:t>Click to edit Master title style</a:t>
             </a:r>
-            <a:endParaRPr lang="en-US"/>
           </a:p>
         </p:txBody>
       </p:sp>
       <p:sp>
         <p:nvSpPr>
           <p:cNvPr id="3" name="Content Placeholder 2"/>
-          <p:cNvSpPr/>
+          <p:cNvSpPr>
+            <a:spLocks noGrp="1"/>
+          </p:cNvSpPr>
           <p:nvPr>
-            <p:ph type="obj" sz="half" idx="1"/>
+            <p:ph sz="half" idx="1"/>
           </p:nvPr>
         </p:nvSpPr>
         <p:spPr>
@@ -930,47 +1063,48 @@
           <a:p>
             <a:pPr lvl="0"/>
             <a:r>
-              <a:rPr lang="en-US" dirty="1" smtClean="0"/>
+              <a:rPr lang="en-US"/>
               <a:t>Click to edit Master text styles</a:t>
             </a:r>
           </a:p>
           <a:p>
             <a:pPr lvl="1"/>
             <a:r>
-              <a:rPr lang="en-US" dirty="1" smtClean="0"/>
+              <a:rPr lang="en-US"/>
               <a:t>Second level</a:t>
             </a:r>
           </a:p>
           <a:p>
             <a:pPr lvl="2"/>
             <a:r>
-              <a:rPr lang="en-US" dirty="1" smtClean="0"/>
+              <a:rPr lang="en-US"/>
               <a:t>Third level</a:t>
             </a:r>
           </a:p>
           <a:p>
             <a:pPr lvl="3"/>
             <a:r>
-              <a:rPr lang="en-US" dirty="1" smtClean="0"/>
+              <a:rPr lang="en-US"/>
               <a:t>Fourth level</a:t>
             </a:r>
           </a:p>
           <a:p>
             <a:pPr lvl="4"/>
             <a:r>
-              <a:rPr lang="en-US" dirty="1" smtClean="0"/>
+              <a:rPr lang="en-US"/>
               <a:t>Fifth level</a:t>
             </a:r>
-            <a:endParaRPr lang="en-US"/>
           </a:p>
         </p:txBody>
       </p:sp>
       <p:sp>
         <p:nvSpPr>
           <p:cNvPr id="4" name="Content Placeholder 3"/>
-          <p:cNvSpPr/>
+          <p:cNvSpPr>
+            <a:spLocks noGrp="1"/>
+          </p:cNvSpPr>
           <p:nvPr>
-            <p:ph type="obj" sz="half" idx="2"/>
+            <p:ph sz="half" idx="2"/>
           </p:nvPr>
         </p:nvSpPr>
         <p:spPr>
@@ -996,45 +1130,46 @@
           <a:p>
             <a:pPr lvl="0"/>
             <a:r>
-              <a:rPr lang="en-US" dirty="1" smtClean="0"/>
+              <a:rPr lang="en-US"/>
               <a:t>Click to edit Master text styles</a:t>
             </a:r>
           </a:p>
           <a:p>
             <a:pPr lvl="1"/>
             <a:r>
-              <a:rPr lang="en-US" dirty="1" smtClean="0"/>
+              <a:rPr lang="en-US"/>
               <a:t>Second level</a:t>
             </a:r>
           </a:p>
           <a:p>
             <a:pPr lvl="2"/>
             <a:r>
-              <a:rPr lang="en-US" dirty="1" smtClean="0"/>
+              <a:rPr lang="en-US"/>
               <a:t>Third level</a:t>
             </a:r>
           </a:p>
           <a:p>
             <a:pPr lvl="3"/>
             <a:r>
-              <a:rPr lang="en-US" dirty="1" smtClean="0"/>
+              <a:rPr lang="en-US"/>
               <a:t>Fourth level</a:t>
             </a:r>
           </a:p>
           <a:p>
             <a:pPr lvl="4"/>
             <a:r>
-              <a:rPr lang="en-US" dirty="1" smtClean="0"/>
+              <a:rPr lang="en-US"/>
               <a:t>Fifth level</a:t>
             </a:r>
-            <a:endParaRPr lang="en-US"/>
           </a:p>
         </p:txBody>
       </p:sp>
       <p:sp>
         <p:nvSpPr>
           <p:cNvPr id="5" name="Date Placeholder 4"/>
-          <p:cNvSpPr/>
+          <p:cNvSpPr>
+            <a:spLocks noGrp="1"/>
+          </p:cNvSpPr>
           <p:nvPr>
             <p:ph type="dt" sz="half" idx="10"/>
           </p:nvPr>
@@ -1046,10 +1181,9 @@
             <a:defPPr/>
           </a:lstStyle>
           <a:p>
-            <a:pPr/>
             <a:fld id="{E8FD0B7A-F5DD-4F40-B4CB-3B2C354B893A}" type="datetimeFigureOut">
               <a:rPr lang="en-US" smtClean="0"/>
-              <a:t>3/4/2014</a:t>
+              <a:t>10/16/2025</a:t>
             </a:fld>
             <a:endParaRPr lang="en-US"/>
           </a:p>
@@ -1058,7 +1192,9 @@
       <p:sp>
         <p:nvSpPr>
           <p:cNvPr id="6" name="Footer Placeholder 5"/>
-          <p:cNvSpPr/>
+          <p:cNvSpPr>
+            <a:spLocks noGrp="1"/>
+          </p:cNvSpPr>
           <p:nvPr>
             <p:ph type="ftr" sz="quarter" idx="11"/>
           </p:nvPr>
@@ -1070,7 +1206,6 @@
             <a:defPPr/>
           </a:lstStyle>
           <a:p>
-            <a:pPr/>
             <a:endParaRPr lang="en-US"/>
           </a:p>
         </p:txBody>
@@ -1078,7 +1213,9 @@
       <p:sp>
         <p:nvSpPr>
           <p:cNvPr id="7" name="Slide Number Placeholder 6"/>
-          <p:cNvSpPr/>
+          <p:cNvSpPr>
+            <a:spLocks noGrp="1"/>
+          </p:cNvSpPr>
           <p:nvPr>
             <p:ph type="sldNum" sz="quarter" idx="12"/>
           </p:nvPr>
@@ -1090,7 +1227,6 @@
             <a:defPPr/>
           </a:lstStyle>
           <a:p>
-            <a:pPr/>
             <a:fld id="{93AE1883-0942-4AA3-9DB2-9C7C3A0314B1}" type="slidenum">
               <a:rPr lang="en-US" smtClean="0"/>
               <a:t>‹#›</a:t>
@@ -1127,7 +1263,9 @@
       <p:sp>
         <p:nvSpPr>
           <p:cNvPr id="2" name="Title 1"/>
-          <p:cNvSpPr/>
+          <p:cNvSpPr>
+            <a:spLocks noGrp="1"/>
+          </p:cNvSpPr>
           <p:nvPr>
             <p:ph type="title"/>
           </p:nvPr>
@@ -1140,19 +1278,19 @@
             <a:lvl1pPr/>
           </a:lstStyle>
           <a:p>
-            <a:pPr/>
-            <a:r>
-              <a:rPr lang="en-US" dirty="1" smtClean="0"/>
+            <a:r>
+              <a:rPr lang="en-US"/>
               <a:t>Click to edit Master title style</a:t>
             </a:r>
-            <a:endParaRPr lang="en-US"/>
           </a:p>
         </p:txBody>
       </p:sp>
       <p:sp>
         <p:nvSpPr>
           <p:cNvPr id="3" name="Text Placeholder 2"/>
-          <p:cNvSpPr/>
+          <p:cNvSpPr>
+            <a:spLocks noGrp="1"/>
+          </p:cNvSpPr>
           <p:nvPr>
             <p:ph type="body" idx="1"/>
           </p:nvPr>
@@ -1180,7 +1318,7 @@
           <a:p>
             <a:pPr lvl="0"/>
             <a:r>
-              <a:rPr lang="en-US" dirty="1" smtClean="0"/>
+              <a:rPr lang="en-US"/>
               <a:t>Click to edit Master text styles</a:t>
             </a:r>
           </a:p>
@@ -1189,9 +1327,11 @@
       <p:sp>
         <p:nvSpPr>
           <p:cNvPr id="4" name="Content Placeholder 3"/>
-          <p:cNvSpPr/>
+          <p:cNvSpPr>
+            <a:spLocks noGrp="1"/>
+          </p:cNvSpPr>
           <p:nvPr>
-            <p:ph type="obj" sz="half" idx="2"/>
+            <p:ph sz="half" idx="2"/>
           </p:nvPr>
         </p:nvSpPr>
         <p:spPr>
@@ -1217,45 +1357,46 @@
           <a:p>
             <a:pPr lvl="0"/>
             <a:r>
-              <a:rPr lang="en-US" dirty="1" smtClean="0"/>
+              <a:rPr lang="en-US"/>
               <a:t>Click to edit Master text styles</a:t>
             </a:r>
           </a:p>
           <a:p>
             <a:pPr lvl="1"/>
             <a:r>
-              <a:rPr lang="en-US" dirty="1" smtClean="0"/>
+              <a:rPr lang="en-US"/>
               <a:t>Second level</a:t>
             </a:r>
           </a:p>
           <a:p>
             <a:pPr lvl="2"/>
             <a:r>
-              <a:rPr lang="en-US" dirty="1" smtClean="0"/>
+              <a:rPr lang="en-US"/>
               <a:t>Third level</a:t>
             </a:r>
           </a:p>
           <a:p>
             <a:pPr lvl="3"/>
             <a:r>
-              <a:rPr lang="en-US" dirty="1" smtClean="0"/>
+              <a:rPr lang="en-US"/>
               <a:t>Fourth level</a:t>
             </a:r>
           </a:p>
           <a:p>
             <a:pPr lvl="4"/>
             <a:r>
-              <a:rPr lang="en-US" dirty="1" smtClean="0"/>
+              <a:rPr lang="en-US"/>
               <a:t>Fifth level</a:t>
             </a:r>
-            <a:endParaRPr lang="en-US"/>
           </a:p>
         </p:txBody>
       </p:sp>
       <p:sp>
         <p:nvSpPr>
           <p:cNvPr id="5" name="Text Placeholder 4"/>
-          <p:cNvSpPr/>
+          <p:cNvSpPr>
+            <a:spLocks noGrp="1"/>
+          </p:cNvSpPr>
           <p:nvPr>
             <p:ph type="body" sz="quarter" idx="3"/>
           </p:nvPr>
@@ -1283,7 +1424,7 @@
           <a:p>
             <a:pPr lvl="0"/>
             <a:r>
-              <a:rPr lang="en-US" dirty="1" smtClean="0"/>
+              <a:rPr lang="en-US"/>
               <a:t>Click to edit Master text styles</a:t>
             </a:r>
           </a:p>
@@ -1292,9 +1433,11 @@
       <p:sp>
         <p:nvSpPr>
           <p:cNvPr id="6" name="Content Placeholder 5"/>
-          <p:cNvSpPr/>
+          <p:cNvSpPr>
+            <a:spLocks noGrp="1"/>
+          </p:cNvSpPr>
           <p:nvPr>
-            <p:ph type="obj" sz="quarter" idx="4"/>
+            <p:ph sz="quarter" idx="4"/>
           </p:nvPr>
         </p:nvSpPr>
         <p:spPr>
@@ -1320,45 +1463,46 @@
           <a:p>
             <a:pPr lvl="0"/>
             <a:r>
-              <a:rPr lang="en-US" dirty="1" smtClean="0"/>
+              <a:rPr lang="en-US"/>
               <a:t>Click to edit Master text styles</a:t>
             </a:r>
           </a:p>
           <a:p>
             <a:pPr lvl="1"/>
             <a:r>
-              <a:rPr lang="en-US" dirty="1" smtClean="0"/>
+              <a:rPr lang="en-US"/>
               <a:t>Second level</a:t>
             </a:r>
           </a:p>
           <a:p>
             <a:pPr lvl="2"/>
             <a:r>
-              <a:rPr lang="en-US" dirty="1" smtClean="0"/>
+              <a:rPr lang="en-US"/>
               <a:t>Third level</a:t>
             </a:r>
           </a:p>
           <a:p>
             <a:pPr lvl="3"/>
             <a:r>
-              <a:rPr lang="en-US" dirty="1" smtClean="0"/>
+              <a:rPr lang="en-US"/>
               <a:t>Fourth level</a:t>
             </a:r>
           </a:p>
           <a:p>
             <a:pPr lvl="4"/>
             <a:r>
-              <a:rPr lang="en-US" dirty="1" smtClean="0"/>
+              <a:rPr lang="en-US"/>
               <a:t>Fifth level</a:t>
             </a:r>
-            <a:endParaRPr lang="en-US"/>
           </a:p>
         </p:txBody>
       </p:sp>
       <p:sp>
         <p:nvSpPr>
           <p:cNvPr id="7" name="Date Placeholder 6"/>
-          <p:cNvSpPr/>
+          <p:cNvSpPr>
+            <a:spLocks noGrp="1"/>
+          </p:cNvSpPr>
           <p:nvPr>
             <p:ph type="dt" sz="half" idx="10"/>
           </p:nvPr>
@@ -1370,10 +1514,9 @@
             <a:defPPr/>
           </a:lstStyle>
           <a:p>
-            <a:pPr/>
             <a:fld id="{E8FD0B7A-F5DD-4F40-B4CB-3B2C354B893A}" type="datetimeFigureOut">
               <a:rPr lang="en-US" smtClean="0"/>
-              <a:t>3/4/2014</a:t>
+              <a:t>10/16/2025</a:t>
             </a:fld>
             <a:endParaRPr lang="en-US"/>
           </a:p>
@@ -1382,7 +1525,9 @@
       <p:sp>
         <p:nvSpPr>
           <p:cNvPr id="8" name="Footer Placeholder 7"/>
-          <p:cNvSpPr/>
+          <p:cNvSpPr>
+            <a:spLocks noGrp="1"/>
+          </p:cNvSpPr>
           <p:nvPr>
             <p:ph type="ftr" sz="quarter" idx="11"/>
           </p:nvPr>
@@ -1394,7 +1539,6 @@
             <a:defPPr/>
           </a:lstStyle>
           <a:p>
-            <a:pPr/>
             <a:endParaRPr lang="en-US"/>
           </a:p>
         </p:txBody>
@@ -1402,7 +1546,9 @@
       <p:sp>
         <p:nvSpPr>
           <p:cNvPr id="9" name="Slide Number Placeholder 8"/>
-          <p:cNvSpPr/>
+          <p:cNvSpPr>
+            <a:spLocks noGrp="1"/>
+          </p:cNvSpPr>
           <p:nvPr>
             <p:ph type="sldNum" sz="quarter" idx="12"/>
           </p:nvPr>
@@ -1414,7 +1560,6 @@
             <a:defPPr/>
           </a:lstStyle>
           <a:p>
-            <a:pPr/>
             <a:fld id="{93AE1883-0942-4AA3-9DB2-9C7C3A0314B1}" type="slidenum">
               <a:rPr lang="en-US" smtClean="0"/>
               <a:t>‹#›</a:t>
@@ -1451,7 +1596,9 @@
       <p:sp>
         <p:nvSpPr>
           <p:cNvPr id="2" name="Title 1"/>
-          <p:cNvSpPr/>
+          <p:cNvSpPr>
+            <a:spLocks noGrp="1"/>
+          </p:cNvSpPr>
           <p:nvPr>
             <p:ph type="title"/>
           </p:nvPr>
@@ -1463,19 +1610,19 @@
             <a:defPPr/>
           </a:lstStyle>
           <a:p>
-            <a:pPr/>
-            <a:r>
-              <a:rPr lang="en-US" dirty="1" smtClean="0"/>
+            <a:r>
+              <a:rPr lang="en-US"/>
               <a:t>Click to edit Master title style</a:t>
             </a:r>
-            <a:endParaRPr lang="en-US"/>
           </a:p>
         </p:txBody>
       </p:sp>
       <p:sp>
         <p:nvSpPr>
           <p:cNvPr id="3" name="Date Placeholder 2"/>
-          <p:cNvSpPr/>
+          <p:cNvSpPr>
+            <a:spLocks noGrp="1"/>
+          </p:cNvSpPr>
           <p:nvPr>
             <p:ph type="dt" sz="half" idx="10"/>
           </p:nvPr>
@@ -1487,10 +1634,9 @@
             <a:defPPr/>
           </a:lstStyle>
           <a:p>
-            <a:pPr/>
             <a:fld id="{E8FD0B7A-F5DD-4F40-B4CB-3B2C354B893A}" type="datetimeFigureOut">
               <a:rPr lang="en-US" smtClean="0"/>
-              <a:t>3/4/2014</a:t>
+              <a:t>10/16/2025</a:t>
             </a:fld>
             <a:endParaRPr lang="en-US"/>
           </a:p>
@@ -1499,7 +1645,9 @@
       <p:sp>
         <p:nvSpPr>
           <p:cNvPr id="4" name="Footer Placeholder 3"/>
-          <p:cNvSpPr/>
+          <p:cNvSpPr>
+            <a:spLocks noGrp="1"/>
+          </p:cNvSpPr>
           <p:nvPr>
             <p:ph type="ftr" sz="quarter" idx="11"/>
           </p:nvPr>
@@ -1511,7 +1659,6 @@
             <a:defPPr/>
           </a:lstStyle>
           <a:p>
-            <a:pPr/>
             <a:endParaRPr lang="en-US"/>
           </a:p>
         </p:txBody>
@@ -1519,7 +1666,9 @@
       <p:sp>
         <p:nvSpPr>
           <p:cNvPr id="5" name="Slide Number Placeholder 4"/>
-          <p:cNvSpPr/>
+          <p:cNvSpPr>
+            <a:spLocks noGrp="1"/>
+          </p:cNvSpPr>
           <p:nvPr>
             <p:ph type="sldNum" sz="quarter" idx="12"/>
           </p:nvPr>
@@ -1531,7 +1680,6 @@
             <a:defPPr/>
           </a:lstStyle>
           <a:p>
-            <a:pPr/>
             <a:fld id="{93AE1883-0942-4AA3-9DB2-9C7C3A0314B1}" type="slidenum">
               <a:rPr lang="en-US" smtClean="0"/>
               <a:t>‹#›</a:t>
@@ -1568,7 +1716,9 @@
       <p:sp>
         <p:nvSpPr>
           <p:cNvPr id="2" name="Date Placeholder 1"/>
-          <p:cNvSpPr/>
+          <p:cNvSpPr>
+            <a:spLocks noGrp="1"/>
+          </p:cNvSpPr>
           <p:nvPr>
             <p:ph type="dt" sz="half" idx="10"/>
           </p:nvPr>
@@ -1580,10 +1730,9 @@
             <a:defPPr/>
           </a:lstStyle>
           <a:p>
-            <a:pPr/>
             <a:fld id="{E8FD0B7A-F5DD-4F40-B4CB-3B2C354B893A}" type="datetimeFigureOut">
               <a:rPr lang="en-US" smtClean="0"/>
-              <a:t>3/4/2014</a:t>
+              <a:t>10/16/2025</a:t>
             </a:fld>
             <a:endParaRPr lang="en-US"/>
           </a:p>
@@ -1592,7 +1741,9 @@
       <p:sp>
         <p:nvSpPr>
           <p:cNvPr id="3" name="Footer Placeholder 2"/>
-          <p:cNvSpPr/>
+          <p:cNvSpPr>
+            <a:spLocks noGrp="1"/>
+          </p:cNvSpPr>
           <p:nvPr>
             <p:ph type="ftr" sz="quarter" idx="11"/>
           </p:nvPr>
@@ -1604,7 +1755,6 @@
             <a:defPPr/>
           </a:lstStyle>
           <a:p>
-            <a:pPr/>
             <a:endParaRPr lang="en-US"/>
           </a:p>
         </p:txBody>
@@ -1612,7 +1762,9 @@
       <p:sp>
         <p:nvSpPr>
           <p:cNvPr id="4" name="Slide Number Placeholder 3"/>
-          <p:cNvSpPr/>
+          <p:cNvSpPr>
+            <a:spLocks noGrp="1"/>
+          </p:cNvSpPr>
           <p:nvPr>
             <p:ph type="sldNum" sz="quarter" idx="12"/>
           </p:nvPr>
@@ -1624,7 +1776,6 @@
             <a:defPPr/>
           </a:lstStyle>
           <a:p>
-            <a:pPr/>
             <a:fld id="{93AE1883-0942-4AA3-9DB2-9C7C3A0314B1}" type="slidenum">
               <a:rPr lang="en-US" smtClean="0"/>
               <a:t>‹#›</a:t>
@@ -1661,7 +1812,9 @@
       <p:sp>
         <p:nvSpPr>
           <p:cNvPr id="2" name="Title 1"/>
-          <p:cNvSpPr/>
+          <p:cNvSpPr>
+            <a:spLocks noGrp="1"/>
+          </p:cNvSpPr>
           <p:nvPr>
             <p:ph type="title"/>
           </p:nvPr>
@@ -1679,21 +1832,21 @@
             <a:lvl1pPr/>
           </a:lstStyle>
           <a:p>
-            <a:pPr/>
-            <a:r>
-              <a:rPr lang="en-US" dirty="1" smtClean="0"/>
+            <a:r>
+              <a:rPr lang="en-US"/>
               <a:t>Click to edit Master title style</a:t>
             </a:r>
-            <a:endParaRPr lang="en-US"/>
           </a:p>
         </p:txBody>
       </p:sp>
       <p:sp>
         <p:nvSpPr>
           <p:cNvPr id="3" name="Content Placeholder 2"/>
-          <p:cNvSpPr/>
+          <p:cNvSpPr>
+            <a:spLocks noGrp="1"/>
+          </p:cNvSpPr>
           <p:nvPr>
-            <p:ph type="obj" idx="1"/>
+            <p:ph idx="1"/>
           </p:nvPr>
         </p:nvSpPr>
         <p:spPr>
@@ -1719,45 +1872,46 @@
           <a:p>
             <a:pPr lvl="0"/>
             <a:r>
-              <a:rPr lang="en-US" dirty="1" smtClean="0"/>
+              <a:rPr lang="en-US"/>
               <a:t>Click to edit Master text styles</a:t>
             </a:r>
           </a:p>
           <a:p>
             <a:pPr lvl="1"/>
             <a:r>
-              <a:rPr lang="en-US" dirty="1" smtClean="0"/>
+              <a:rPr lang="en-US"/>
               <a:t>Second level</a:t>
             </a:r>
           </a:p>
           <a:p>
             <a:pPr lvl="2"/>
             <a:r>
-              <a:rPr lang="en-US" dirty="1" smtClean="0"/>
+              <a:rPr lang="en-US"/>
               <a:t>Third level</a:t>
             </a:r>
           </a:p>
           <a:p>
             <a:pPr lvl="3"/>
             <a:r>
-              <a:rPr lang="en-US" dirty="1" smtClean="0"/>
+              <a:rPr lang="en-US"/>
               <a:t>Fourth level</a:t>
             </a:r>
           </a:p>
           <a:p>
             <a:pPr lvl="4"/>
             <a:r>
-              <a:rPr lang="en-US" dirty="1" smtClean="0"/>
+              <a:rPr lang="en-US"/>
               <a:t>Fifth level</a:t>
             </a:r>
-            <a:endParaRPr lang="en-US"/>
           </a:p>
         </p:txBody>
       </p:sp>
       <p:sp>
         <p:nvSpPr>
           <p:cNvPr id="4" name="Text Placeholder 3"/>
-          <p:cNvSpPr/>
+          <p:cNvSpPr>
+            <a:spLocks noGrp="1"/>
+          </p:cNvSpPr>
           <p:nvPr>
             <p:ph type="body" sz="half" idx="2"/>
           </p:nvPr>
@@ -1785,7 +1939,7 @@
           <a:p>
             <a:pPr lvl="0"/>
             <a:r>
-              <a:rPr lang="en-US" dirty="1" smtClean="0"/>
+              <a:rPr lang="en-US"/>
               <a:t>Click to edit Master text styles</a:t>
             </a:r>
           </a:p>
@@ -1794,7 +1948,9 @@
       <p:sp>
         <p:nvSpPr>
           <p:cNvPr id="5" name="Date Placeholder 4"/>
-          <p:cNvSpPr/>
+          <p:cNvSpPr>
+            <a:spLocks noGrp="1"/>
+          </p:cNvSpPr>
           <p:nvPr>
             <p:ph type="dt" sz="half" idx="10"/>
           </p:nvPr>
@@ -1806,10 +1962,9 @@
             <a:defPPr/>
           </a:lstStyle>
           <a:p>
-            <a:pPr/>
             <a:fld id="{E8FD0B7A-F5DD-4F40-B4CB-3B2C354B893A}" type="datetimeFigureOut">
               <a:rPr lang="en-US" smtClean="0"/>
-              <a:t>3/4/2014</a:t>
+              <a:t>10/16/2025</a:t>
             </a:fld>
             <a:endParaRPr lang="en-US"/>
           </a:p>
@@ -1818,7 +1973,9 @@
       <p:sp>
         <p:nvSpPr>
           <p:cNvPr id="6" name="Footer Placeholder 5"/>
-          <p:cNvSpPr/>
+          <p:cNvSpPr>
+            <a:spLocks noGrp="1"/>
+          </p:cNvSpPr>
           <p:nvPr>
             <p:ph type="ftr" sz="quarter" idx="11"/>
           </p:nvPr>
@@ -1830,7 +1987,6 @@
             <a:defPPr/>
           </a:lstStyle>
           <a:p>
-            <a:pPr/>
             <a:endParaRPr lang="en-US"/>
           </a:p>
         </p:txBody>
@@ -1838,7 +1994,9 @@
       <p:sp>
         <p:nvSpPr>
           <p:cNvPr id="7" name="Slide Number Placeholder 6"/>
-          <p:cNvSpPr/>
+          <p:cNvSpPr>
+            <a:spLocks noGrp="1"/>
+          </p:cNvSpPr>
           <p:nvPr>
             <p:ph type="sldNum" sz="quarter" idx="12"/>
           </p:nvPr>
@@ -1850,7 +2008,6 @@
             <a:defPPr/>
           </a:lstStyle>
           <a:p>
-            <a:pPr/>
             <a:fld id="{93AE1883-0942-4AA3-9DB2-9C7C3A0314B1}" type="slidenum">
               <a:rPr lang="en-US" smtClean="0"/>
               <a:t>‹#›</a:t>
@@ -1887,7 +2044,9 @@
       <p:sp>
         <p:nvSpPr>
           <p:cNvPr id="2" name="Title 1"/>
-          <p:cNvSpPr/>
+          <p:cNvSpPr>
+            <a:spLocks noGrp="1"/>
+          </p:cNvSpPr>
           <p:nvPr>
             <p:ph type="title"/>
           </p:nvPr>
@@ -1905,19 +2064,19 @@
             <a:lvl1pPr/>
           </a:lstStyle>
           <a:p>
-            <a:pPr/>
-            <a:r>
-              <a:rPr lang="en-US" dirty="1" smtClean="0"/>
+            <a:r>
+              <a:rPr lang="en-US"/>
               <a:t>Click to edit Master title style</a:t>
             </a:r>
-            <a:endParaRPr lang="en-US"/>
           </a:p>
         </p:txBody>
       </p:sp>
       <p:sp>
         <p:nvSpPr>
           <p:cNvPr id="3" name="Picture Placeholder 2"/>
-          <p:cNvSpPr/>
+          <p:cNvSpPr>
+            <a:spLocks noGrp="1"/>
+          </p:cNvSpPr>
           <p:nvPr>
             <p:ph type="pic" idx="1"/>
           </p:nvPr>
@@ -1943,7 +2102,6 @@
             <a:lvl9pPr/>
           </a:lstStyle>
           <a:p>
-            <a:pPr/>
             <a:endParaRPr lang="en-US"/>
           </a:p>
         </p:txBody>
@@ -1951,7 +2109,9 @@
       <p:sp>
         <p:nvSpPr>
           <p:cNvPr id="4" name="Text Placeholder 3"/>
-          <p:cNvSpPr/>
+          <p:cNvSpPr>
+            <a:spLocks noGrp="1"/>
+          </p:cNvSpPr>
           <p:nvPr>
             <p:ph type="body" sz="half" idx="2"/>
           </p:nvPr>
@@ -1979,7 +2139,7 @@
           <a:p>
             <a:pPr lvl="0"/>
             <a:r>
-              <a:rPr lang="en-US" dirty="1" smtClean="0"/>
+              <a:rPr lang="en-US"/>
               <a:t>Click to edit Master text styles</a:t>
             </a:r>
           </a:p>
@@ -1988,7 +2148,9 @@
       <p:sp>
         <p:nvSpPr>
           <p:cNvPr id="5" name="Date Placeholder 4"/>
-          <p:cNvSpPr/>
+          <p:cNvSpPr>
+            <a:spLocks noGrp="1"/>
+          </p:cNvSpPr>
           <p:nvPr>
             <p:ph type="dt" sz="half" idx="10"/>
           </p:nvPr>
@@ -2000,10 +2162,9 @@
             <a:defPPr/>
           </a:lstStyle>
           <a:p>
-            <a:pPr/>
             <a:fld id="{E8FD0B7A-F5DD-4F40-B4CB-3B2C354B893A}" type="datetimeFigureOut">
               <a:rPr lang="en-US" smtClean="0"/>
-              <a:t>3/4/2014</a:t>
+              <a:t>10/16/2025</a:t>
             </a:fld>
             <a:endParaRPr lang="en-US"/>
           </a:p>
@@ -2012,7 +2173,9 @@
       <p:sp>
         <p:nvSpPr>
           <p:cNvPr id="6" name="Footer Placeholder 5"/>
-          <p:cNvSpPr/>
+          <p:cNvSpPr>
+            <a:spLocks noGrp="1"/>
+          </p:cNvSpPr>
           <p:nvPr>
             <p:ph type="ftr" sz="quarter" idx="11"/>
           </p:nvPr>
@@ -2024,7 +2187,6 @@
             <a:defPPr/>
           </a:lstStyle>
           <a:p>
-            <a:pPr/>
             <a:endParaRPr lang="en-US"/>
           </a:p>
         </p:txBody>
@@ -2032,7 +2194,9 @@
       <p:sp>
         <p:nvSpPr>
           <p:cNvPr id="7" name="Slide Number Placeholder 6"/>
-          <p:cNvSpPr/>
+          <p:cNvSpPr>
+            <a:spLocks noGrp="1"/>
+          </p:cNvSpPr>
           <p:nvPr>
             <p:ph type="sldNum" sz="quarter" idx="12"/>
           </p:nvPr>
@@ -2044,7 +2208,6 @@
             <a:defPPr/>
           </a:lstStyle>
           <a:p>
-            <a:pPr/>
             <a:fld id="{93AE1883-0942-4AA3-9DB2-9C7C3A0314B1}" type="slidenum">
               <a:rPr lang="en-US" smtClean="0"/>
               <a:t>‹#›</a:t>
@@ -2063,7 +2226,12 @@
 
 <file path=ppt/slideMasters/slideMaster1.xml><?xml version="1.0" encoding="utf-8"?>
 <p:sldMaster xmlns:a="http://schemas.openxmlformats.org/drawingml/2006/main" xmlns:r="http://schemas.openxmlformats.org/officeDocument/2006/relationships" xmlns:p="http://schemas.openxmlformats.org/presentationml/2006/main">
-  <p:cSld name="">
+  <p:cSld>
+    <p:bg>
+      <p:bgRef idx="1001">
+        <a:schemeClr val="bg1"/>
+      </p:bgRef>
+    </p:bg>
     <p:spTree>
       <p:nvGrpSpPr>
         <p:cNvPr id="1" name=""/>
@@ -2081,7 +2249,9 @@
       <p:sp>
         <p:nvSpPr>
           <p:cNvPr id="2" name="Title Placeholder 1"/>
-          <p:cNvSpPr/>
+          <p:cNvSpPr>
+            <a:spLocks noGrp="1"/>
+          </p:cNvSpPr>
           <p:nvPr>
             <p:ph type="title"/>
           </p:nvPr>
@@ -2091,7 +2261,9 @@
             <a:off x="457200" y="274638"/>
             <a:ext cx="8229600" cy="1143000"/>
           </a:xfrm>
-          <a:prstGeom prst="rect"/>
+          <a:prstGeom prst="rect">
+            <a:avLst/>
+          </a:prstGeom>
         </p:spPr>
         <p:txBody>
           <a:bodyPr lIns="91440" tIns="45720" rIns="91440" bIns="45720" rtlCol="0" anchor="ctr">
@@ -2101,19 +2273,19 @@
             <a:defPPr/>
           </a:lstStyle>
           <a:p>
-            <a:pPr/>
-            <a:r>
-              <a:rPr lang="en-US" dirty="1" smtClean="0"/>
+            <a:r>
+              <a:rPr lang="en-US"/>
               <a:t>Click to edit Master title style</a:t>
             </a:r>
-            <a:endParaRPr lang="en-US"/>
           </a:p>
         </p:txBody>
       </p:sp>
       <p:sp>
         <p:nvSpPr>
           <p:cNvPr id="3" name="Text Placeholder 2"/>
-          <p:cNvSpPr/>
+          <p:cNvSpPr>
+            <a:spLocks noGrp="1"/>
+          </p:cNvSpPr>
           <p:nvPr>
             <p:ph type="body" idx="1"/>
           </p:nvPr>
@@ -2123,7 +2295,9 @@
             <a:off x="457200" y="1600200"/>
             <a:ext cx="8229600" cy="4525963"/>
           </a:xfrm>
-          <a:prstGeom prst="rect"/>
+          <a:prstGeom prst="rect">
+            <a:avLst/>
+          </a:prstGeom>
         </p:spPr>
         <p:txBody>
           <a:bodyPr lIns="91440" tIns="45720" rIns="91440" bIns="45720" rtlCol="0">
@@ -2135,45 +2309,46 @@
           <a:p>
             <a:pPr lvl="0"/>
             <a:r>
-              <a:rPr lang="en-US" dirty="1" smtClean="0"/>
+              <a:rPr lang="en-US"/>
               <a:t>Click to edit Master text styles</a:t>
             </a:r>
           </a:p>
           <a:p>
             <a:pPr lvl="1"/>
             <a:r>
-              <a:rPr lang="en-US" dirty="1" smtClean="0"/>
+              <a:rPr lang="en-US"/>
               <a:t>Second level</a:t>
             </a:r>
           </a:p>
           <a:p>
             <a:pPr lvl="2"/>
             <a:r>
-              <a:rPr lang="en-US" dirty="1" smtClean="0"/>
+              <a:rPr lang="en-US"/>
               <a:t>Third level</a:t>
             </a:r>
           </a:p>
           <a:p>
             <a:pPr lvl="3"/>
             <a:r>
-              <a:rPr lang="en-US" dirty="1" smtClean="0"/>
+              <a:rPr lang="en-US"/>
               <a:t>Fourth level</a:t>
             </a:r>
           </a:p>
           <a:p>
             <a:pPr lvl="4"/>
             <a:r>
-              <a:rPr lang="en-US" dirty="1" smtClean="0"/>
+              <a:rPr lang="en-US"/>
               <a:t>Fifth level</a:t>
             </a:r>
-            <a:endParaRPr lang="en-US"/>
           </a:p>
         </p:txBody>
       </p:sp>
       <p:sp>
         <p:nvSpPr>
           <p:cNvPr id="4" name="Date Placeholder 3"/>
-          <p:cNvSpPr/>
+          <p:cNvSpPr>
+            <a:spLocks noGrp="1"/>
+          </p:cNvSpPr>
           <p:nvPr>
             <p:ph type="dt" sz="half" idx="2"/>
           </p:nvPr>
@@ -2183,7 +2358,9 @@
             <a:off x="457200" y="6356350"/>
             <a:ext cx="2133600" cy="365125"/>
           </a:xfrm>
-          <a:prstGeom prst="rect"/>
+          <a:prstGeom prst="rect">
+            <a:avLst/>
+          </a:prstGeom>
         </p:spPr>
         <p:txBody>
           <a:bodyPr lIns="91440" tIns="45720" rIns="91440" bIns="45720" rtlCol="0" anchor="ctr"/>
@@ -2192,10 +2369,9 @@
             <a:lvl1pPr/>
           </a:lstStyle>
           <a:p>
-            <a:pPr/>
             <a:fld id="{E8FD0B7A-F5DD-4F40-B4CB-3B2C354B893A}" type="datetimeFigureOut">
               <a:rPr lang="en-US" smtClean="0"/>
-              <a:t>3/4/2014</a:t>
+              <a:t>10/16/2025</a:t>
             </a:fld>
             <a:endParaRPr lang="en-US"/>
           </a:p>
@@ -2204,7 +2380,9 @@
       <p:sp>
         <p:nvSpPr>
           <p:cNvPr id="5" name="Footer Placeholder 4"/>
-          <p:cNvSpPr/>
+          <p:cNvSpPr>
+            <a:spLocks noGrp="1"/>
+          </p:cNvSpPr>
           <p:nvPr>
             <p:ph type="ftr" sz="quarter" idx="3"/>
           </p:nvPr>
@@ -2214,7 +2392,9 @@
             <a:off x="3124200" y="6356350"/>
             <a:ext cx="2895600" cy="365125"/>
           </a:xfrm>
-          <a:prstGeom prst="rect"/>
+          <a:prstGeom prst="rect">
+            <a:avLst/>
+          </a:prstGeom>
         </p:spPr>
         <p:txBody>
           <a:bodyPr lIns="91440" tIns="45720" rIns="91440" bIns="45720" rtlCol="0" anchor="ctr"/>
@@ -2223,7 +2403,6 @@
             <a:lvl1pPr/>
           </a:lstStyle>
           <a:p>
-            <a:pPr/>
             <a:endParaRPr lang="en-US"/>
           </a:p>
         </p:txBody>
@@ -2231,7 +2410,9 @@
       <p:sp>
         <p:nvSpPr>
           <p:cNvPr id="6" name="Slide Number Placeholder 5"/>
-          <p:cNvSpPr/>
+          <p:cNvSpPr>
+            <a:spLocks noGrp="1"/>
+          </p:cNvSpPr>
           <p:nvPr>
             <p:ph type="sldNum" sz="quarter" idx="4"/>
           </p:nvPr>
@@ -2241,7 +2422,9 @@
             <a:off x="6553200" y="6356350"/>
             <a:ext cx="2133600" cy="365125"/>
           </a:xfrm>
-          <a:prstGeom prst="rect"/>
+          <a:prstGeom prst="rect">
+            <a:avLst/>
+          </a:prstGeom>
         </p:spPr>
         <p:txBody>
           <a:bodyPr lIns="91440" tIns="45720" rIns="91440" bIns="45720" rtlCol="0" anchor="ctr"/>
@@ -2250,7 +2433,6 @@
             <a:lvl1pPr/>
           </a:lstStyle>
           <a:p>
-            <a:pPr/>
             <a:fld id="{93AE1883-0942-4AA3-9DB2-9C7C3A0314B1}" type="slidenum">
               <a:rPr lang="en-US" smtClean="0"/>
               <a:t>‹#›</a:t>
@@ -2275,12 +2457,292 @@
     <p:sldLayoutId id="2147483658" r:id="rId10"/>
     <p:sldLayoutId id="2147483659" r:id="rId11"/>
   </p:sldLayoutIdLst>
+  <p:txStyles>
+    <p:titleStyle>
+      <a:lvl1pPr algn="l" defTabSz="914400" rtl="0" eaLnBrk="1" latinLnBrk="0" hangingPunct="1">
+        <a:lnSpc>
+          <a:spcPct val="90000"/>
+        </a:lnSpc>
+        <a:spcBef>
+          <a:spcPct val="0"/>
+        </a:spcBef>
+        <a:buNone/>
+        <a:defRPr sz="4400" kern="1200">
+          <a:solidFill>
+            <a:schemeClr val="tx1"/>
+          </a:solidFill>
+          <a:latin typeface="+mj-lt"/>
+          <a:ea typeface="+mj-ea"/>
+          <a:cs typeface="+mj-cs"/>
+        </a:defRPr>
+      </a:lvl1pPr>
+    </p:titleStyle>
+    <p:bodyStyle>
+      <a:lvl1pPr marL="228600" indent="-228600" algn="l" defTabSz="914400" rtl="0" eaLnBrk="1" latinLnBrk="0" hangingPunct="1">
+        <a:lnSpc>
+          <a:spcPct val="90000"/>
+        </a:lnSpc>
+        <a:spcBef>
+          <a:spcPts val="1000"/>
+        </a:spcBef>
+        <a:buFont typeface="Arial" panose="020B0604020202020204" pitchFamily="34" charset="0"/>
+        <a:buChar char="•"/>
+        <a:defRPr sz="2800" kern="1200">
+          <a:solidFill>
+            <a:schemeClr val="tx1"/>
+          </a:solidFill>
+          <a:latin typeface="+mn-lt"/>
+          <a:ea typeface="+mn-ea"/>
+          <a:cs typeface="+mn-cs"/>
+        </a:defRPr>
+      </a:lvl1pPr>
+      <a:lvl2pPr marL="685800" indent="-228600" algn="l" defTabSz="914400" rtl="0" eaLnBrk="1" latinLnBrk="0" hangingPunct="1">
+        <a:lnSpc>
+          <a:spcPct val="90000"/>
+        </a:lnSpc>
+        <a:spcBef>
+          <a:spcPts val="500"/>
+        </a:spcBef>
+        <a:buFont typeface="Arial" panose="020B0604020202020204" pitchFamily="34" charset="0"/>
+        <a:buChar char="•"/>
+        <a:defRPr sz="2400" kern="1200">
+          <a:solidFill>
+            <a:schemeClr val="tx1"/>
+          </a:solidFill>
+          <a:latin typeface="+mn-lt"/>
+          <a:ea typeface="+mn-ea"/>
+          <a:cs typeface="+mn-cs"/>
+        </a:defRPr>
+      </a:lvl2pPr>
+      <a:lvl3pPr marL="1143000" indent="-228600" algn="l" defTabSz="914400" rtl="0" eaLnBrk="1" latinLnBrk="0" hangingPunct="1">
+        <a:lnSpc>
+          <a:spcPct val="90000"/>
+        </a:lnSpc>
+        <a:spcBef>
+          <a:spcPts val="500"/>
+        </a:spcBef>
+        <a:buFont typeface="Arial" panose="020B0604020202020204" pitchFamily="34" charset="0"/>
+        <a:buChar char="•"/>
+        <a:defRPr sz="2000" kern="1200">
+          <a:solidFill>
+            <a:schemeClr val="tx1"/>
+          </a:solidFill>
+          <a:latin typeface="+mn-lt"/>
+          <a:ea typeface="+mn-ea"/>
+          <a:cs typeface="+mn-cs"/>
+        </a:defRPr>
+      </a:lvl3pPr>
+      <a:lvl4pPr marL="1600200" indent="-228600" algn="l" defTabSz="914400" rtl="0" eaLnBrk="1" latinLnBrk="0" hangingPunct="1">
+        <a:lnSpc>
+          <a:spcPct val="90000"/>
+        </a:lnSpc>
+        <a:spcBef>
+          <a:spcPts val="500"/>
+        </a:spcBef>
+        <a:buFont typeface="Arial" panose="020B0604020202020204" pitchFamily="34" charset="0"/>
+        <a:buChar char="•"/>
+        <a:defRPr sz="1800" kern="1200">
+          <a:solidFill>
+            <a:schemeClr val="tx1"/>
+          </a:solidFill>
+          <a:latin typeface="+mn-lt"/>
+          <a:ea typeface="+mn-ea"/>
+          <a:cs typeface="+mn-cs"/>
+        </a:defRPr>
+      </a:lvl4pPr>
+      <a:lvl5pPr marL="2057400" indent="-228600" algn="l" defTabSz="914400" rtl="0" eaLnBrk="1" latinLnBrk="0" hangingPunct="1">
+        <a:lnSpc>
+          <a:spcPct val="90000"/>
+        </a:lnSpc>
+        <a:spcBef>
+          <a:spcPts val="500"/>
+        </a:spcBef>
+        <a:buFont typeface="Arial" panose="020B0604020202020204" pitchFamily="34" charset="0"/>
+        <a:buChar char="•"/>
+        <a:defRPr sz="1800" kern="1200">
+          <a:solidFill>
+            <a:schemeClr val="tx1"/>
+          </a:solidFill>
+          <a:latin typeface="+mn-lt"/>
+          <a:ea typeface="+mn-ea"/>
+          <a:cs typeface="+mn-cs"/>
+        </a:defRPr>
+      </a:lvl5pPr>
+      <a:lvl6pPr marL="2514600" indent="-228600" algn="l" defTabSz="914400" rtl="0" eaLnBrk="1" latinLnBrk="0" hangingPunct="1">
+        <a:lnSpc>
+          <a:spcPct val="90000"/>
+        </a:lnSpc>
+        <a:spcBef>
+          <a:spcPts val="500"/>
+        </a:spcBef>
+        <a:buFont typeface="Arial" panose="020B0604020202020204" pitchFamily="34" charset="0"/>
+        <a:buChar char="•"/>
+        <a:defRPr sz="1800" kern="1200">
+          <a:solidFill>
+            <a:schemeClr val="tx1"/>
+          </a:solidFill>
+          <a:latin typeface="+mn-lt"/>
+          <a:ea typeface="+mn-ea"/>
+          <a:cs typeface="+mn-cs"/>
+        </a:defRPr>
+      </a:lvl6pPr>
+      <a:lvl7pPr marL="2971800" indent="-228600" algn="l" defTabSz="914400" rtl="0" eaLnBrk="1" latinLnBrk="0" hangingPunct="1">
+        <a:lnSpc>
+          <a:spcPct val="90000"/>
+        </a:lnSpc>
+        <a:spcBef>
+          <a:spcPts val="500"/>
+        </a:spcBef>
+        <a:buFont typeface="Arial" panose="020B0604020202020204" pitchFamily="34" charset="0"/>
+        <a:buChar char="•"/>
+        <a:defRPr sz="1800" kern="1200">
+          <a:solidFill>
+            <a:schemeClr val="tx1"/>
+          </a:solidFill>
+          <a:latin typeface="+mn-lt"/>
+          <a:ea typeface="+mn-ea"/>
+          <a:cs typeface="+mn-cs"/>
+        </a:defRPr>
+      </a:lvl7pPr>
+      <a:lvl8pPr marL="3429000" indent="-228600" algn="l" defTabSz="914400" rtl="0" eaLnBrk="1" latinLnBrk="0" hangingPunct="1">
+        <a:lnSpc>
+          <a:spcPct val="90000"/>
+        </a:lnSpc>
+        <a:spcBef>
+          <a:spcPts val="500"/>
+        </a:spcBef>
+        <a:buFont typeface="Arial" panose="020B0604020202020204" pitchFamily="34" charset="0"/>
+        <a:buChar char="•"/>
+        <a:defRPr sz="1800" kern="1200">
+          <a:solidFill>
+            <a:schemeClr val="tx1"/>
+          </a:solidFill>
+          <a:latin typeface="+mn-lt"/>
+          <a:ea typeface="+mn-ea"/>
+          <a:cs typeface="+mn-cs"/>
+        </a:defRPr>
+      </a:lvl8pPr>
+      <a:lvl9pPr marL="3886200" indent="-228600" algn="l" defTabSz="914400" rtl="0" eaLnBrk="1" latinLnBrk="0" hangingPunct="1">
+        <a:lnSpc>
+          <a:spcPct val="90000"/>
+        </a:lnSpc>
+        <a:spcBef>
+          <a:spcPts val="500"/>
+        </a:spcBef>
+        <a:buFont typeface="Arial" panose="020B0604020202020204" pitchFamily="34" charset="0"/>
+        <a:buChar char="•"/>
+        <a:defRPr sz="1800" kern="1200">
+          <a:solidFill>
+            <a:schemeClr val="tx1"/>
+          </a:solidFill>
+          <a:latin typeface="+mn-lt"/>
+          <a:ea typeface="+mn-ea"/>
+          <a:cs typeface="+mn-cs"/>
+        </a:defRPr>
+      </a:lvl9pPr>
+    </p:bodyStyle>
+    <p:otherStyle>
+      <a:defPPr>
+        <a:defRPr lang="en-US"/>
+      </a:defPPr>
+      <a:lvl1pPr marL="0" algn="l" defTabSz="914400" rtl="0" eaLnBrk="1" latinLnBrk="0" hangingPunct="1">
+        <a:defRPr sz="1800" kern="1200">
+          <a:solidFill>
+            <a:schemeClr val="tx1"/>
+          </a:solidFill>
+          <a:latin typeface="+mn-lt"/>
+          <a:ea typeface="+mn-ea"/>
+          <a:cs typeface="+mn-cs"/>
+        </a:defRPr>
+      </a:lvl1pPr>
+      <a:lvl2pPr marL="457200" algn="l" defTabSz="914400" rtl="0" eaLnBrk="1" latinLnBrk="0" hangingPunct="1">
+        <a:defRPr sz="1800" kern="1200">
+          <a:solidFill>
+            <a:schemeClr val="tx1"/>
+          </a:solidFill>
+          <a:latin typeface="+mn-lt"/>
+          <a:ea typeface="+mn-ea"/>
+          <a:cs typeface="+mn-cs"/>
+        </a:defRPr>
+      </a:lvl2pPr>
+      <a:lvl3pPr marL="914400" algn="l" defTabSz="914400" rtl="0" eaLnBrk="1" latinLnBrk="0" hangingPunct="1">
+        <a:defRPr sz="1800" kern="1200">
+          <a:solidFill>
+            <a:schemeClr val="tx1"/>
+          </a:solidFill>
+          <a:latin typeface="+mn-lt"/>
+          <a:ea typeface="+mn-ea"/>
+          <a:cs typeface="+mn-cs"/>
+        </a:defRPr>
+      </a:lvl3pPr>
+      <a:lvl4pPr marL="1371600" algn="l" defTabSz="914400" rtl="0" eaLnBrk="1" latinLnBrk="0" hangingPunct="1">
+        <a:defRPr sz="1800" kern="1200">
+          <a:solidFill>
+            <a:schemeClr val="tx1"/>
+          </a:solidFill>
+          <a:latin typeface="+mn-lt"/>
+          <a:ea typeface="+mn-ea"/>
+          <a:cs typeface="+mn-cs"/>
+        </a:defRPr>
+      </a:lvl4pPr>
+      <a:lvl5pPr marL="1828800" algn="l" defTabSz="914400" rtl="0" eaLnBrk="1" latinLnBrk="0" hangingPunct="1">
+        <a:defRPr sz="1800" kern="1200">
+          <a:solidFill>
+            <a:schemeClr val="tx1"/>
+          </a:solidFill>
+          <a:latin typeface="+mn-lt"/>
+          <a:ea typeface="+mn-ea"/>
+          <a:cs typeface="+mn-cs"/>
+        </a:defRPr>
+      </a:lvl5pPr>
+      <a:lvl6pPr marL="2286000" algn="l" defTabSz="914400" rtl="0" eaLnBrk="1" latinLnBrk="0" hangingPunct="1">
+        <a:defRPr sz="1800" kern="1200">
+          <a:solidFill>
+            <a:schemeClr val="tx1"/>
+          </a:solidFill>
+          <a:latin typeface="+mn-lt"/>
+          <a:ea typeface="+mn-ea"/>
+          <a:cs typeface="+mn-cs"/>
+        </a:defRPr>
+      </a:lvl6pPr>
+      <a:lvl7pPr marL="2743200" algn="l" defTabSz="914400" rtl="0" eaLnBrk="1" latinLnBrk="0" hangingPunct="1">
+        <a:defRPr sz="1800" kern="1200">
+          <a:solidFill>
+            <a:schemeClr val="tx1"/>
+          </a:solidFill>
+          <a:latin typeface="+mn-lt"/>
+          <a:ea typeface="+mn-ea"/>
+          <a:cs typeface="+mn-cs"/>
+        </a:defRPr>
+      </a:lvl7pPr>
+      <a:lvl8pPr marL="3200400" algn="l" defTabSz="914400" rtl="0" eaLnBrk="1" latinLnBrk="0" hangingPunct="1">
+        <a:defRPr sz="1800" kern="1200">
+          <a:solidFill>
+            <a:schemeClr val="tx1"/>
+          </a:solidFill>
+          <a:latin typeface="+mn-lt"/>
+          <a:ea typeface="+mn-ea"/>
+          <a:cs typeface="+mn-cs"/>
+        </a:defRPr>
+      </a:lvl8pPr>
+      <a:lvl9pPr marL="3657600" algn="l" defTabSz="914400" rtl="0" eaLnBrk="1" latinLnBrk="0" hangingPunct="1">
+        <a:defRPr sz="1800" kern="1200">
+          <a:solidFill>
+            <a:schemeClr val="tx1"/>
+          </a:solidFill>
+          <a:latin typeface="+mn-lt"/>
+          <a:ea typeface="+mn-ea"/>
+          <a:cs typeface="+mn-cs"/>
+        </a:defRPr>
+      </a:lvl9pPr>
+    </p:otherStyle>
+  </p:txStyles>
 </p:sldMaster>
 </file>
 
 <file path=ppt/slides/slide1.xml><?xml version="1.0" encoding="utf-8"?>
 <p:sld xmlns:a="http://schemas.openxmlformats.org/drawingml/2006/main" xmlns:r="http://schemas.openxmlformats.org/officeDocument/2006/relationships" xmlns:p="http://schemas.openxmlformats.org/presentationml/2006/main">
-  <p:cSld name="">
+  <p:cSld>
     <p:spTree>
       <p:nvGrpSpPr>
         <p:cNvPr id="1" name=""/>
@@ -2297,52 +2759,6 @@
       </p:grpSpPr>
       <p:sp>
         <p:nvSpPr>
-          <p:cNvPr id="2" name="New shape"/>
-          <p:cNvSpPr/>
-          <p:nvPr/>
-        </p:nvSpPr>
-        <p:spPr>
-          <a:xfrm>
-            <a:off x="0" y="-1"/>
-            <a:ext cx="12192000" cy="6857999"/>
-          </a:xfrm>
-          <a:prstGeom prst="rect"/>
-          <a:solidFill>
-            <a:srgbClr val="FFFFFF"/>
-          </a:solidFill>
-          <a:ln w="0">
-            <a:noFill/>
-          </a:ln>
-        </p:spPr>
-        <p:style>
-          <a:lnRef idx="2">
-            <a:schemeClr val="accent1">
-              <a:shade val="50000"/>
-            </a:schemeClr>
-          </a:lnRef>
-          <a:fillRef idx="1">
-            <a:schemeClr val="accent1"/>
-          </a:fillRef>
-          <a:effectRef idx="0">
-            <a:schemeClr val="accent1"/>
-          </a:effectRef>
-          <a:fontRef idx="minor">
-            <a:schemeClr val="lt1"/>
-          </a:fontRef>
-        </p:style>
-        <p:txBody>
-          <a:bodyPr rtlCol="0" anchor="ctr"/>
-          <a:lstStyle>
-            <a:defPPr/>
-          </a:lstStyle>
-          <a:p>
-            <a:pPr/>
-            <a:endParaRPr lang="en-US"/>
-          </a:p>
-        </p:txBody>
-      </p:sp>
-      <p:sp>
-        <p:nvSpPr>
           <p:cNvPr id="3" name="New shape"/>
           <p:cNvSpPr/>
           <p:nvPr/>
@@ -2352,36 +2768,37 @@
             <a:off x="929640" y="703804"/>
             <a:ext cx="2217411" cy="683121"/>
           </a:xfrm>
-          <a:prstGeom prst="rect"/>
-          <a:noFill/>
-        </p:spPr>
-        <p:style>
-          <a:lnRef idx="2">
-            <a:srgbClr val="000000">
-              <a:alpha val="0"/>
-            </a:srgbClr>
-          </a:lnRef>
-          <a:fillRef idx="1">
-            <a:schemeClr val="accent1"/>
-          </a:fillRef>
-          <a:effectRef idx="0">
-            <a:schemeClr val="accent1"/>
-          </a:effectRef>
-          <a:fontRef idx="minor">
-            <a:schemeClr val="lt1"/>
-          </a:fontRef>
-        </p:style>
-        <p:txBody>
-          <a:bodyPr wrap="none" lIns="0" tIns="0" rtlCol="0" anchor="ctr">
-            <a:spAutoFit/>
-          </a:bodyPr>
-          <a:lstStyle>
-            <a:defPPr/>
-          </a:lstStyle>
-          <a:p>
-            <a:pPr/>
-            <a:r>
-              <a:rPr lang="en-US" sz="4406" dirty="1">
+          <a:prstGeom prst="rect">
+            <a:avLst/>
+          </a:prstGeom>
+          <a:noFill/>
+        </p:spPr>
+        <p:style>
+          <a:lnRef idx="2">
+            <a:srgbClr val="000000">
+              <a:alpha val="0"/>
+            </a:srgbClr>
+          </a:lnRef>
+          <a:fillRef idx="1">
+            <a:schemeClr val="accent1"/>
+          </a:fillRef>
+          <a:effectRef idx="0">
+            <a:schemeClr val="accent1"/>
+          </a:effectRef>
+          <a:fontRef idx="minor">
+            <a:schemeClr val="lt1"/>
+          </a:fontRef>
+        </p:style>
+        <p:txBody>
+          <a:bodyPr wrap="none" lIns="0" tIns="0" rtlCol="0" anchor="ctr">
+            <a:spAutoFit/>
+          </a:bodyPr>
+          <a:lstStyle>
+            <a:defPPr/>
+          </a:lstStyle>
+          <a:p>
+            <a:r>
+              <a:rPr lang="en-US" sz="4406">
                 <a:solidFill>
                   <a:srgbClr val="00AFEF"/>
                 </a:solidFill>
@@ -2394,12 +2811,15 @@
       </p:sp>
     </p:spTree>
   </p:cSld>
+  <p:clrMapOvr>
+    <a:masterClrMapping/>
+  </p:clrMapOvr>
 </p:sld>
 </file>
 
 <file path=ppt/slides/slide10.xml><?xml version="1.0" encoding="utf-8"?>
 <p:sld xmlns:a="http://schemas.openxmlformats.org/drawingml/2006/main" xmlns:r="http://schemas.openxmlformats.org/officeDocument/2006/relationships" xmlns:p="http://schemas.openxmlformats.org/presentationml/2006/main">
-  <p:cSld name="">
+  <p:cSld>
     <p:spTree>
       <p:nvGrpSpPr>
         <p:cNvPr id="1" name=""/>
@@ -2416,52 +2836,6 @@
       </p:grpSpPr>
       <p:sp>
         <p:nvSpPr>
-          <p:cNvPr id="2" name="New shape"/>
-          <p:cNvSpPr/>
-          <p:nvPr/>
-        </p:nvSpPr>
-        <p:spPr>
-          <a:xfrm>
-            <a:off x="0" y="-1"/>
-            <a:ext cx="12192000" cy="6857999"/>
-          </a:xfrm>
-          <a:prstGeom prst="rect"/>
-          <a:solidFill>
-            <a:srgbClr val="FFFFFF"/>
-          </a:solidFill>
-          <a:ln w="0">
-            <a:noFill/>
-          </a:ln>
-        </p:spPr>
-        <p:style>
-          <a:lnRef idx="2">
-            <a:schemeClr val="accent1">
-              <a:shade val="50000"/>
-            </a:schemeClr>
-          </a:lnRef>
-          <a:fillRef idx="1">
-            <a:schemeClr val="accent1"/>
-          </a:fillRef>
-          <a:effectRef idx="0">
-            <a:schemeClr val="accent1"/>
-          </a:effectRef>
-          <a:fontRef idx="minor">
-            <a:schemeClr val="lt1"/>
-          </a:fontRef>
-        </p:style>
-        <p:txBody>
-          <a:bodyPr rtlCol="0" anchor="ctr"/>
-          <a:lstStyle>
-            <a:defPPr/>
-          </a:lstStyle>
-          <a:p>
-            <a:pPr/>
-            <a:endParaRPr lang="en-US"/>
-          </a:p>
-        </p:txBody>
-      </p:sp>
-      <p:sp>
-        <p:nvSpPr>
           <p:cNvPr id="3" name="New shape"/>
           <p:cNvSpPr/>
           <p:nvPr/>
@@ -2471,36 +2845,37 @@
             <a:off x="929640" y="703804"/>
             <a:ext cx="2217411" cy="683121"/>
           </a:xfrm>
-          <a:prstGeom prst="rect"/>
-          <a:noFill/>
-        </p:spPr>
-        <p:style>
-          <a:lnRef idx="2">
-            <a:srgbClr val="000000">
-              <a:alpha val="0"/>
-            </a:srgbClr>
-          </a:lnRef>
-          <a:fillRef idx="1">
-            <a:schemeClr val="accent1"/>
-          </a:fillRef>
-          <a:effectRef idx="0">
-            <a:schemeClr val="accent1"/>
-          </a:effectRef>
-          <a:fontRef idx="minor">
-            <a:schemeClr val="lt1"/>
-          </a:fontRef>
-        </p:style>
-        <p:txBody>
-          <a:bodyPr wrap="none" lIns="0" tIns="0" rtlCol="0" anchor="ctr">
-            <a:spAutoFit/>
-          </a:bodyPr>
-          <a:lstStyle>
-            <a:defPPr/>
-          </a:lstStyle>
-          <a:p>
-            <a:pPr/>
-            <a:r>
-              <a:rPr lang="en-US" sz="4406" dirty="1">
+          <a:prstGeom prst="rect">
+            <a:avLst/>
+          </a:prstGeom>
+          <a:noFill/>
+        </p:spPr>
+        <p:style>
+          <a:lnRef idx="2">
+            <a:srgbClr val="000000">
+              <a:alpha val="0"/>
+            </a:srgbClr>
+          </a:lnRef>
+          <a:fillRef idx="1">
+            <a:schemeClr val="accent1"/>
+          </a:fillRef>
+          <a:effectRef idx="0">
+            <a:schemeClr val="accent1"/>
+          </a:effectRef>
+          <a:fontRef idx="minor">
+            <a:schemeClr val="lt1"/>
+          </a:fontRef>
+        </p:style>
+        <p:txBody>
+          <a:bodyPr wrap="none" lIns="0" tIns="0" rtlCol="0" anchor="ctr">
+            <a:spAutoFit/>
+          </a:bodyPr>
+          <a:lstStyle>
+            <a:defPPr/>
+          </a:lstStyle>
+          <a:p>
+            <a:r>
+              <a:rPr lang="en-US" sz="4406">
                 <a:solidFill>
                   <a:srgbClr val="00AFEF"/>
                 </a:solidFill>
@@ -2522,36 +2897,37 @@
             <a:off x="929640" y="1885563"/>
             <a:ext cx="137570" cy="439610"/>
           </a:xfrm>
-          <a:prstGeom prst="rect"/>
-          <a:noFill/>
-        </p:spPr>
-        <p:style>
-          <a:lnRef idx="2">
-            <a:srgbClr val="000000">
-              <a:alpha val="0"/>
-            </a:srgbClr>
-          </a:lnRef>
-          <a:fillRef idx="1">
-            <a:schemeClr val="accent1"/>
-          </a:fillRef>
-          <a:effectRef idx="0">
-            <a:schemeClr val="accent1"/>
-          </a:effectRef>
-          <a:fontRef idx="minor">
-            <a:schemeClr val="lt1"/>
-          </a:fontRef>
-        </p:style>
-        <p:txBody>
-          <a:bodyPr wrap="none" lIns="0" tIns="0" rtlCol="0" anchor="ctr">
-            <a:spAutoFit/>
-          </a:bodyPr>
-          <a:lstStyle>
-            <a:defPPr/>
-          </a:lstStyle>
-          <a:p>
-            <a:pPr/>
-            <a:r>
-              <a:rPr lang="en-US" sz="3098" dirty="1">
+          <a:prstGeom prst="rect">
+            <a:avLst/>
+          </a:prstGeom>
+          <a:noFill/>
+        </p:spPr>
+        <p:style>
+          <a:lnRef idx="2">
+            <a:srgbClr val="000000">
+              <a:alpha val="0"/>
+            </a:srgbClr>
+          </a:lnRef>
+          <a:fillRef idx="1">
+            <a:schemeClr val="accent1"/>
+          </a:fillRef>
+          <a:effectRef idx="0">
+            <a:schemeClr val="accent1"/>
+          </a:effectRef>
+          <a:fontRef idx="minor">
+            <a:schemeClr val="lt1"/>
+          </a:fontRef>
+        </p:style>
+        <p:txBody>
+          <a:bodyPr wrap="none" lIns="0" tIns="0" rtlCol="0" anchor="ctr">
+            <a:spAutoFit/>
+          </a:bodyPr>
+          <a:lstStyle>
+            <a:defPPr/>
+          </a:lstStyle>
+          <a:p>
+            <a:r>
+              <a:rPr lang="en-US" sz="3098">
                 <a:solidFill>
                   <a:srgbClr val="000000"/>
                 </a:solidFill>
@@ -2573,36 +2949,37 @@
             <a:off x="1158240" y="1857050"/>
             <a:ext cx="4086949" cy="480343"/>
           </a:xfrm>
-          <a:prstGeom prst="rect"/>
-          <a:noFill/>
-        </p:spPr>
-        <p:style>
-          <a:lnRef idx="2">
-            <a:srgbClr val="000000">
-              <a:alpha val="0"/>
-            </a:srgbClr>
-          </a:lnRef>
-          <a:fillRef idx="1">
-            <a:schemeClr val="accent1"/>
-          </a:fillRef>
-          <a:effectRef idx="0">
-            <a:schemeClr val="accent1"/>
-          </a:effectRef>
-          <a:fontRef idx="minor">
-            <a:schemeClr val="lt1"/>
-          </a:fontRef>
-        </p:style>
-        <p:txBody>
-          <a:bodyPr wrap="none" lIns="0" tIns="0" rtlCol="0" anchor="ctr">
-            <a:spAutoFit/>
-          </a:bodyPr>
-          <a:lstStyle>
-            <a:defPPr/>
-          </a:lstStyle>
-          <a:p>
-            <a:pPr/>
-            <a:r>
-              <a:rPr lang="en-US" sz="3098" dirty="1">
+          <a:prstGeom prst="rect">
+            <a:avLst/>
+          </a:prstGeom>
+          <a:noFill/>
+        </p:spPr>
+        <p:style>
+          <a:lnRef idx="2">
+            <a:srgbClr val="000000">
+              <a:alpha val="0"/>
+            </a:srgbClr>
+          </a:lnRef>
+          <a:fillRef idx="1">
+            <a:schemeClr val="accent1"/>
+          </a:fillRef>
+          <a:effectRef idx="0">
+            <a:schemeClr val="accent1"/>
+          </a:effectRef>
+          <a:fontRef idx="minor">
+            <a:schemeClr val="lt1"/>
+          </a:fontRef>
+        </p:style>
+        <p:txBody>
+          <a:bodyPr wrap="none" lIns="0" tIns="0" rtlCol="0" anchor="ctr">
+            <a:spAutoFit/>
+          </a:bodyPr>
+          <a:lstStyle>
+            <a:defPPr/>
+          </a:lstStyle>
+          <a:p>
+            <a:r>
+              <a:rPr lang="en-US" sz="3098">
                 <a:solidFill>
                   <a:srgbClr val="000000"/>
                 </a:solidFill>
@@ -2624,36 +3001,37 @@
             <a:off x="5234051" y="1857050"/>
             <a:ext cx="3172760" cy="480343"/>
           </a:xfrm>
-          <a:prstGeom prst="rect"/>
-          <a:noFill/>
-        </p:spPr>
-        <p:style>
-          <a:lnRef idx="2">
-            <a:srgbClr val="000000">
-              <a:alpha val="0"/>
-            </a:srgbClr>
-          </a:lnRef>
-          <a:fillRef idx="1">
-            <a:schemeClr val="accent1"/>
-          </a:fillRef>
-          <a:effectRef idx="0">
-            <a:schemeClr val="accent1"/>
-          </a:effectRef>
-          <a:fontRef idx="minor">
-            <a:schemeClr val="lt1"/>
-          </a:fontRef>
-        </p:style>
-        <p:txBody>
-          <a:bodyPr wrap="none" lIns="0" tIns="0" rtlCol="0" anchor="ctr">
-            <a:spAutoFit/>
-          </a:bodyPr>
-          <a:lstStyle>
-            <a:defPPr/>
-          </a:lstStyle>
-          <a:p>
-            <a:pPr/>
-            <a:r>
-              <a:rPr lang="en-US" sz="3098" b="1" dirty="1">
+          <a:prstGeom prst="rect">
+            <a:avLst/>
+          </a:prstGeom>
+          <a:noFill/>
+        </p:spPr>
+        <p:style>
+          <a:lnRef idx="2">
+            <a:srgbClr val="000000">
+              <a:alpha val="0"/>
+            </a:srgbClr>
+          </a:lnRef>
+          <a:fillRef idx="1">
+            <a:schemeClr val="accent1"/>
+          </a:fillRef>
+          <a:effectRef idx="0">
+            <a:schemeClr val="accent1"/>
+          </a:effectRef>
+          <a:fontRef idx="minor">
+            <a:schemeClr val="lt1"/>
+          </a:fontRef>
+        </p:style>
+        <p:txBody>
+          <a:bodyPr wrap="none" lIns="0" tIns="0" rtlCol="0" anchor="ctr">
+            <a:spAutoFit/>
+          </a:bodyPr>
+          <a:lstStyle>
+            <a:defPPr/>
+          </a:lstStyle>
+          <a:p>
+            <a:r>
+              <a:rPr lang="en-US" sz="3098" b="1">
                 <a:solidFill>
                   <a:srgbClr val="000000"/>
                 </a:solidFill>
@@ -2675,36 +3053,37 @@
             <a:off x="8481949" y="1857050"/>
             <a:ext cx="2447827" cy="480343"/>
           </a:xfrm>
-          <a:prstGeom prst="rect"/>
-          <a:noFill/>
-        </p:spPr>
-        <p:style>
-          <a:lnRef idx="2">
-            <a:srgbClr val="000000">
-              <a:alpha val="0"/>
-            </a:srgbClr>
-          </a:lnRef>
-          <a:fillRef idx="1">
-            <a:schemeClr val="accent1"/>
-          </a:fillRef>
-          <a:effectRef idx="0">
-            <a:schemeClr val="accent1"/>
-          </a:effectRef>
-          <a:fontRef idx="minor">
-            <a:schemeClr val="lt1"/>
-          </a:fontRef>
-        </p:style>
-        <p:txBody>
-          <a:bodyPr wrap="none" lIns="0" tIns="0" rtlCol="0" anchor="ctr">
-            <a:spAutoFit/>
-          </a:bodyPr>
-          <a:lstStyle>
-            <a:defPPr/>
-          </a:lstStyle>
-          <a:p>
-            <a:pPr/>
-            <a:r>
-              <a:rPr lang="en-US" sz="3098" dirty="1">
+          <a:prstGeom prst="rect">
+            <a:avLst/>
+          </a:prstGeom>
+          <a:noFill/>
+        </p:spPr>
+        <p:style>
+          <a:lnRef idx="2">
+            <a:srgbClr val="000000">
+              <a:alpha val="0"/>
+            </a:srgbClr>
+          </a:lnRef>
+          <a:fillRef idx="1">
+            <a:schemeClr val="accent1"/>
+          </a:fillRef>
+          <a:effectRef idx="0">
+            <a:schemeClr val="accent1"/>
+          </a:effectRef>
+          <a:fontRef idx="minor">
+            <a:schemeClr val="lt1"/>
+          </a:fontRef>
+        </p:style>
+        <p:txBody>
+          <a:bodyPr wrap="none" lIns="0" tIns="0" rtlCol="0" anchor="ctr">
+            <a:spAutoFit/>
+          </a:bodyPr>
+          <a:lstStyle>
+            <a:defPPr/>
+          </a:lstStyle>
+          <a:p>
+            <a:r>
+              <a:rPr lang="en-US" sz="3098">
                 <a:solidFill>
                   <a:srgbClr val="000000"/>
                 </a:solidFill>
@@ -2726,36 +3105,37 @@
             <a:off x="1158240" y="2282887"/>
             <a:ext cx="1433576" cy="479971"/>
           </a:xfrm>
-          <a:prstGeom prst="rect"/>
-          <a:noFill/>
-        </p:spPr>
-        <p:style>
-          <a:lnRef idx="2">
-            <a:srgbClr val="000000">
-              <a:alpha val="0"/>
-            </a:srgbClr>
-          </a:lnRef>
-          <a:fillRef idx="1">
-            <a:schemeClr val="accent1"/>
-          </a:fillRef>
-          <a:effectRef idx="0">
-            <a:schemeClr val="accent1"/>
-          </a:effectRef>
-          <a:fontRef idx="minor">
-            <a:schemeClr val="lt1"/>
-          </a:fontRef>
-        </p:style>
-        <p:txBody>
-          <a:bodyPr wrap="none" lIns="0" tIns="0" rtlCol="0" anchor="ctr">
-            <a:spAutoFit/>
-          </a:bodyPr>
-          <a:lstStyle>
-            <a:defPPr/>
-          </a:lstStyle>
-          <a:p>
-            <a:pPr/>
-            <a:r>
-              <a:rPr lang="en-US" sz="3096" dirty="1">
+          <a:prstGeom prst="rect">
+            <a:avLst/>
+          </a:prstGeom>
+          <a:noFill/>
+        </p:spPr>
+        <p:style>
+          <a:lnRef idx="2">
+            <a:srgbClr val="000000">
+              <a:alpha val="0"/>
+            </a:srgbClr>
+          </a:lnRef>
+          <a:fillRef idx="1">
+            <a:schemeClr val="accent1"/>
+          </a:fillRef>
+          <a:effectRef idx="0">
+            <a:schemeClr val="accent1"/>
+          </a:effectRef>
+          <a:fontRef idx="minor">
+            <a:schemeClr val="lt1"/>
+          </a:fontRef>
+        </p:style>
+        <p:txBody>
+          <a:bodyPr wrap="none" lIns="0" tIns="0" rtlCol="0" anchor="ctr">
+            <a:spAutoFit/>
+          </a:bodyPr>
+          <a:lstStyle>
+            <a:defPPr/>
+          </a:lstStyle>
+          <a:p>
+            <a:r>
+              <a:rPr lang="en-US" sz="3096">
                 <a:solidFill>
                   <a:srgbClr val="000000"/>
                 </a:solidFill>
@@ -2777,36 +3157,37 @@
             <a:off x="929640" y="3414516"/>
             <a:ext cx="137570" cy="439610"/>
           </a:xfrm>
-          <a:prstGeom prst="rect"/>
-          <a:noFill/>
-        </p:spPr>
-        <p:style>
-          <a:lnRef idx="2">
-            <a:srgbClr val="000000">
-              <a:alpha val="0"/>
-            </a:srgbClr>
-          </a:lnRef>
-          <a:fillRef idx="1">
-            <a:schemeClr val="accent1"/>
-          </a:fillRef>
-          <a:effectRef idx="0">
-            <a:schemeClr val="accent1"/>
-          </a:effectRef>
-          <a:fontRef idx="minor">
-            <a:schemeClr val="lt1"/>
-          </a:fontRef>
-        </p:style>
-        <p:txBody>
-          <a:bodyPr wrap="none" lIns="0" tIns="0" rtlCol="0" anchor="ctr">
-            <a:spAutoFit/>
-          </a:bodyPr>
-          <a:lstStyle>
-            <a:defPPr/>
-          </a:lstStyle>
-          <a:p>
-            <a:pPr/>
-            <a:r>
-              <a:rPr lang="en-US" sz="3098" dirty="1">
+          <a:prstGeom prst="rect">
+            <a:avLst/>
+          </a:prstGeom>
+          <a:noFill/>
+        </p:spPr>
+        <p:style>
+          <a:lnRef idx="2">
+            <a:srgbClr val="000000">
+              <a:alpha val="0"/>
+            </a:srgbClr>
+          </a:lnRef>
+          <a:fillRef idx="1">
+            <a:schemeClr val="accent1"/>
+          </a:fillRef>
+          <a:effectRef idx="0">
+            <a:schemeClr val="accent1"/>
+          </a:effectRef>
+          <a:fontRef idx="minor">
+            <a:schemeClr val="lt1"/>
+          </a:fontRef>
+        </p:style>
+        <p:txBody>
+          <a:bodyPr wrap="none" lIns="0" tIns="0" rtlCol="0" anchor="ctr">
+            <a:spAutoFit/>
+          </a:bodyPr>
+          <a:lstStyle>
+            <a:defPPr/>
+          </a:lstStyle>
+          <a:p>
+            <a:r>
+              <a:rPr lang="en-US" sz="3098">
                 <a:solidFill>
                   <a:srgbClr val="000000"/>
                 </a:solidFill>
@@ -2828,36 +3209,37 @@
             <a:off x="1158240" y="3386003"/>
             <a:ext cx="9951549" cy="480343"/>
           </a:xfrm>
-          <a:prstGeom prst="rect"/>
-          <a:noFill/>
-        </p:spPr>
-        <p:style>
-          <a:lnRef idx="2">
-            <a:srgbClr val="000000">
-              <a:alpha val="0"/>
-            </a:srgbClr>
-          </a:lnRef>
-          <a:fillRef idx="1">
-            <a:schemeClr val="accent1"/>
-          </a:fillRef>
-          <a:effectRef idx="0">
-            <a:schemeClr val="accent1"/>
-          </a:effectRef>
-          <a:fontRef idx="minor">
-            <a:schemeClr val="lt1"/>
-          </a:fontRef>
-        </p:style>
-        <p:txBody>
-          <a:bodyPr wrap="none" lIns="0" tIns="0" rtlCol="0" anchor="ctr">
-            <a:spAutoFit/>
-          </a:bodyPr>
-          <a:lstStyle>
-            <a:defPPr/>
-          </a:lstStyle>
-          <a:p>
-            <a:pPr/>
-            <a:r>
-              <a:rPr lang="en-US" sz="3098" dirty="1">
+          <a:prstGeom prst="rect">
+            <a:avLst/>
+          </a:prstGeom>
+          <a:noFill/>
+        </p:spPr>
+        <p:style>
+          <a:lnRef idx="2">
+            <a:srgbClr val="000000">
+              <a:alpha val="0"/>
+            </a:srgbClr>
+          </a:lnRef>
+          <a:fillRef idx="1">
+            <a:schemeClr val="accent1"/>
+          </a:fillRef>
+          <a:effectRef idx="0">
+            <a:schemeClr val="accent1"/>
+          </a:effectRef>
+          <a:fontRef idx="minor">
+            <a:schemeClr val="lt1"/>
+          </a:fontRef>
+        </p:style>
+        <p:txBody>
+          <a:bodyPr wrap="none" lIns="0" tIns="0" rtlCol="0" anchor="ctr">
+            <a:spAutoFit/>
+          </a:bodyPr>
+          <a:lstStyle>
+            <a:defPPr/>
+          </a:lstStyle>
+          <a:p>
+            <a:r>
+              <a:rPr lang="en-US" sz="3098">
                 <a:solidFill>
                   <a:srgbClr val="000000"/>
                 </a:solidFill>
@@ -2879,36 +3261,37 @@
             <a:off x="1158240" y="3811713"/>
             <a:ext cx="1601566" cy="479971"/>
           </a:xfrm>
-          <a:prstGeom prst="rect"/>
-          <a:noFill/>
-        </p:spPr>
-        <p:style>
-          <a:lnRef idx="2">
-            <a:srgbClr val="000000">
-              <a:alpha val="0"/>
-            </a:srgbClr>
-          </a:lnRef>
-          <a:fillRef idx="1">
-            <a:schemeClr val="accent1"/>
-          </a:fillRef>
-          <a:effectRef idx="0">
-            <a:schemeClr val="accent1"/>
-          </a:effectRef>
-          <a:fontRef idx="minor">
-            <a:schemeClr val="lt1"/>
-          </a:fontRef>
-        </p:style>
-        <p:txBody>
-          <a:bodyPr wrap="none" lIns="0" tIns="0" rtlCol="0" anchor="ctr">
-            <a:spAutoFit/>
-          </a:bodyPr>
-          <a:lstStyle>
-            <a:defPPr/>
-          </a:lstStyle>
-          <a:p>
-            <a:pPr/>
-            <a:r>
-              <a:rPr lang="en-US" sz="3096" dirty="1">
+          <a:prstGeom prst="rect">
+            <a:avLst/>
+          </a:prstGeom>
+          <a:noFill/>
+        </p:spPr>
+        <p:style>
+          <a:lnRef idx="2">
+            <a:srgbClr val="000000">
+              <a:alpha val="0"/>
+            </a:srgbClr>
+          </a:lnRef>
+          <a:fillRef idx="1">
+            <a:schemeClr val="accent1"/>
+          </a:fillRef>
+          <a:effectRef idx="0">
+            <a:schemeClr val="accent1"/>
+          </a:effectRef>
+          <a:fontRef idx="minor">
+            <a:schemeClr val="lt1"/>
+          </a:fontRef>
+        </p:style>
+        <p:txBody>
+          <a:bodyPr wrap="none" lIns="0" tIns="0" rtlCol="0" anchor="ctr">
+            <a:spAutoFit/>
+          </a:bodyPr>
+          <a:lstStyle>
+            <a:defPPr/>
+          </a:lstStyle>
+          <a:p>
+            <a:r>
+              <a:rPr lang="en-US" sz="3096">
                 <a:solidFill>
                   <a:srgbClr val="000000"/>
                 </a:solidFill>
@@ -2930,36 +3313,37 @@
             <a:off x="1387094" y="4327590"/>
             <a:ext cx="119881" cy="383084"/>
           </a:xfrm>
-          <a:prstGeom prst="rect"/>
-          <a:noFill/>
-        </p:spPr>
-        <p:style>
-          <a:lnRef idx="2">
-            <a:srgbClr val="000000">
-              <a:alpha val="0"/>
-            </a:srgbClr>
-          </a:lnRef>
-          <a:fillRef idx="1">
-            <a:schemeClr val="accent1"/>
-          </a:fillRef>
-          <a:effectRef idx="0">
-            <a:schemeClr val="accent1"/>
-          </a:effectRef>
-          <a:fontRef idx="minor">
-            <a:schemeClr val="lt1"/>
-          </a:fontRef>
-        </p:style>
-        <p:txBody>
-          <a:bodyPr wrap="none" lIns="0" tIns="0" rtlCol="0" anchor="ctr">
-            <a:spAutoFit/>
-          </a:bodyPr>
-          <a:lstStyle>
-            <a:defPPr/>
-          </a:lstStyle>
-          <a:p>
-            <a:pPr/>
-            <a:r>
-              <a:rPr lang="en-US" sz="2700" dirty="1">
+          <a:prstGeom prst="rect">
+            <a:avLst/>
+          </a:prstGeom>
+          <a:noFill/>
+        </p:spPr>
+        <p:style>
+          <a:lnRef idx="2">
+            <a:srgbClr val="000000">
+              <a:alpha val="0"/>
+            </a:srgbClr>
+          </a:lnRef>
+          <a:fillRef idx="1">
+            <a:schemeClr val="accent1"/>
+          </a:fillRef>
+          <a:effectRef idx="0">
+            <a:schemeClr val="accent1"/>
+          </a:effectRef>
+          <a:fontRef idx="minor">
+            <a:schemeClr val="lt1"/>
+          </a:fontRef>
+        </p:style>
+        <p:txBody>
+          <a:bodyPr wrap="none" lIns="0" tIns="0" rtlCol="0" anchor="ctr">
+            <a:spAutoFit/>
+          </a:bodyPr>
+          <a:lstStyle>
+            <a:defPPr/>
+          </a:lstStyle>
+          <a:p>
+            <a:r>
+              <a:rPr lang="en-US" sz="2700">
                 <a:solidFill>
                   <a:srgbClr val="000000"/>
                 </a:solidFill>
@@ -2981,36 +3365,37 @@
             <a:off x="1615694" y="4302744"/>
             <a:ext cx="594885" cy="418579"/>
           </a:xfrm>
-          <a:prstGeom prst="rect"/>
-          <a:noFill/>
-        </p:spPr>
-        <p:style>
-          <a:lnRef idx="2">
-            <a:srgbClr val="000000">
-              <a:alpha val="0"/>
-            </a:srgbClr>
-          </a:lnRef>
-          <a:fillRef idx="1">
-            <a:schemeClr val="accent1"/>
-          </a:fillRef>
-          <a:effectRef idx="0">
-            <a:schemeClr val="accent1"/>
-          </a:effectRef>
-          <a:fontRef idx="minor">
-            <a:schemeClr val="lt1"/>
-          </a:fontRef>
-        </p:style>
-        <p:txBody>
-          <a:bodyPr wrap="none" lIns="0" tIns="0" rtlCol="0" anchor="ctr">
-            <a:spAutoFit/>
-          </a:bodyPr>
-          <a:lstStyle>
-            <a:defPPr/>
-          </a:lstStyle>
-          <a:p>
-            <a:pPr/>
-            <a:r>
-              <a:rPr lang="en-US" sz="2700" dirty="1">
+          <a:prstGeom prst="rect">
+            <a:avLst/>
+          </a:prstGeom>
+          <a:noFill/>
+        </p:spPr>
+        <p:style>
+          <a:lnRef idx="2">
+            <a:srgbClr val="000000">
+              <a:alpha val="0"/>
+            </a:srgbClr>
+          </a:lnRef>
+          <a:fillRef idx="1">
+            <a:schemeClr val="accent1"/>
+          </a:fillRef>
+          <a:effectRef idx="0">
+            <a:schemeClr val="accent1"/>
+          </a:effectRef>
+          <a:fontRef idx="minor">
+            <a:schemeClr val="lt1"/>
+          </a:fontRef>
+        </p:style>
+        <p:txBody>
+          <a:bodyPr wrap="none" lIns="0" tIns="0" rtlCol="0" anchor="ctr">
+            <a:spAutoFit/>
+          </a:bodyPr>
+          <a:lstStyle>
+            <a:defPPr/>
+          </a:lstStyle>
+          <a:p>
+            <a:r>
+              <a:rPr lang="en-US" sz="2700">
                 <a:solidFill>
                   <a:srgbClr val="000000"/>
                 </a:solidFill>
@@ -3032,36 +3417,37 @@
             <a:off x="2210054" y="4302744"/>
             <a:ext cx="1342299" cy="418579"/>
           </a:xfrm>
-          <a:prstGeom prst="rect"/>
-          <a:noFill/>
-        </p:spPr>
-        <p:style>
-          <a:lnRef idx="2">
-            <a:srgbClr val="000000">
-              <a:alpha val="0"/>
-            </a:srgbClr>
-          </a:lnRef>
-          <a:fillRef idx="1">
-            <a:schemeClr val="accent1"/>
-          </a:fillRef>
-          <a:effectRef idx="0">
-            <a:schemeClr val="accent1"/>
-          </a:effectRef>
-          <a:fontRef idx="minor">
-            <a:schemeClr val="lt1"/>
-          </a:fontRef>
-        </p:style>
-        <p:txBody>
-          <a:bodyPr wrap="none" lIns="0" tIns="0" rtlCol="0" anchor="ctr">
-            <a:spAutoFit/>
-          </a:bodyPr>
-          <a:lstStyle>
-            <a:defPPr/>
-          </a:lstStyle>
-          <a:p>
-            <a:pPr/>
-            <a:r>
-              <a:rPr lang="en-US" sz="2700" i="1" dirty="1">
+          <a:prstGeom prst="rect">
+            <a:avLst/>
+          </a:prstGeom>
+          <a:noFill/>
+        </p:spPr>
+        <p:style>
+          <a:lnRef idx="2">
+            <a:srgbClr val="000000">
+              <a:alpha val="0"/>
+            </a:srgbClr>
+          </a:lnRef>
+          <a:fillRef idx="1">
+            <a:schemeClr val="accent1"/>
+          </a:fillRef>
+          <a:effectRef idx="0">
+            <a:schemeClr val="accent1"/>
+          </a:effectRef>
+          <a:fontRef idx="minor">
+            <a:schemeClr val="lt1"/>
+          </a:fontRef>
+        </p:style>
+        <p:txBody>
+          <a:bodyPr wrap="none" lIns="0" tIns="0" rtlCol="0" anchor="ctr">
+            <a:spAutoFit/>
+          </a:bodyPr>
+          <a:lstStyle>
+            <a:defPPr/>
+          </a:lstStyle>
+          <a:p>
+            <a:r>
+              <a:rPr lang="en-US" sz="2700" i="1">
                 <a:solidFill>
                   <a:srgbClr val="000000"/>
                 </a:solidFill>
@@ -3083,36 +3469,37 @@
             <a:off x="3552698" y="4302744"/>
             <a:ext cx="7193533" cy="418579"/>
           </a:xfrm>
-          <a:prstGeom prst="rect"/>
-          <a:noFill/>
-        </p:spPr>
-        <p:style>
-          <a:lnRef idx="2">
-            <a:srgbClr val="000000">
-              <a:alpha val="0"/>
-            </a:srgbClr>
-          </a:lnRef>
-          <a:fillRef idx="1">
-            <a:schemeClr val="accent1"/>
-          </a:fillRef>
-          <a:effectRef idx="0">
-            <a:schemeClr val="accent1"/>
-          </a:effectRef>
-          <a:fontRef idx="minor">
-            <a:schemeClr val="lt1"/>
-          </a:fontRef>
-        </p:style>
-        <p:txBody>
-          <a:bodyPr wrap="none" lIns="0" tIns="0" rtlCol="0" anchor="ctr">
-            <a:spAutoFit/>
-          </a:bodyPr>
-          <a:lstStyle>
-            <a:defPPr/>
-          </a:lstStyle>
-          <a:p>
-            <a:pPr/>
-            <a:r>
-              <a:rPr lang="en-US" sz="2700" dirty="1">
+          <a:prstGeom prst="rect">
+            <a:avLst/>
+          </a:prstGeom>
+          <a:noFill/>
+        </p:spPr>
+        <p:style>
+          <a:lnRef idx="2">
+            <a:srgbClr val="000000">
+              <a:alpha val="0"/>
+            </a:srgbClr>
+          </a:lnRef>
+          <a:fillRef idx="1">
+            <a:schemeClr val="accent1"/>
+          </a:fillRef>
+          <a:effectRef idx="0">
+            <a:schemeClr val="accent1"/>
+          </a:effectRef>
+          <a:fontRef idx="minor">
+            <a:schemeClr val="lt1"/>
+          </a:fontRef>
+        </p:style>
+        <p:txBody>
+          <a:bodyPr wrap="none" lIns="0" tIns="0" rtlCol="0" anchor="ctr">
+            <a:spAutoFit/>
+          </a:bodyPr>
+          <a:lstStyle>
+            <a:defPPr/>
+          </a:lstStyle>
+          <a:p>
+            <a:r>
+              <a:rPr lang="en-US" sz="2700">
                 <a:solidFill>
                   <a:srgbClr val="000000"/>
                 </a:solidFill>
@@ -3134,36 +3521,37 @@
             <a:off x="1615694" y="4672815"/>
             <a:ext cx="1151110" cy="418951"/>
           </a:xfrm>
-          <a:prstGeom prst="rect"/>
-          <a:noFill/>
-        </p:spPr>
-        <p:style>
-          <a:lnRef idx="2">
-            <a:srgbClr val="000000">
-              <a:alpha val="0"/>
-            </a:srgbClr>
-          </a:lnRef>
-          <a:fillRef idx="1">
-            <a:schemeClr val="accent1"/>
-          </a:fillRef>
-          <a:effectRef idx="0">
-            <a:schemeClr val="accent1"/>
-          </a:effectRef>
-          <a:fontRef idx="minor">
-            <a:schemeClr val="lt1"/>
-          </a:fontRef>
-        </p:style>
-        <p:txBody>
-          <a:bodyPr wrap="none" lIns="0" tIns="0" rtlCol="0" anchor="ctr">
-            <a:spAutoFit/>
-          </a:bodyPr>
-          <a:lstStyle>
-            <a:defPPr/>
-          </a:lstStyle>
-          <a:p>
-            <a:pPr/>
-            <a:r>
-              <a:rPr lang="en-US" sz="2702" dirty="1">
+          <a:prstGeom prst="rect">
+            <a:avLst/>
+          </a:prstGeom>
+          <a:noFill/>
+        </p:spPr>
+        <p:style>
+          <a:lnRef idx="2">
+            <a:srgbClr val="000000">
+              <a:alpha val="0"/>
+            </a:srgbClr>
+          </a:lnRef>
+          <a:fillRef idx="1">
+            <a:schemeClr val="accent1"/>
+          </a:fillRef>
+          <a:effectRef idx="0">
+            <a:schemeClr val="accent1"/>
+          </a:effectRef>
+          <a:fontRef idx="minor">
+            <a:schemeClr val="lt1"/>
+          </a:fontRef>
+        </p:style>
+        <p:txBody>
+          <a:bodyPr wrap="none" lIns="0" tIns="0" rtlCol="0" anchor="ctr">
+            <a:spAutoFit/>
+          </a:bodyPr>
+          <a:lstStyle>
+            <a:defPPr/>
+          </a:lstStyle>
+          <a:p>
+            <a:r>
+              <a:rPr lang="en-US" sz="2702">
                 <a:solidFill>
                   <a:srgbClr val="000000"/>
                 </a:solidFill>
@@ -3185,36 +3573,37 @@
             <a:off x="1387094" y="5132643"/>
             <a:ext cx="119881" cy="383084"/>
           </a:xfrm>
-          <a:prstGeom prst="rect"/>
-          <a:noFill/>
-        </p:spPr>
-        <p:style>
-          <a:lnRef idx="2">
-            <a:srgbClr val="000000">
-              <a:alpha val="0"/>
-            </a:srgbClr>
-          </a:lnRef>
-          <a:fillRef idx="1">
-            <a:schemeClr val="accent1"/>
-          </a:fillRef>
-          <a:effectRef idx="0">
-            <a:schemeClr val="accent1"/>
-          </a:effectRef>
-          <a:fontRef idx="minor">
-            <a:schemeClr val="lt1"/>
-          </a:fontRef>
-        </p:style>
-        <p:txBody>
-          <a:bodyPr wrap="none" lIns="0" tIns="0" rtlCol="0" anchor="ctr">
-            <a:spAutoFit/>
-          </a:bodyPr>
-          <a:lstStyle>
-            <a:defPPr/>
-          </a:lstStyle>
-          <a:p>
-            <a:pPr/>
-            <a:r>
-              <a:rPr lang="en-US" sz="2700" dirty="1">
+          <a:prstGeom prst="rect">
+            <a:avLst/>
+          </a:prstGeom>
+          <a:noFill/>
+        </p:spPr>
+        <p:style>
+          <a:lnRef idx="2">
+            <a:srgbClr val="000000">
+              <a:alpha val="0"/>
+            </a:srgbClr>
+          </a:lnRef>
+          <a:fillRef idx="1">
+            <a:schemeClr val="accent1"/>
+          </a:fillRef>
+          <a:effectRef idx="0">
+            <a:schemeClr val="accent1"/>
+          </a:effectRef>
+          <a:fontRef idx="minor">
+            <a:schemeClr val="lt1"/>
+          </a:fontRef>
+        </p:style>
+        <p:txBody>
+          <a:bodyPr wrap="none" lIns="0" tIns="0" rtlCol="0" anchor="ctr">
+            <a:spAutoFit/>
+          </a:bodyPr>
+          <a:lstStyle>
+            <a:defPPr/>
+          </a:lstStyle>
+          <a:p>
+            <a:r>
+              <a:rPr lang="en-US" sz="2700">
                 <a:solidFill>
                   <a:srgbClr val="000000"/>
                 </a:solidFill>
@@ -3236,36 +3625,37 @@
             <a:off x="1615694" y="5107797"/>
             <a:ext cx="594885" cy="418579"/>
           </a:xfrm>
-          <a:prstGeom prst="rect"/>
-          <a:noFill/>
-        </p:spPr>
-        <p:style>
-          <a:lnRef idx="2">
-            <a:srgbClr val="000000">
-              <a:alpha val="0"/>
-            </a:srgbClr>
-          </a:lnRef>
-          <a:fillRef idx="1">
-            <a:schemeClr val="accent1"/>
-          </a:fillRef>
-          <a:effectRef idx="0">
-            <a:schemeClr val="accent1"/>
-          </a:effectRef>
-          <a:fontRef idx="minor">
-            <a:schemeClr val="lt1"/>
-          </a:fontRef>
-        </p:style>
-        <p:txBody>
-          <a:bodyPr wrap="none" lIns="0" tIns="0" rtlCol="0" anchor="ctr">
-            <a:spAutoFit/>
-          </a:bodyPr>
-          <a:lstStyle>
-            <a:defPPr/>
-          </a:lstStyle>
-          <a:p>
-            <a:pPr/>
-            <a:r>
-              <a:rPr lang="en-US" sz="2700" dirty="1">
+          <a:prstGeom prst="rect">
+            <a:avLst/>
+          </a:prstGeom>
+          <a:noFill/>
+        </p:spPr>
+        <p:style>
+          <a:lnRef idx="2">
+            <a:srgbClr val="000000">
+              <a:alpha val="0"/>
+            </a:srgbClr>
+          </a:lnRef>
+          <a:fillRef idx="1">
+            <a:schemeClr val="accent1"/>
+          </a:fillRef>
+          <a:effectRef idx="0">
+            <a:schemeClr val="accent1"/>
+          </a:effectRef>
+          <a:fontRef idx="minor">
+            <a:schemeClr val="lt1"/>
+          </a:fontRef>
+        </p:style>
+        <p:txBody>
+          <a:bodyPr wrap="none" lIns="0" tIns="0" rtlCol="0" anchor="ctr">
+            <a:spAutoFit/>
+          </a:bodyPr>
+          <a:lstStyle>
+            <a:defPPr/>
+          </a:lstStyle>
+          <a:p>
+            <a:r>
+              <a:rPr lang="en-US" sz="2700">
                 <a:solidFill>
                   <a:srgbClr val="000000"/>
                 </a:solidFill>
@@ -3287,36 +3677,37 @@
             <a:off x="2210054" y="5107797"/>
             <a:ext cx="1939193" cy="418579"/>
           </a:xfrm>
-          <a:prstGeom prst="rect"/>
-          <a:noFill/>
-        </p:spPr>
-        <p:style>
-          <a:lnRef idx="2">
-            <a:srgbClr val="000000">
-              <a:alpha val="0"/>
-            </a:srgbClr>
-          </a:lnRef>
-          <a:fillRef idx="1">
-            <a:schemeClr val="accent1"/>
-          </a:fillRef>
-          <a:effectRef idx="0">
-            <a:schemeClr val="accent1"/>
-          </a:effectRef>
-          <a:fontRef idx="minor">
-            <a:schemeClr val="lt1"/>
-          </a:fontRef>
-        </p:style>
-        <p:txBody>
-          <a:bodyPr wrap="none" lIns="0" tIns="0" rtlCol="0" anchor="ctr">
-            <a:spAutoFit/>
-          </a:bodyPr>
-          <a:lstStyle>
-            <a:defPPr/>
-          </a:lstStyle>
-          <a:p>
-            <a:pPr/>
-            <a:r>
-              <a:rPr lang="en-US" sz="2700" i="1" dirty="1">
+          <a:prstGeom prst="rect">
+            <a:avLst/>
+          </a:prstGeom>
+          <a:noFill/>
+        </p:spPr>
+        <p:style>
+          <a:lnRef idx="2">
+            <a:srgbClr val="000000">
+              <a:alpha val="0"/>
+            </a:srgbClr>
+          </a:lnRef>
+          <a:fillRef idx="1">
+            <a:schemeClr val="accent1"/>
+          </a:fillRef>
+          <a:effectRef idx="0">
+            <a:schemeClr val="accent1"/>
+          </a:effectRef>
+          <a:fontRef idx="minor">
+            <a:schemeClr val="lt1"/>
+          </a:fontRef>
+        </p:style>
+        <p:txBody>
+          <a:bodyPr wrap="none" lIns="0" tIns="0" rtlCol="0" anchor="ctr">
+            <a:spAutoFit/>
+          </a:bodyPr>
+          <a:lstStyle>
+            <a:defPPr/>
+          </a:lstStyle>
+          <a:p>
+            <a:r>
+              <a:rPr lang="en-US" sz="2700" i="1">
                 <a:solidFill>
                   <a:srgbClr val="000000"/>
                 </a:solidFill>
@@ -3335,57 +3726,61 @@
         </p:nvSpPr>
         <p:spPr>
           <a:xfrm>
-            <a:off x="4148963" y="5107797"/>
-            <a:ext cx="6825016" cy="418579"/>
-          </a:xfrm>
-          <a:prstGeom prst="rect"/>
-          <a:noFill/>
-        </p:spPr>
-        <p:style>
-          <a:lnRef idx="2">
-            <a:srgbClr val="000000">
-              <a:alpha val="0"/>
-            </a:srgbClr>
-          </a:lnRef>
-          <a:fillRef idx="1">
-            <a:schemeClr val="accent1"/>
-          </a:fillRef>
-          <a:effectRef idx="0">
-            <a:schemeClr val="accent1"/>
-          </a:effectRef>
-          <a:fontRef idx="minor">
-            <a:schemeClr val="lt1"/>
-          </a:fontRef>
-        </p:style>
-        <p:txBody>
-          <a:bodyPr wrap="none" lIns="0" tIns="0" rtlCol="0" anchor="ctr">
-            <a:spAutoFit/>
-          </a:bodyPr>
-          <a:lstStyle>
-            <a:defPPr/>
-          </a:lstStyle>
-          <a:p>
-            <a:pPr/>
-            <a:r>
-              <a:rPr lang="en-US" sz="2700" dirty="1">
+            <a:off x="4148963" y="5086254"/>
+            <a:ext cx="5757217" cy="461665"/>
+          </a:xfrm>
+          <a:prstGeom prst="rect">
+            <a:avLst/>
+          </a:prstGeom>
+          <a:noFill/>
+        </p:spPr>
+        <p:style>
+          <a:lnRef idx="2">
+            <a:srgbClr val="000000">
+              <a:alpha val="0"/>
+            </a:srgbClr>
+          </a:lnRef>
+          <a:fillRef idx="1">
+            <a:schemeClr val="accent1"/>
+          </a:fillRef>
+          <a:effectRef idx="0">
+            <a:schemeClr val="accent1"/>
+          </a:effectRef>
+          <a:fontRef idx="minor">
+            <a:schemeClr val="lt1"/>
+          </a:fontRef>
+        </p:style>
+        <p:txBody>
+          <a:bodyPr wrap="none" lIns="0" tIns="0" rtlCol="0" anchor="ctr">
+            <a:spAutoFit/>
+          </a:bodyPr>
+          <a:lstStyle>
+            <a:defPPr/>
+          </a:lstStyle>
+          <a:p>
+            <a:r>
+              <a:rPr lang="en-US" sz="2700" dirty="0">
                 <a:solidFill>
                   <a:srgbClr val="000000"/>
                 </a:solidFill>
                 <a:latin typeface="Calibri"/>
               </a:rPr>
-              <a:t>, which is where the recursion will actually occur.</a:t>
+              <a:t>, which is where the recursion will occur.</a:t>
             </a:r>
           </a:p>
         </p:txBody>
       </p:sp>
     </p:spTree>
   </p:cSld>
+  <p:clrMapOvr>
+    <a:masterClrMapping/>
+  </p:clrMapOvr>
 </p:sld>
 </file>
 
 <file path=ppt/slides/slide2.xml><?xml version="1.0" encoding="utf-8"?>
 <p:sld xmlns:a="http://schemas.openxmlformats.org/drawingml/2006/main" xmlns:r="http://schemas.openxmlformats.org/officeDocument/2006/relationships" xmlns:p="http://schemas.openxmlformats.org/presentationml/2006/main">
-  <p:cSld name="">
+  <p:cSld>
     <p:spTree>
       <p:nvGrpSpPr>
         <p:cNvPr id="1" name=""/>
@@ -3402,52 +3797,6 @@
       </p:grpSpPr>
       <p:sp>
         <p:nvSpPr>
-          <p:cNvPr id="2" name="New shape"/>
-          <p:cNvSpPr/>
-          <p:nvPr/>
-        </p:nvSpPr>
-        <p:spPr>
-          <a:xfrm>
-            <a:off x="0" y="-1"/>
-            <a:ext cx="12192000" cy="6857999"/>
-          </a:xfrm>
-          <a:prstGeom prst="rect"/>
-          <a:solidFill>
-            <a:srgbClr val="FFFFFF"/>
-          </a:solidFill>
-          <a:ln w="0">
-            <a:noFill/>
-          </a:ln>
-        </p:spPr>
-        <p:style>
-          <a:lnRef idx="2">
-            <a:schemeClr val="accent1">
-              <a:shade val="50000"/>
-            </a:schemeClr>
-          </a:lnRef>
-          <a:fillRef idx="1">
-            <a:schemeClr val="accent1"/>
-          </a:fillRef>
-          <a:effectRef idx="0">
-            <a:schemeClr val="accent1"/>
-          </a:effectRef>
-          <a:fontRef idx="minor">
-            <a:schemeClr val="lt1"/>
-          </a:fontRef>
-        </p:style>
-        <p:txBody>
-          <a:bodyPr rtlCol="0" anchor="ctr"/>
-          <a:lstStyle>
-            <a:defPPr/>
-          </a:lstStyle>
-          <a:p>
-            <a:pPr/>
-            <a:endParaRPr lang="en-US"/>
-          </a:p>
-        </p:txBody>
-      </p:sp>
-      <p:sp>
-        <p:nvSpPr>
           <p:cNvPr id="3" name="New shape"/>
           <p:cNvSpPr/>
           <p:nvPr/>
@@ -3457,36 +3806,37 @@
             <a:off x="929640" y="703804"/>
             <a:ext cx="2217411" cy="683121"/>
           </a:xfrm>
-          <a:prstGeom prst="rect"/>
-          <a:noFill/>
-        </p:spPr>
-        <p:style>
-          <a:lnRef idx="2">
-            <a:srgbClr val="000000">
-              <a:alpha val="0"/>
-            </a:srgbClr>
-          </a:lnRef>
-          <a:fillRef idx="1">
-            <a:schemeClr val="accent1"/>
-          </a:fillRef>
-          <a:effectRef idx="0">
-            <a:schemeClr val="accent1"/>
-          </a:effectRef>
-          <a:fontRef idx="minor">
-            <a:schemeClr val="lt1"/>
-          </a:fontRef>
-        </p:style>
-        <p:txBody>
-          <a:bodyPr wrap="none" lIns="0" tIns="0" rtlCol="0" anchor="ctr">
-            <a:spAutoFit/>
-          </a:bodyPr>
-          <a:lstStyle>
-            <a:defPPr/>
-          </a:lstStyle>
-          <a:p>
-            <a:pPr/>
-            <a:r>
-              <a:rPr lang="en-US" sz="4406" dirty="1">
+          <a:prstGeom prst="rect">
+            <a:avLst/>
+          </a:prstGeom>
+          <a:noFill/>
+        </p:spPr>
+        <p:style>
+          <a:lnRef idx="2">
+            <a:srgbClr val="000000">
+              <a:alpha val="0"/>
+            </a:srgbClr>
+          </a:lnRef>
+          <a:fillRef idx="1">
+            <a:schemeClr val="accent1"/>
+          </a:fillRef>
+          <a:effectRef idx="0">
+            <a:schemeClr val="accent1"/>
+          </a:effectRef>
+          <a:fontRef idx="minor">
+            <a:schemeClr val="lt1"/>
+          </a:fontRef>
+        </p:style>
+        <p:txBody>
+          <a:bodyPr wrap="none" lIns="0" tIns="0" rtlCol="0" anchor="ctr">
+            <a:spAutoFit/>
+          </a:bodyPr>
+          <a:lstStyle>
+            <a:defPPr/>
+          </a:lstStyle>
+          <a:p>
+            <a:r>
+              <a:rPr lang="en-US" sz="4406">
                 <a:solidFill>
                   <a:srgbClr val="00AFEF"/>
                 </a:solidFill>
@@ -3508,36 +3858,37 @@
             <a:off x="929640" y="1885563"/>
             <a:ext cx="137570" cy="439610"/>
           </a:xfrm>
-          <a:prstGeom prst="rect"/>
-          <a:noFill/>
-        </p:spPr>
-        <p:style>
-          <a:lnRef idx="2">
-            <a:srgbClr val="000000">
-              <a:alpha val="0"/>
-            </a:srgbClr>
-          </a:lnRef>
-          <a:fillRef idx="1">
-            <a:schemeClr val="accent1"/>
-          </a:fillRef>
-          <a:effectRef idx="0">
-            <a:schemeClr val="accent1"/>
-          </a:effectRef>
-          <a:fontRef idx="minor">
-            <a:schemeClr val="lt1"/>
-          </a:fontRef>
-        </p:style>
-        <p:txBody>
-          <a:bodyPr wrap="none" lIns="0" tIns="0" rtlCol="0" anchor="ctr">
-            <a:spAutoFit/>
-          </a:bodyPr>
-          <a:lstStyle>
-            <a:defPPr/>
-          </a:lstStyle>
-          <a:p>
-            <a:pPr/>
-            <a:r>
-              <a:rPr lang="en-US" sz="3098" dirty="1">
+          <a:prstGeom prst="rect">
+            <a:avLst/>
+          </a:prstGeom>
+          <a:noFill/>
+        </p:spPr>
+        <p:style>
+          <a:lnRef idx="2">
+            <a:srgbClr val="000000">
+              <a:alpha val="0"/>
+            </a:srgbClr>
+          </a:lnRef>
+          <a:fillRef idx="1">
+            <a:schemeClr val="accent1"/>
+          </a:fillRef>
+          <a:effectRef idx="0">
+            <a:schemeClr val="accent1"/>
+          </a:effectRef>
+          <a:fontRef idx="minor">
+            <a:schemeClr val="lt1"/>
+          </a:fontRef>
+        </p:style>
+        <p:txBody>
+          <a:bodyPr wrap="none" lIns="0" tIns="0" rtlCol="0" anchor="ctr">
+            <a:spAutoFit/>
+          </a:bodyPr>
+          <a:lstStyle>
+            <a:defPPr/>
+          </a:lstStyle>
+          <a:p>
+            <a:r>
+              <a:rPr lang="en-US" sz="3098">
                 <a:solidFill>
                   <a:srgbClr val="000000"/>
                 </a:solidFill>
@@ -3556,45 +3907,46 @@
         </p:nvSpPr>
         <p:spPr>
           <a:xfrm>
-            <a:off x="1158240" y="1857050"/>
-            <a:ext cx="10091424" cy="480343"/>
-          </a:xfrm>
-          <a:prstGeom prst="rect"/>
-          <a:noFill/>
-        </p:spPr>
-        <p:style>
-          <a:lnRef idx="2">
-            <a:srgbClr val="000000">
-              <a:alpha val="0"/>
-            </a:srgbClr>
-          </a:lnRef>
-          <a:fillRef idx="1">
-            <a:schemeClr val="accent1"/>
-          </a:fillRef>
-          <a:effectRef idx="0">
-            <a:schemeClr val="accent1"/>
-          </a:effectRef>
-          <a:fontRef idx="minor">
-            <a:schemeClr val="lt1"/>
-          </a:fontRef>
-        </p:style>
-        <p:txBody>
-          <a:bodyPr wrap="none" lIns="0" tIns="0" rtlCol="0" anchor="ctr">
-            <a:spAutoFit/>
-          </a:bodyPr>
-          <a:lstStyle>
-            <a:defPPr/>
-          </a:lstStyle>
-          <a:p>
-            <a:pPr/>
-            <a:r>
-              <a:rPr lang="en-US" sz="3098" dirty="1">
+            <a:off x="1158240" y="1835772"/>
+            <a:ext cx="10340908" cy="522900"/>
+          </a:xfrm>
+          <a:prstGeom prst="rect">
+            <a:avLst/>
+          </a:prstGeom>
+          <a:noFill/>
+        </p:spPr>
+        <p:style>
+          <a:lnRef idx="2">
+            <a:srgbClr val="000000">
+              <a:alpha val="0"/>
+            </a:srgbClr>
+          </a:lnRef>
+          <a:fillRef idx="1">
+            <a:schemeClr val="accent1"/>
+          </a:fillRef>
+          <a:effectRef idx="0">
+            <a:schemeClr val="accent1"/>
+          </a:effectRef>
+          <a:fontRef idx="minor">
+            <a:schemeClr val="lt1"/>
+          </a:fontRef>
+        </p:style>
+        <p:txBody>
+          <a:bodyPr wrap="none" lIns="0" tIns="0" rtlCol="0" anchor="ctr">
+            <a:spAutoFit/>
+          </a:bodyPr>
+          <a:lstStyle>
+            <a:defPPr/>
+          </a:lstStyle>
+          <a:p>
+            <a:r>
+              <a:rPr lang="en-US" sz="3098" dirty="0">
                 <a:solidFill>
                   <a:srgbClr val="000000"/>
                 </a:solidFill>
                 <a:latin typeface="Calibri"/>
               </a:rPr>
-              <a:t>We might describe an implementation of analgorithm as being </a:t>
+              <a:t>We might describe an implementation of an algorithm as being </a:t>
             </a:r>
           </a:p>
         </p:txBody>
@@ -3610,36 +3962,37 @@
             <a:off x="1158240" y="2282887"/>
             <a:ext cx="9386307" cy="479971"/>
           </a:xfrm>
-          <a:prstGeom prst="rect"/>
-          <a:noFill/>
-        </p:spPr>
-        <p:style>
-          <a:lnRef idx="2">
-            <a:srgbClr val="000000">
-              <a:alpha val="0"/>
-            </a:srgbClr>
-          </a:lnRef>
-          <a:fillRef idx="1">
-            <a:schemeClr val="accent1"/>
-          </a:fillRef>
-          <a:effectRef idx="0">
-            <a:schemeClr val="accent1"/>
-          </a:effectRef>
-          <a:fontRef idx="minor">
-            <a:schemeClr val="lt1"/>
-          </a:fontRef>
-        </p:style>
-        <p:txBody>
-          <a:bodyPr wrap="none" lIns="0" tIns="0" rtlCol="0" anchor="ctr">
-            <a:spAutoFit/>
-          </a:bodyPr>
-          <a:lstStyle>
-            <a:defPPr/>
-          </a:lstStyle>
-          <a:p>
-            <a:pPr/>
-            <a:r>
-              <a:rPr lang="en-US" sz="3096" dirty="1">
+          <a:prstGeom prst="rect">
+            <a:avLst/>
+          </a:prstGeom>
+          <a:noFill/>
+        </p:spPr>
+        <p:style>
+          <a:lnRef idx="2">
+            <a:srgbClr val="000000">
+              <a:alpha val="0"/>
+            </a:srgbClr>
+          </a:lnRef>
+          <a:fillRef idx="1">
+            <a:schemeClr val="accent1"/>
+          </a:fillRef>
+          <a:effectRef idx="0">
+            <a:schemeClr val="accent1"/>
+          </a:effectRef>
+          <a:fontRef idx="minor">
+            <a:schemeClr val="lt1"/>
+          </a:fontRef>
+        </p:style>
+        <p:txBody>
+          <a:bodyPr wrap="none" lIns="0" tIns="0" rtlCol="0" anchor="ctr">
+            <a:spAutoFit/>
+          </a:bodyPr>
+          <a:lstStyle>
+            <a:defPPr/>
+          </a:lstStyle>
+          <a:p>
+            <a:r>
+              <a:rPr lang="en-US" sz="3096">
                 <a:solidFill>
                   <a:srgbClr val="000000"/>
                 </a:solidFill>
@@ -3661,36 +4014,37 @@
             <a:off x="1158240" y="2708084"/>
             <a:ext cx="5932438" cy="479971"/>
           </a:xfrm>
-          <a:prstGeom prst="rect"/>
-          <a:noFill/>
-        </p:spPr>
-        <p:style>
-          <a:lnRef idx="2">
-            <a:srgbClr val="000000">
-              <a:alpha val="0"/>
-            </a:srgbClr>
-          </a:lnRef>
-          <a:fillRef idx="1">
-            <a:schemeClr val="accent1"/>
-          </a:fillRef>
-          <a:effectRef idx="0">
-            <a:schemeClr val="accent1"/>
-          </a:effectRef>
-          <a:fontRef idx="minor">
-            <a:schemeClr val="lt1"/>
-          </a:fontRef>
-        </p:style>
-        <p:txBody>
-          <a:bodyPr wrap="none" lIns="0" tIns="0" rtlCol="0" anchor="ctr">
-            <a:spAutoFit/>
-          </a:bodyPr>
-          <a:lstStyle>
-            <a:defPPr/>
-          </a:lstStyle>
-          <a:p>
-            <a:pPr/>
-            <a:r>
-              <a:rPr lang="en-US" sz="3096" dirty="1">
+          <a:prstGeom prst="rect">
+            <a:avLst/>
+          </a:prstGeom>
+          <a:noFill/>
+        </p:spPr>
+        <p:style>
+          <a:lnRef idx="2">
+            <a:srgbClr val="000000">
+              <a:alpha val="0"/>
+            </a:srgbClr>
+          </a:lnRef>
+          <a:fillRef idx="1">
+            <a:schemeClr val="accent1"/>
+          </a:fillRef>
+          <a:effectRef idx="0">
+            <a:schemeClr val="accent1"/>
+          </a:effectRef>
+          <a:fontRef idx="minor">
+            <a:schemeClr val="lt1"/>
+          </a:fontRef>
+        </p:style>
+        <p:txBody>
+          <a:bodyPr wrap="none" lIns="0" tIns="0" rtlCol="0" anchor="ctr">
+            <a:spAutoFit/>
+          </a:bodyPr>
+          <a:lstStyle>
+            <a:defPPr/>
+          </a:lstStyle>
+          <a:p>
+            <a:r>
+              <a:rPr lang="en-US" sz="3096">
                 <a:solidFill>
                   <a:srgbClr val="000000"/>
                 </a:solidFill>
@@ -3712,36 +4066,37 @@
             <a:off x="929640" y="3840204"/>
             <a:ext cx="137464" cy="439269"/>
           </a:xfrm>
-          <a:prstGeom prst="rect"/>
-          <a:noFill/>
-        </p:spPr>
-        <p:style>
-          <a:lnRef idx="2">
-            <a:srgbClr val="000000">
-              <a:alpha val="0"/>
-            </a:srgbClr>
-          </a:lnRef>
-          <a:fillRef idx="1">
-            <a:schemeClr val="accent1"/>
-          </a:fillRef>
-          <a:effectRef idx="0">
-            <a:schemeClr val="accent1"/>
-          </a:effectRef>
-          <a:fontRef idx="minor">
-            <a:schemeClr val="lt1"/>
-          </a:fontRef>
-        </p:style>
-        <p:txBody>
-          <a:bodyPr wrap="none" lIns="0" tIns="0" rtlCol="0" anchor="ctr">
-            <a:spAutoFit/>
-          </a:bodyPr>
-          <a:lstStyle>
-            <a:defPPr/>
-          </a:lstStyle>
-          <a:p>
-            <a:pPr/>
-            <a:r>
-              <a:rPr lang="en-US" sz="3096" dirty="1">
+          <a:prstGeom prst="rect">
+            <a:avLst/>
+          </a:prstGeom>
+          <a:noFill/>
+        </p:spPr>
+        <p:style>
+          <a:lnRef idx="2">
+            <a:srgbClr val="000000">
+              <a:alpha val="0"/>
+            </a:srgbClr>
+          </a:lnRef>
+          <a:fillRef idx="1">
+            <a:schemeClr val="accent1"/>
+          </a:fillRef>
+          <a:effectRef idx="0">
+            <a:schemeClr val="accent1"/>
+          </a:effectRef>
+          <a:fontRef idx="minor">
+            <a:schemeClr val="lt1"/>
+          </a:fontRef>
+        </p:style>
+        <p:txBody>
+          <a:bodyPr wrap="none" lIns="0" tIns="0" rtlCol="0" anchor="ctr">
+            <a:spAutoFit/>
+          </a:bodyPr>
+          <a:lstStyle>
+            <a:defPPr/>
+          </a:lstStyle>
+          <a:p>
+            <a:r>
+              <a:rPr lang="en-US" sz="3096">
                 <a:solidFill>
                   <a:srgbClr val="000000"/>
                 </a:solidFill>
@@ -3763,36 +4118,37 @@
             <a:off x="1158240" y="3811713"/>
             <a:ext cx="2791701" cy="479971"/>
           </a:xfrm>
-          <a:prstGeom prst="rect"/>
-          <a:noFill/>
-        </p:spPr>
-        <p:style>
-          <a:lnRef idx="2">
-            <a:srgbClr val="000000">
-              <a:alpha val="0"/>
-            </a:srgbClr>
-          </a:lnRef>
-          <a:fillRef idx="1">
-            <a:schemeClr val="accent1"/>
-          </a:fillRef>
-          <a:effectRef idx="0">
-            <a:schemeClr val="accent1"/>
-          </a:effectRef>
-          <a:fontRef idx="minor">
-            <a:schemeClr val="lt1"/>
-          </a:fontRef>
-        </p:style>
-        <p:txBody>
-          <a:bodyPr wrap="none" lIns="0" tIns="0" rtlCol="0" anchor="ctr">
-            <a:spAutoFit/>
-          </a:bodyPr>
-          <a:lstStyle>
-            <a:defPPr/>
-          </a:lstStyle>
-          <a:p>
-            <a:pPr/>
-            <a:r>
-              <a:rPr lang="en-US" sz="3096" dirty="1">
+          <a:prstGeom prst="rect">
+            <a:avLst/>
+          </a:prstGeom>
+          <a:noFill/>
+        </p:spPr>
+        <p:style>
+          <a:lnRef idx="2">
+            <a:srgbClr val="000000">
+              <a:alpha val="0"/>
+            </a:srgbClr>
+          </a:lnRef>
+          <a:fillRef idx="1">
+            <a:schemeClr val="accent1"/>
+          </a:fillRef>
+          <a:effectRef idx="0">
+            <a:schemeClr val="accent1"/>
+          </a:effectRef>
+          <a:fontRef idx="minor">
+            <a:schemeClr val="lt1"/>
+          </a:fontRef>
+        </p:style>
+        <p:txBody>
+          <a:bodyPr wrap="none" lIns="0" tIns="0" rtlCol="0" anchor="ctr">
+            <a:spAutoFit/>
+          </a:bodyPr>
+          <a:lstStyle>
+            <a:defPPr/>
+          </a:lstStyle>
+          <a:p>
+            <a:r>
+              <a:rPr lang="en-US" sz="3096">
                 <a:solidFill>
                   <a:srgbClr val="000000"/>
                 </a:solidFill>
@@ -3814,36 +4170,37 @@
             <a:off x="3949319" y="3811713"/>
             <a:ext cx="1528035" cy="479971"/>
           </a:xfrm>
-          <a:prstGeom prst="rect"/>
-          <a:noFill/>
-        </p:spPr>
-        <p:style>
-          <a:lnRef idx="2">
-            <a:srgbClr val="000000">
-              <a:alpha val="0"/>
-            </a:srgbClr>
-          </a:lnRef>
-          <a:fillRef idx="1">
-            <a:schemeClr val="accent1"/>
-          </a:fillRef>
-          <a:effectRef idx="0">
-            <a:schemeClr val="accent1"/>
-          </a:effectRef>
-          <a:fontRef idx="minor">
-            <a:schemeClr val="lt1"/>
-          </a:fontRef>
-        </p:style>
-        <p:txBody>
-          <a:bodyPr wrap="none" lIns="0" tIns="0" rtlCol="0" anchor="ctr">
-            <a:spAutoFit/>
-          </a:bodyPr>
-          <a:lstStyle>
-            <a:defPPr/>
-          </a:lstStyle>
-          <a:p>
-            <a:pPr/>
-            <a:r>
-              <a:rPr lang="en-US" sz="3096" b="1" dirty="1">
+          <a:prstGeom prst="rect">
+            <a:avLst/>
+          </a:prstGeom>
+          <a:noFill/>
+        </p:spPr>
+        <p:style>
+          <a:lnRef idx="2">
+            <a:srgbClr val="000000">
+              <a:alpha val="0"/>
+            </a:srgbClr>
+          </a:lnRef>
+          <a:fillRef idx="1">
+            <a:schemeClr val="accent1"/>
+          </a:fillRef>
+          <a:effectRef idx="0">
+            <a:schemeClr val="accent1"/>
+          </a:effectRef>
+          <a:fontRef idx="minor">
+            <a:schemeClr val="lt1"/>
+          </a:fontRef>
+        </p:style>
+        <p:txBody>
+          <a:bodyPr wrap="none" lIns="0" tIns="0" rtlCol="0" anchor="ctr">
+            <a:spAutoFit/>
+          </a:bodyPr>
+          <a:lstStyle>
+            <a:defPPr/>
+          </a:lstStyle>
+          <a:p>
+            <a:r>
+              <a:rPr lang="en-US" sz="3096" b="1">
                 <a:solidFill>
                   <a:srgbClr val="000000"/>
                 </a:solidFill>
@@ -3865,36 +4222,37 @@
             <a:off x="5558663" y="3811713"/>
             <a:ext cx="4053833" cy="479971"/>
           </a:xfrm>
-          <a:prstGeom prst="rect"/>
-          <a:noFill/>
-        </p:spPr>
-        <p:style>
-          <a:lnRef idx="2">
-            <a:srgbClr val="000000">
-              <a:alpha val="0"/>
-            </a:srgbClr>
-          </a:lnRef>
-          <a:fillRef idx="1">
-            <a:schemeClr val="accent1"/>
-          </a:fillRef>
-          <a:effectRef idx="0">
-            <a:schemeClr val="accent1"/>
-          </a:effectRef>
-          <a:fontRef idx="minor">
-            <a:schemeClr val="lt1"/>
-          </a:fontRef>
-        </p:style>
-        <p:txBody>
-          <a:bodyPr wrap="none" lIns="0" tIns="0" rtlCol="0" anchor="ctr">
-            <a:spAutoFit/>
-          </a:bodyPr>
-          <a:lstStyle>
-            <a:defPPr/>
-          </a:lstStyle>
-          <a:p>
-            <a:pPr/>
-            <a:r>
-              <a:rPr lang="en-US" sz="3096" dirty="1">
+          <a:prstGeom prst="rect">
+            <a:avLst/>
+          </a:prstGeom>
+          <a:noFill/>
+        </p:spPr>
+        <p:style>
+          <a:lnRef idx="2">
+            <a:srgbClr val="000000">
+              <a:alpha val="0"/>
+            </a:srgbClr>
+          </a:lnRef>
+          <a:fillRef idx="1">
+            <a:schemeClr val="accent1"/>
+          </a:fillRef>
+          <a:effectRef idx="0">
+            <a:schemeClr val="accent1"/>
+          </a:effectRef>
+          <a:fontRef idx="minor">
+            <a:schemeClr val="lt1"/>
+          </a:fontRef>
+        </p:style>
+        <p:txBody>
+          <a:bodyPr wrap="none" lIns="0" tIns="0" rtlCol="0" anchor="ctr">
+            <a:spAutoFit/>
+          </a:bodyPr>
+          <a:lstStyle>
+            <a:defPPr/>
+          </a:lstStyle>
+          <a:p>
+            <a:r>
+              <a:rPr lang="en-US" sz="3096">
                 <a:solidFill>
                   <a:srgbClr val="000000"/>
                 </a:solidFill>
@@ -3916,36 +4274,37 @@
             <a:off x="1158240" y="4236910"/>
             <a:ext cx="6052047" cy="479971"/>
           </a:xfrm>
-          <a:prstGeom prst="rect"/>
-          <a:noFill/>
-        </p:spPr>
-        <p:style>
-          <a:lnRef idx="2">
-            <a:srgbClr val="000000">
-              <a:alpha val="0"/>
-            </a:srgbClr>
-          </a:lnRef>
-          <a:fillRef idx="1">
-            <a:schemeClr val="accent1"/>
-          </a:fillRef>
-          <a:effectRef idx="0">
-            <a:schemeClr val="accent1"/>
-          </a:effectRef>
-          <a:fontRef idx="minor">
-            <a:schemeClr val="lt1"/>
-          </a:fontRef>
-        </p:style>
-        <p:txBody>
-          <a:bodyPr wrap="none" lIns="0" tIns="0" rtlCol="0" anchor="ctr">
-            <a:spAutoFit/>
-          </a:bodyPr>
-          <a:lstStyle>
-            <a:defPPr/>
-          </a:lstStyle>
-          <a:p>
-            <a:pPr/>
-            <a:r>
-              <a:rPr lang="en-US" sz="3096" dirty="1">
+          <a:prstGeom prst="rect">
+            <a:avLst/>
+          </a:prstGeom>
+          <a:noFill/>
+        </p:spPr>
+        <p:style>
+          <a:lnRef idx="2">
+            <a:srgbClr val="000000">
+              <a:alpha val="0"/>
+            </a:srgbClr>
+          </a:lnRef>
+          <a:fillRef idx="1">
+            <a:schemeClr val="accent1"/>
+          </a:fillRef>
+          <a:effectRef idx="0">
+            <a:schemeClr val="accent1"/>
+          </a:effectRef>
+          <a:fontRef idx="minor">
+            <a:schemeClr val="lt1"/>
+          </a:fontRef>
+        </p:style>
+        <p:txBody>
+          <a:bodyPr wrap="none" lIns="0" tIns="0" rtlCol="0" anchor="ctr">
+            <a:spAutoFit/>
+          </a:bodyPr>
+          <a:lstStyle>
+            <a:defPPr/>
+          </a:lstStyle>
+          <a:p>
+            <a:r>
+              <a:rPr lang="en-US" sz="3096">
                 <a:solidFill>
                   <a:srgbClr val="000000"/>
                 </a:solidFill>
@@ -3967,36 +4326,37 @@
             <a:off x="929640" y="5370630"/>
             <a:ext cx="137464" cy="439269"/>
           </a:xfrm>
-          <a:prstGeom prst="rect"/>
-          <a:noFill/>
-        </p:spPr>
-        <p:style>
-          <a:lnRef idx="2">
-            <a:srgbClr val="000000">
-              <a:alpha val="0"/>
-            </a:srgbClr>
-          </a:lnRef>
-          <a:fillRef idx="1">
-            <a:schemeClr val="accent1"/>
-          </a:fillRef>
-          <a:effectRef idx="0">
-            <a:schemeClr val="accent1"/>
-          </a:effectRef>
-          <a:fontRef idx="minor">
-            <a:schemeClr val="lt1"/>
-          </a:fontRef>
-        </p:style>
-        <p:txBody>
-          <a:bodyPr wrap="none" lIns="0" tIns="0" rtlCol="0" anchor="ctr">
-            <a:spAutoFit/>
-          </a:bodyPr>
-          <a:lstStyle>
-            <a:defPPr/>
-          </a:lstStyle>
-          <a:p>
-            <a:pPr/>
-            <a:r>
-              <a:rPr lang="en-US" sz="3096" dirty="1">
+          <a:prstGeom prst="rect">
+            <a:avLst/>
+          </a:prstGeom>
+          <a:noFill/>
+        </p:spPr>
+        <p:style>
+          <a:lnRef idx="2">
+            <a:srgbClr val="000000">
+              <a:alpha val="0"/>
+            </a:srgbClr>
+          </a:lnRef>
+          <a:fillRef idx="1">
+            <a:schemeClr val="accent1"/>
+          </a:fillRef>
+          <a:effectRef idx="0">
+            <a:schemeClr val="accent1"/>
+          </a:effectRef>
+          <a:fontRef idx="minor">
+            <a:schemeClr val="lt1"/>
+          </a:fontRef>
+        </p:style>
+        <p:txBody>
+          <a:bodyPr wrap="none" lIns="0" tIns="0" rtlCol="0" anchor="ctr">
+            <a:spAutoFit/>
+          </a:bodyPr>
+          <a:lstStyle>
+            <a:defPPr/>
+          </a:lstStyle>
+          <a:p>
+            <a:r>
+              <a:rPr lang="en-US" sz="3096">
                 <a:solidFill>
                   <a:srgbClr val="000000"/>
                 </a:solidFill>
@@ -4018,36 +4378,37 @@
             <a:off x="1158240" y="5342140"/>
             <a:ext cx="9917730" cy="479971"/>
           </a:xfrm>
-          <a:prstGeom prst="rect"/>
-          <a:noFill/>
-        </p:spPr>
-        <p:style>
-          <a:lnRef idx="2">
-            <a:srgbClr val="000000">
-              <a:alpha val="0"/>
-            </a:srgbClr>
-          </a:lnRef>
-          <a:fillRef idx="1">
-            <a:schemeClr val="accent1"/>
-          </a:fillRef>
-          <a:effectRef idx="0">
-            <a:schemeClr val="accent1"/>
-          </a:effectRef>
-          <a:fontRef idx="minor">
-            <a:schemeClr val="lt1"/>
-          </a:fontRef>
-        </p:style>
-        <p:txBody>
-          <a:bodyPr wrap="none" lIns="0" tIns="0" rtlCol="0" anchor="ctr">
-            <a:spAutoFit/>
-          </a:bodyPr>
-          <a:lstStyle>
-            <a:defPPr/>
-          </a:lstStyle>
-          <a:p>
-            <a:pPr/>
-            <a:r>
-              <a:rPr lang="en-US" sz="3096" dirty="1">
+          <a:prstGeom prst="rect">
+            <a:avLst/>
+          </a:prstGeom>
+          <a:noFill/>
+        </p:spPr>
+        <p:style>
+          <a:lnRef idx="2">
+            <a:srgbClr val="000000">
+              <a:alpha val="0"/>
+            </a:srgbClr>
+          </a:lnRef>
+          <a:fillRef idx="1">
+            <a:schemeClr val="accent1"/>
+          </a:fillRef>
+          <a:effectRef idx="0">
+            <a:schemeClr val="accent1"/>
+          </a:effectRef>
+          <a:fontRef idx="minor">
+            <a:schemeClr val="lt1"/>
+          </a:fontRef>
+        </p:style>
+        <p:txBody>
+          <a:bodyPr wrap="none" lIns="0" tIns="0" rtlCol="0" anchor="ctr">
+            <a:spAutoFit/>
+          </a:bodyPr>
+          <a:lstStyle>
+            <a:defPPr/>
+          </a:lstStyle>
+          <a:p>
+            <a:r>
+              <a:rPr lang="en-US" sz="3096">
                 <a:solidFill>
                   <a:srgbClr val="000000"/>
                 </a:solidFill>
@@ -4069,36 +4430,37 @@
             <a:off x="1158240" y="5767075"/>
             <a:ext cx="3938619" cy="480343"/>
           </a:xfrm>
-          <a:prstGeom prst="rect"/>
-          <a:noFill/>
-        </p:spPr>
-        <p:style>
-          <a:lnRef idx="2">
-            <a:srgbClr val="000000">
-              <a:alpha val="0"/>
-            </a:srgbClr>
-          </a:lnRef>
-          <a:fillRef idx="1">
-            <a:schemeClr val="accent1"/>
-          </a:fillRef>
-          <a:effectRef idx="0">
-            <a:schemeClr val="accent1"/>
-          </a:effectRef>
-          <a:fontRef idx="minor">
-            <a:schemeClr val="lt1"/>
-          </a:fontRef>
-        </p:style>
-        <p:txBody>
-          <a:bodyPr wrap="none" lIns="0" tIns="0" rtlCol="0" anchor="ctr">
-            <a:spAutoFit/>
-          </a:bodyPr>
-          <a:lstStyle>
-            <a:defPPr/>
-          </a:lstStyle>
-          <a:p>
-            <a:pPr/>
-            <a:r>
-              <a:rPr lang="en-US" sz="3098" dirty="1">
+          <a:prstGeom prst="rect">
+            <a:avLst/>
+          </a:prstGeom>
+          <a:noFill/>
+        </p:spPr>
+        <p:style>
+          <a:lnRef idx="2">
+            <a:srgbClr val="000000">
+              <a:alpha val="0"/>
+            </a:srgbClr>
+          </a:lnRef>
+          <a:fillRef idx="1">
+            <a:schemeClr val="accent1"/>
+          </a:fillRef>
+          <a:effectRef idx="0">
+            <a:schemeClr val="accent1"/>
+          </a:effectRef>
+          <a:fontRef idx="minor">
+            <a:schemeClr val="lt1"/>
+          </a:fontRef>
+        </p:style>
+        <p:txBody>
+          <a:bodyPr wrap="none" lIns="0" tIns="0" rtlCol="0" anchor="ctr">
+            <a:spAutoFit/>
+          </a:bodyPr>
+          <a:lstStyle>
+            <a:defPPr/>
+          </a:lstStyle>
+          <a:p>
+            <a:r>
+              <a:rPr lang="en-US" sz="3098">
                 <a:solidFill>
                   <a:srgbClr val="000000"/>
                 </a:solidFill>
@@ -4111,12 +4473,15 @@
       </p:sp>
     </p:spTree>
   </p:cSld>
+  <p:clrMapOvr>
+    <a:masterClrMapping/>
+  </p:clrMapOvr>
 </p:sld>
 </file>
 
 <file path=ppt/slides/slide3.xml><?xml version="1.0" encoding="utf-8"?>
 <p:sld xmlns:a="http://schemas.openxmlformats.org/drawingml/2006/main" xmlns:r="http://schemas.openxmlformats.org/officeDocument/2006/relationships" xmlns:p="http://schemas.openxmlformats.org/presentationml/2006/main">
-  <p:cSld name="">
+  <p:cSld>
     <p:spTree>
       <p:nvGrpSpPr>
         <p:cNvPr id="1" name=""/>
@@ -4133,52 +4498,6 @@
       </p:grpSpPr>
       <p:sp>
         <p:nvSpPr>
-          <p:cNvPr id="2" name="New shape"/>
-          <p:cNvSpPr/>
-          <p:nvPr/>
-        </p:nvSpPr>
-        <p:spPr>
-          <a:xfrm>
-            <a:off x="0" y="-1"/>
-            <a:ext cx="12192000" cy="6857999"/>
-          </a:xfrm>
-          <a:prstGeom prst="rect"/>
-          <a:solidFill>
-            <a:srgbClr val="FFFFFF"/>
-          </a:solidFill>
-          <a:ln w="0">
-            <a:noFill/>
-          </a:ln>
-        </p:spPr>
-        <p:style>
-          <a:lnRef idx="2">
-            <a:schemeClr val="accent1">
-              <a:shade val="50000"/>
-            </a:schemeClr>
-          </a:lnRef>
-          <a:fillRef idx="1">
-            <a:schemeClr val="accent1"/>
-          </a:fillRef>
-          <a:effectRef idx="0">
-            <a:schemeClr val="accent1"/>
-          </a:effectRef>
-          <a:fontRef idx="minor">
-            <a:schemeClr val="lt1"/>
-          </a:fontRef>
-        </p:style>
-        <p:txBody>
-          <a:bodyPr rtlCol="0" anchor="ctr"/>
-          <a:lstStyle>
-            <a:defPPr/>
-          </a:lstStyle>
-          <a:p>
-            <a:pPr/>
-            <a:endParaRPr lang="en-US"/>
-          </a:p>
-        </p:txBody>
-      </p:sp>
-      <p:sp>
-        <p:nvSpPr>
           <p:cNvPr id="3" name="New shape"/>
           <p:cNvSpPr/>
           <p:nvPr/>
@@ -4188,36 +4507,37 @@
             <a:off x="929640" y="703804"/>
             <a:ext cx="2217411" cy="683121"/>
           </a:xfrm>
-          <a:prstGeom prst="rect"/>
-          <a:noFill/>
-        </p:spPr>
-        <p:style>
-          <a:lnRef idx="2">
-            <a:srgbClr val="000000">
-              <a:alpha val="0"/>
-            </a:srgbClr>
-          </a:lnRef>
-          <a:fillRef idx="1">
-            <a:schemeClr val="accent1"/>
-          </a:fillRef>
-          <a:effectRef idx="0">
-            <a:schemeClr val="accent1"/>
-          </a:effectRef>
-          <a:fontRef idx="minor">
-            <a:schemeClr val="lt1"/>
-          </a:fontRef>
-        </p:style>
-        <p:txBody>
-          <a:bodyPr wrap="none" lIns="0" tIns="0" rtlCol="0" anchor="ctr">
-            <a:spAutoFit/>
-          </a:bodyPr>
-          <a:lstStyle>
-            <a:defPPr/>
-          </a:lstStyle>
-          <a:p>
-            <a:pPr/>
-            <a:r>
-              <a:rPr lang="en-US" sz="4406" dirty="1">
+          <a:prstGeom prst="rect">
+            <a:avLst/>
+          </a:prstGeom>
+          <a:noFill/>
+        </p:spPr>
+        <p:style>
+          <a:lnRef idx="2">
+            <a:srgbClr val="000000">
+              <a:alpha val="0"/>
+            </a:srgbClr>
+          </a:lnRef>
+          <a:fillRef idx="1">
+            <a:schemeClr val="accent1"/>
+          </a:fillRef>
+          <a:effectRef idx="0">
+            <a:schemeClr val="accent1"/>
+          </a:effectRef>
+          <a:fontRef idx="minor">
+            <a:schemeClr val="lt1"/>
+          </a:fontRef>
+        </p:style>
+        <p:txBody>
+          <a:bodyPr wrap="none" lIns="0" tIns="0" rtlCol="0" anchor="ctr">
+            <a:spAutoFit/>
+          </a:bodyPr>
+          <a:lstStyle>
+            <a:defPPr/>
+          </a:lstStyle>
+          <a:p>
+            <a:r>
+              <a:rPr lang="en-US" sz="4406">
                 <a:solidFill>
                   <a:srgbClr val="00AFEF"/>
                 </a:solidFill>
@@ -4239,36 +4559,37 @@
             <a:off x="929640" y="1885563"/>
             <a:ext cx="137570" cy="439610"/>
           </a:xfrm>
-          <a:prstGeom prst="rect"/>
-          <a:noFill/>
-        </p:spPr>
-        <p:style>
-          <a:lnRef idx="2">
-            <a:srgbClr val="000000">
-              <a:alpha val="0"/>
-            </a:srgbClr>
-          </a:lnRef>
-          <a:fillRef idx="1">
-            <a:schemeClr val="accent1"/>
-          </a:fillRef>
-          <a:effectRef idx="0">
-            <a:schemeClr val="accent1"/>
-          </a:effectRef>
-          <a:fontRef idx="minor">
-            <a:schemeClr val="lt1"/>
-          </a:fontRef>
-        </p:style>
-        <p:txBody>
-          <a:bodyPr wrap="none" lIns="0" tIns="0" rtlCol="0" anchor="ctr">
-            <a:spAutoFit/>
-          </a:bodyPr>
-          <a:lstStyle>
-            <a:defPPr/>
-          </a:lstStyle>
-          <a:p>
-            <a:pPr/>
-            <a:r>
-              <a:rPr lang="en-US" sz="3098" dirty="1">
+          <a:prstGeom prst="rect">
+            <a:avLst/>
+          </a:prstGeom>
+          <a:noFill/>
+        </p:spPr>
+        <p:style>
+          <a:lnRef idx="2">
+            <a:srgbClr val="000000">
+              <a:alpha val="0"/>
+            </a:srgbClr>
+          </a:lnRef>
+          <a:fillRef idx="1">
+            <a:schemeClr val="accent1"/>
+          </a:fillRef>
+          <a:effectRef idx="0">
+            <a:schemeClr val="accent1"/>
+          </a:effectRef>
+          <a:fontRef idx="minor">
+            <a:schemeClr val="lt1"/>
+          </a:fontRef>
+        </p:style>
+        <p:txBody>
+          <a:bodyPr wrap="none" lIns="0" tIns="0" rtlCol="0" anchor="ctr">
+            <a:spAutoFit/>
+          </a:bodyPr>
+          <a:lstStyle>
+            <a:defPPr/>
+          </a:lstStyle>
+          <a:p>
+            <a:r>
+              <a:rPr lang="en-US" sz="3098">
                 <a:solidFill>
                   <a:srgbClr val="000000"/>
                 </a:solidFill>
@@ -4290,36 +4611,37 @@
             <a:off x="1158240" y="1857050"/>
             <a:ext cx="3635042" cy="480343"/>
           </a:xfrm>
-          <a:prstGeom prst="rect"/>
-          <a:noFill/>
-        </p:spPr>
-        <p:style>
-          <a:lnRef idx="2">
-            <a:srgbClr val="000000">
-              <a:alpha val="0"/>
-            </a:srgbClr>
-          </a:lnRef>
-          <a:fillRef idx="1">
-            <a:schemeClr val="accent1"/>
-          </a:fillRef>
-          <a:effectRef idx="0">
-            <a:schemeClr val="accent1"/>
-          </a:effectRef>
-          <a:fontRef idx="minor">
-            <a:schemeClr val="lt1"/>
-          </a:fontRef>
-        </p:style>
-        <p:txBody>
-          <a:bodyPr wrap="none" lIns="0" tIns="0" rtlCol="0" anchor="ctr">
-            <a:spAutoFit/>
-          </a:bodyPr>
-          <a:lstStyle>
-            <a:defPPr/>
-          </a:lstStyle>
-          <a:p>
-            <a:pPr/>
-            <a:r>
-              <a:rPr lang="en-US" sz="3098" dirty="1">
+          <a:prstGeom prst="rect">
+            <a:avLst/>
+          </a:prstGeom>
+          <a:noFill/>
+        </p:spPr>
+        <p:style>
+          <a:lnRef idx="2">
+            <a:srgbClr val="000000">
+              <a:alpha val="0"/>
+            </a:srgbClr>
+          </a:lnRef>
+          <a:fillRef idx="1">
+            <a:schemeClr val="accent1"/>
+          </a:fillRef>
+          <a:effectRef idx="0">
+            <a:schemeClr val="accent1"/>
+          </a:effectRef>
+          <a:fontRef idx="minor">
+            <a:schemeClr val="lt1"/>
+          </a:fontRef>
+        </p:style>
+        <p:txBody>
+          <a:bodyPr wrap="none" lIns="0" tIns="0" rtlCol="0" anchor="ctr">
+            <a:spAutoFit/>
+          </a:bodyPr>
+          <a:lstStyle>
+            <a:defPPr/>
+          </a:lstStyle>
+          <a:p>
+            <a:r>
+              <a:rPr lang="en-US" sz="3098">
                 <a:solidFill>
                   <a:srgbClr val="000000"/>
                 </a:solidFill>
@@ -4341,36 +4663,37 @@
             <a:off x="4785995" y="1857050"/>
             <a:ext cx="202128" cy="480343"/>
           </a:xfrm>
-          <a:prstGeom prst="rect"/>
-          <a:noFill/>
-        </p:spPr>
-        <p:style>
-          <a:lnRef idx="2">
-            <a:srgbClr val="000000">
-              <a:alpha val="0"/>
-            </a:srgbClr>
-          </a:lnRef>
-          <a:fillRef idx="1">
-            <a:schemeClr val="accent1"/>
-          </a:fillRef>
-          <a:effectRef idx="0">
-            <a:schemeClr val="accent1"/>
-          </a:effectRef>
-          <a:fontRef idx="minor">
-            <a:schemeClr val="lt1"/>
-          </a:fontRef>
-        </p:style>
-        <p:txBody>
-          <a:bodyPr wrap="none" lIns="0" tIns="0" rtlCol="0" anchor="ctr">
-            <a:spAutoFit/>
-          </a:bodyPr>
-          <a:lstStyle>
-            <a:defPPr/>
-          </a:lstStyle>
-          <a:p>
-            <a:pPr/>
-            <a:r>
-              <a:rPr lang="en-US" sz="3098" i="1" dirty="1">
+          <a:prstGeom prst="rect">
+            <a:avLst/>
+          </a:prstGeom>
+          <a:noFill/>
+        </p:spPr>
+        <p:style>
+          <a:lnRef idx="2">
+            <a:srgbClr val="000000">
+              <a:alpha val="0"/>
+            </a:srgbClr>
+          </a:lnRef>
+          <a:fillRef idx="1">
+            <a:schemeClr val="accent1"/>
+          </a:fillRef>
+          <a:effectRef idx="0">
+            <a:schemeClr val="accent1"/>
+          </a:effectRef>
+          <a:fontRef idx="minor">
+            <a:schemeClr val="lt1"/>
+          </a:fontRef>
+        </p:style>
+        <p:txBody>
+          <a:bodyPr wrap="none" lIns="0" tIns="0" rtlCol="0" anchor="ctr">
+            <a:spAutoFit/>
+          </a:bodyPr>
+          <a:lstStyle>
+            <a:defPPr/>
+          </a:lstStyle>
+          <a:p>
+            <a:r>
+              <a:rPr lang="en-US" sz="3098" i="1">
                 <a:solidFill>
                   <a:srgbClr val="00AF50"/>
                 </a:solidFill>
@@ -4392,36 +4715,37 @@
             <a:off x="4988687" y="1857050"/>
             <a:ext cx="128155" cy="480343"/>
           </a:xfrm>
-          <a:prstGeom prst="rect"/>
-          <a:noFill/>
-        </p:spPr>
-        <p:style>
-          <a:lnRef idx="2">
-            <a:srgbClr val="000000">
-              <a:alpha val="0"/>
-            </a:srgbClr>
-          </a:lnRef>
-          <a:fillRef idx="1">
-            <a:schemeClr val="accent1"/>
-          </a:fillRef>
-          <a:effectRef idx="0">
-            <a:schemeClr val="accent1"/>
-          </a:effectRef>
-          <a:fontRef idx="minor">
-            <a:schemeClr val="lt1"/>
-          </a:fontRef>
-        </p:style>
-        <p:txBody>
-          <a:bodyPr wrap="none" lIns="0" tIns="0" rtlCol="0" anchor="ctr">
-            <a:spAutoFit/>
-          </a:bodyPr>
-          <a:lstStyle>
-            <a:defPPr/>
-          </a:lstStyle>
-          <a:p>
-            <a:pPr/>
-            <a:r>
-              <a:rPr lang="en-US" sz="3098" dirty="1">
+          <a:prstGeom prst="rect">
+            <a:avLst/>
+          </a:prstGeom>
+          <a:noFill/>
+        </p:spPr>
+        <p:style>
+          <a:lnRef idx="2">
+            <a:srgbClr val="000000">
+              <a:alpha val="0"/>
+            </a:srgbClr>
+          </a:lnRef>
+          <a:fillRef idx="1">
+            <a:schemeClr val="accent1"/>
+          </a:fillRef>
+          <a:effectRef idx="0">
+            <a:schemeClr val="accent1"/>
+          </a:effectRef>
+          <a:fontRef idx="minor">
+            <a:schemeClr val="lt1"/>
+          </a:fontRef>
+        </p:style>
+        <p:txBody>
+          <a:bodyPr wrap="none" lIns="0" tIns="0" rtlCol="0" anchor="ctr">
+            <a:spAutoFit/>
+          </a:bodyPr>
+          <a:lstStyle>
+            <a:defPPr/>
+          </a:lstStyle>
+          <a:p>
+            <a:r>
+              <a:rPr lang="en-US" sz="3098">
                 <a:solidFill>
                   <a:srgbClr val="00AF50"/>
                 </a:solidFill>
@@ -4443,36 +4767,37 @@
             <a:off x="5116703" y="1857050"/>
             <a:ext cx="5943185" cy="480343"/>
           </a:xfrm>
-          <a:prstGeom prst="rect"/>
-          <a:noFill/>
-        </p:spPr>
-        <p:style>
-          <a:lnRef idx="2">
-            <a:srgbClr val="000000">
-              <a:alpha val="0"/>
-            </a:srgbClr>
-          </a:lnRef>
-          <a:fillRef idx="1">
-            <a:schemeClr val="accent1"/>
-          </a:fillRef>
-          <a:effectRef idx="0">
-            <a:schemeClr val="accent1"/>
-          </a:effectRef>
-          <a:fontRef idx="minor">
-            <a:schemeClr val="lt1"/>
-          </a:fontRef>
-        </p:style>
-        <p:txBody>
-          <a:bodyPr wrap="none" lIns="0" tIns="0" rtlCol="0" anchor="ctr">
-            <a:spAutoFit/>
-          </a:bodyPr>
-          <a:lstStyle>
-            <a:defPPr/>
-          </a:lstStyle>
-          <a:p>
-            <a:pPr/>
-            <a:r>
-              <a:rPr lang="en-US" sz="3098" dirty="1">
+          <a:prstGeom prst="rect">
+            <a:avLst/>
+          </a:prstGeom>
+          <a:noFill/>
+        </p:spPr>
+        <p:style>
+          <a:lnRef idx="2">
+            <a:srgbClr val="000000">
+              <a:alpha val="0"/>
+            </a:srgbClr>
+          </a:lnRef>
+          <a:fillRef idx="1">
+            <a:schemeClr val="accent1"/>
+          </a:fillRef>
+          <a:effectRef idx="0">
+            <a:schemeClr val="accent1"/>
+          </a:effectRef>
+          <a:fontRef idx="minor">
+            <a:schemeClr val="lt1"/>
+          </a:fontRef>
+        </p:style>
+        <p:txBody>
+          <a:bodyPr wrap="none" lIns="0" tIns="0" rtlCol="0" anchor="ctr">
+            <a:spAutoFit/>
+          </a:bodyPr>
+          <a:lstStyle>
+            <a:defPPr/>
+          </a:lstStyle>
+          <a:p>
+            <a:r>
+              <a:rPr lang="en-US" sz="3098">
                 <a:solidFill>
                   <a:srgbClr val="000000"/>
                 </a:solidFill>
@@ -4494,36 +4819,37 @@
             <a:off x="929640" y="2989559"/>
             <a:ext cx="137464" cy="439269"/>
           </a:xfrm>
-          <a:prstGeom prst="rect"/>
-          <a:noFill/>
-        </p:spPr>
-        <p:style>
-          <a:lnRef idx="2">
-            <a:srgbClr val="000000">
-              <a:alpha val="0"/>
-            </a:srgbClr>
-          </a:lnRef>
-          <a:fillRef idx="1">
-            <a:schemeClr val="accent1"/>
-          </a:fillRef>
-          <a:effectRef idx="0">
-            <a:schemeClr val="accent1"/>
-          </a:effectRef>
-          <a:fontRef idx="minor">
-            <a:schemeClr val="lt1"/>
-          </a:fontRef>
-        </p:style>
-        <p:txBody>
-          <a:bodyPr wrap="none" lIns="0" tIns="0" rtlCol="0" anchor="ctr">
-            <a:spAutoFit/>
-          </a:bodyPr>
-          <a:lstStyle>
-            <a:defPPr/>
-          </a:lstStyle>
-          <a:p>
-            <a:pPr/>
-            <a:r>
-              <a:rPr lang="en-US" sz="3096" dirty="1">
+          <a:prstGeom prst="rect">
+            <a:avLst/>
+          </a:prstGeom>
+          <a:noFill/>
+        </p:spPr>
+        <p:style>
+          <a:lnRef idx="2">
+            <a:srgbClr val="000000">
+              <a:alpha val="0"/>
+            </a:srgbClr>
+          </a:lnRef>
+          <a:fillRef idx="1">
+            <a:schemeClr val="accent1"/>
+          </a:fillRef>
+          <a:effectRef idx="0">
+            <a:schemeClr val="accent1"/>
+          </a:effectRef>
+          <a:fontRef idx="minor">
+            <a:schemeClr val="lt1"/>
+          </a:fontRef>
+        </p:style>
+        <p:txBody>
+          <a:bodyPr wrap="none" lIns="0" tIns="0" rtlCol="0" anchor="ctr">
+            <a:spAutoFit/>
+          </a:bodyPr>
+          <a:lstStyle>
+            <a:defPPr/>
+          </a:lstStyle>
+          <a:p>
+            <a:r>
+              <a:rPr lang="en-US" sz="3096">
                 <a:solidFill>
                   <a:srgbClr val="000000"/>
                 </a:solidFill>
@@ -4545,36 +4871,37 @@
             <a:off x="1158240" y="2961067"/>
             <a:ext cx="201972" cy="479971"/>
           </a:xfrm>
-          <a:prstGeom prst="rect"/>
-          <a:noFill/>
-        </p:spPr>
-        <p:style>
-          <a:lnRef idx="2">
-            <a:srgbClr val="000000">
-              <a:alpha val="0"/>
-            </a:srgbClr>
-          </a:lnRef>
-          <a:fillRef idx="1">
-            <a:schemeClr val="accent1"/>
-          </a:fillRef>
-          <a:effectRef idx="0">
-            <a:schemeClr val="accent1"/>
-          </a:effectRef>
-          <a:fontRef idx="minor">
-            <a:schemeClr val="lt1"/>
-          </a:fontRef>
-        </p:style>
-        <p:txBody>
-          <a:bodyPr wrap="none" lIns="0" tIns="0" rtlCol="0" anchor="ctr">
-            <a:spAutoFit/>
-          </a:bodyPr>
-          <a:lstStyle>
-            <a:defPPr/>
-          </a:lstStyle>
-          <a:p>
-            <a:pPr/>
-            <a:r>
-              <a:rPr lang="en-US" sz="3096" i="1" dirty="1">
+          <a:prstGeom prst="rect">
+            <a:avLst/>
+          </a:prstGeom>
+          <a:noFill/>
+        </p:spPr>
+        <p:style>
+          <a:lnRef idx="2">
+            <a:srgbClr val="000000">
+              <a:alpha val="0"/>
+            </a:srgbClr>
+          </a:lnRef>
+          <a:fillRef idx="1">
+            <a:schemeClr val="accent1"/>
+          </a:fillRef>
+          <a:effectRef idx="0">
+            <a:schemeClr val="accent1"/>
+          </a:effectRef>
+          <a:fontRef idx="minor">
+            <a:schemeClr val="lt1"/>
+          </a:fontRef>
+        </p:style>
+        <p:txBody>
+          <a:bodyPr wrap="none" lIns="0" tIns="0" rtlCol="0" anchor="ctr">
+            <a:spAutoFit/>
+          </a:bodyPr>
+          <a:lstStyle>
+            <a:defPPr/>
+          </a:lstStyle>
+          <a:p>
+            <a:r>
+              <a:rPr lang="en-US" sz="3096" i="1">
                 <a:solidFill>
                   <a:srgbClr val="000000"/>
                 </a:solidFill>
@@ -4593,45 +4920,46 @@
         </p:nvSpPr>
         <p:spPr>
           <a:xfrm>
-            <a:off x="1361186" y="2961067"/>
-            <a:ext cx="8907104" cy="479971"/>
-          </a:xfrm>
-          <a:prstGeom prst="rect"/>
-          <a:noFill/>
-        </p:spPr>
-        <p:style>
-          <a:lnRef idx="2">
-            <a:srgbClr val="000000">
-              <a:alpha val="0"/>
-            </a:srgbClr>
-          </a:lnRef>
-          <a:fillRef idx="1">
-            <a:schemeClr val="accent1"/>
-          </a:fillRef>
-          <a:effectRef idx="0">
-            <a:schemeClr val="accent1"/>
-          </a:effectRef>
-          <a:fontRef idx="minor">
-            <a:schemeClr val="lt1"/>
-          </a:fontRef>
-        </p:style>
-        <p:txBody>
-          <a:bodyPr wrap="none" lIns="0" tIns="0" rtlCol="0" anchor="ctr">
-            <a:spAutoFit/>
-          </a:bodyPr>
-          <a:lstStyle>
-            <a:defPPr/>
-          </a:lstStyle>
-          <a:p>
-            <a:pPr/>
-            <a:r>
-              <a:rPr lang="en-US" sz="3096" dirty="1">
+            <a:off x="1361186" y="2939763"/>
+            <a:ext cx="8649099" cy="522579"/>
+          </a:xfrm>
+          <a:prstGeom prst="rect">
+            <a:avLst/>
+          </a:prstGeom>
+          <a:noFill/>
+        </p:spPr>
+        <p:style>
+          <a:lnRef idx="2">
+            <a:srgbClr val="000000">
+              <a:alpha val="0"/>
+            </a:srgbClr>
+          </a:lnRef>
+          <a:fillRef idx="1">
+            <a:schemeClr val="accent1"/>
+          </a:fillRef>
+          <a:effectRef idx="0">
+            <a:schemeClr val="accent1"/>
+          </a:effectRef>
+          <a:fontRef idx="minor">
+            <a:schemeClr val="lt1"/>
+          </a:fontRef>
+        </p:style>
+        <p:txBody>
+          <a:bodyPr wrap="none" lIns="0" tIns="0" rtlCol="0" anchor="ctr">
+            <a:spAutoFit/>
+          </a:bodyPr>
+          <a:lstStyle>
+            <a:defPPr/>
+          </a:lstStyle>
+          <a:p>
+            <a:r>
+              <a:rPr lang="en-US" sz="3096" dirty="0">
                 <a:solidFill>
                   <a:srgbClr val="000000"/>
                 </a:solidFill>
                 <a:latin typeface="Calibri"/>
               </a:rPr>
-              <a:t>! equals all of the positive integers less than or equal to </a:t>
+              <a:t>! equals all the positive integers less than or equal to </a:t>
             </a:r>
           </a:p>
         </p:txBody>
@@ -4644,39 +4972,40 @@
         </p:nvSpPr>
         <p:spPr>
           <a:xfrm>
-            <a:off x="10254742" y="2961067"/>
+            <a:off x="9882847" y="2961067"/>
             <a:ext cx="201972" cy="479971"/>
           </a:xfrm>
-          <a:prstGeom prst="rect"/>
-          <a:noFill/>
-        </p:spPr>
-        <p:style>
-          <a:lnRef idx="2">
-            <a:srgbClr val="000000">
-              <a:alpha val="0"/>
-            </a:srgbClr>
-          </a:lnRef>
-          <a:fillRef idx="1">
-            <a:schemeClr val="accent1"/>
-          </a:fillRef>
-          <a:effectRef idx="0">
-            <a:schemeClr val="accent1"/>
-          </a:effectRef>
-          <a:fontRef idx="minor">
-            <a:schemeClr val="lt1"/>
-          </a:fontRef>
-        </p:style>
-        <p:txBody>
-          <a:bodyPr wrap="none" lIns="0" tIns="0" rtlCol="0" anchor="ctr">
-            <a:spAutoFit/>
-          </a:bodyPr>
-          <a:lstStyle>
-            <a:defPPr/>
-          </a:lstStyle>
-          <a:p>
-            <a:pPr/>
-            <a:r>
-              <a:rPr lang="en-US" sz="3096" i="1" dirty="1">
+          <a:prstGeom prst="rect">
+            <a:avLst/>
+          </a:prstGeom>
+          <a:noFill/>
+        </p:spPr>
+        <p:style>
+          <a:lnRef idx="2">
+            <a:srgbClr val="000000">
+              <a:alpha val="0"/>
+            </a:srgbClr>
+          </a:lnRef>
+          <a:fillRef idx="1">
+            <a:schemeClr val="accent1"/>
+          </a:fillRef>
+          <a:effectRef idx="0">
+            <a:schemeClr val="accent1"/>
+          </a:effectRef>
+          <a:fontRef idx="minor">
+            <a:schemeClr val="lt1"/>
+          </a:fontRef>
+        </p:style>
+        <p:txBody>
+          <a:bodyPr wrap="none" lIns="0" tIns="0" rtlCol="0" anchor="ctr">
+            <a:spAutoFit/>
+          </a:bodyPr>
+          <a:lstStyle>
+            <a:defPPr/>
+          </a:lstStyle>
+          <a:p>
+            <a:r>
+              <a:rPr lang="en-US" sz="3096" i="1" dirty="0">
                 <a:solidFill>
                   <a:srgbClr val="000000"/>
                 </a:solidFill>
@@ -4695,39 +5024,40 @@
         </p:nvSpPr>
         <p:spPr>
           <a:xfrm>
-            <a:off x="10457434" y="2961067"/>
+            <a:off x="10085539" y="2961067"/>
             <a:ext cx="98298" cy="479971"/>
           </a:xfrm>
-          <a:prstGeom prst="rect"/>
-          <a:noFill/>
-        </p:spPr>
-        <p:style>
-          <a:lnRef idx="2">
-            <a:srgbClr val="000000">
-              <a:alpha val="0"/>
-            </a:srgbClr>
-          </a:lnRef>
-          <a:fillRef idx="1">
-            <a:schemeClr val="accent1"/>
-          </a:fillRef>
-          <a:effectRef idx="0">
-            <a:schemeClr val="accent1"/>
-          </a:effectRef>
-          <a:fontRef idx="minor">
-            <a:schemeClr val="lt1"/>
-          </a:fontRef>
-        </p:style>
-        <p:txBody>
-          <a:bodyPr wrap="none" lIns="0" tIns="0" rtlCol="0" anchor="ctr">
-            <a:spAutoFit/>
-          </a:bodyPr>
-          <a:lstStyle>
-            <a:defPPr/>
-          </a:lstStyle>
-          <a:p>
-            <a:pPr/>
-            <a:r>
-              <a:rPr lang="en-US" sz="3096" dirty="1">
+          <a:prstGeom prst="rect">
+            <a:avLst/>
+          </a:prstGeom>
+          <a:noFill/>
+        </p:spPr>
+        <p:style>
+          <a:lnRef idx="2">
+            <a:srgbClr val="000000">
+              <a:alpha val="0"/>
+            </a:srgbClr>
+          </a:lnRef>
+          <a:fillRef idx="1">
+            <a:schemeClr val="accent1"/>
+          </a:fillRef>
+          <a:effectRef idx="0">
+            <a:schemeClr val="accent1"/>
+          </a:effectRef>
+          <a:fontRef idx="minor">
+            <a:schemeClr val="lt1"/>
+          </a:fontRef>
+        </p:style>
+        <p:txBody>
+          <a:bodyPr wrap="none" lIns="0" tIns="0" rtlCol="0" anchor="ctr">
+            <a:spAutoFit/>
+          </a:bodyPr>
+          <a:lstStyle>
+            <a:defPPr/>
+          </a:lstStyle>
+          <a:p>
+            <a:r>
+              <a:rPr lang="en-US" sz="3096">
                 <a:solidFill>
                   <a:srgbClr val="000000"/>
                 </a:solidFill>
@@ -4749,36 +5079,37 @@
             <a:off x="1158240" y="3386003"/>
             <a:ext cx="3202926" cy="480343"/>
           </a:xfrm>
-          <a:prstGeom prst="rect"/>
-          <a:noFill/>
-        </p:spPr>
-        <p:style>
-          <a:lnRef idx="2">
-            <a:srgbClr val="000000">
-              <a:alpha val="0"/>
-            </a:srgbClr>
-          </a:lnRef>
-          <a:fillRef idx="1">
-            <a:schemeClr val="accent1"/>
-          </a:fillRef>
-          <a:effectRef idx="0">
-            <a:schemeClr val="accent1"/>
-          </a:effectRef>
-          <a:fontRef idx="minor">
-            <a:schemeClr val="lt1"/>
-          </a:fontRef>
-        </p:style>
-        <p:txBody>
-          <a:bodyPr wrap="none" lIns="0" tIns="0" rtlCol="0" anchor="ctr">
-            <a:spAutoFit/>
-          </a:bodyPr>
-          <a:lstStyle>
-            <a:defPPr/>
-          </a:lstStyle>
-          <a:p>
-            <a:pPr/>
-            <a:r>
-              <a:rPr lang="en-US" sz="3098" dirty="1">
+          <a:prstGeom prst="rect">
+            <a:avLst/>
+          </a:prstGeom>
+          <a:noFill/>
+        </p:spPr>
+        <p:style>
+          <a:lnRef idx="2">
+            <a:srgbClr val="000000">
+              <a:alpha val="0"/>
+            </a:srgbClr>
+          </a:lnRef>
+          <a:fillRef idx="1">
+            <a:schemeClr val="accent1"/>
+          </a:fillRef>
+          <a:effectRef idx="0">
+            <a:schemeClr val="accent1"/>
+          </a:effectRef>
+          <a:fontRef idx="minor">
+            <a:schemeClr val="lt1"/>
+          </a:fontRef>
+        </p:style>
+        <p:txBody>
+          <a:bodyPr wrap="none" lIns="0" tIns="0" rtlCol="0" anchor="ctr">
+            <a:spAutoFit/>
+          </a:bodyPr>
+          <a:lstStyle>
+            <a:defPPr/>
+          </a:lstStyle>
+          <a:p>
+            <a:r>
+              <a:rPr lang="en-US" sz="3098">
                 <a:solidFill>
                   <a:srgbClr val="000000"/>
                 </a:solidFill>
@@ -4800,36 +5131,37 @@
             <a:off x="929640" y="4519670"/>
             <a:ext cx="137570" cy="439610"/>
           </a:xfrm>
-          <a:prstGeom prst="rect"/>
-          <a:noFill/>
-        </p:spPr>
-        <p:style>
-          <a:lnRef idx="2">
-            <a:srgbClr val="000000">
-              <a:alpha val="0"/>
-            </a:srgbClr>
-          </a:lnRef>
-          <a:fillRef idx="1">
-            <a:schemeClr val="accent1"/>
-          </a:fillRef>
-          <a:effectRef idx="0">
-            <a:schemeClr val="accent1"/>
-          </a:effectRef>
-          <a:fontRef idx="minor">
-            <a:schemeClr val="lt1"/>
-          </a:fontRef>
-        </p:style>
-        <p:txBody>
-          <a:bodyPr wrap="none" lIns="0" tIns="0" rtlCol="0" anchor="ctr">
-            <a:spAutoFit/>
-          </a:bodyPr>
-          <a:lstStyle>
-            <a:defPPr/>
-          </a:lstStyle>
-          <a:p>
-            <a:pPr/>
-            <a:r>
-              <a:rPr lang="en-US" sz="3098" dirty="1">
+          <a:prstGeom prst="rect">
+            <a:avLst/>
+          </a:prstGeom>
+          <a:noFill/>
+        </p:spPr>
+        <p:style>
+          <a:lnRef idx="2">
+            <a:srgbClr val="000000">
+              <a:alpha val="0"/>
+            </a:srgbClr>
+          </a:lnRef>
+          <a:fillRef idx="1">
+            <a:schemeClr val="accent1"/>
+          </a:fillRef>
+          <a:effectRef idx="0">
+            <a:schemeClr val="accent1"/>
+          </a:effectRef>
+          <a:fontRef idx="minor">
+            <a:schemeClr val="lt1"/>
+          </a:fontRef>
+        </p:style>
+        <p:txBody>
+          <a:bodyPr wrap="none" lIns="0" tIns="0" rtlCol="0" anchor="ctr">
+            <a:spAutoFit/>
+          </a:bodyPr>
+          <a:lstStyle>
+            <a:defPPr/>
+          </a:lstStyle>
+          <a:p>
+            <a:r>
+              <a:rPr lang="en-US" sz="3098">
                 <a:solidFill>
                   <a:srgbClr val="000000"/>
                 </a:solidFill>
@@ -4851,36 +5183,37 @@
             <a:off x="1158240" y="4491157"/>
             <a:ext cx="8200220" cy="480343"/>
           </a:xfrm>
-          <a:prstGeom prst="rect"/>
-          <a:noFill/>
-        </p:spPr>
-        <p:style>
-          <a:lnRef idx="2">
-            <a:srgbClr val="000000">
-              <a:alpha val="0"/>
-            </a:srgbClr>
-          </a:lnRef>
-          <a:fillRef idx="1">
-            <a:schemeClr val="accent1"/>
-          </a:fillRef>
-          <a:effectRef idx="0">
-            <a:schemeClr val="accent1"/>
-          </a:effectRef>
-          <a:fontRef idx="minor">
-            <a:schemeClr val="lt1"/>
-          </a:fontRef>
-        </p:style>
-        <p:txBody>
-          <a:bodyPr wrap="none" lIns="0" tIns="0" rtlCol="0" anchor="ctr">
-            <a:spAutoFit/>
-          </a:bodyPr>
-          <a:lstStyle>
-            <a:defPPr/>
-          </a:lstStyle>
-          <a:p>
-            <a:pPr/>
-            <a:r>
-              <a:rPr lang="en-US" sz="3098" dirty="1">
+          <a:prstGeom prst="rect">
+            <a:avLst/>
+          </a:prstGeom>
+          <a:noFill/>
+        </p:spPr>
+        <p:style>
+          <a:lnRef idx="2">
+            <a:srgbClr val="000000">
+              <a:alpha val="0"/>
+            </a:srgbClr>
+          </a:lnRef>
+          <a:fillRef idx="1">
+            <a:schemeClr val="accent1"/>
+          </a:fillRef>
+          <a:effectRef idx="0">
+            <a:schemeClr val="accent1"/>
+          </a:effectRef>
+          <a:fontRef idx="minor">
+            <a:schemeClr val="lt1"/>
+          </a:fontRef>
+        </p:style>
+        <p:txBody>
+          <a:bodyPr wrap="none" lIns="0" tIns="0" rtlCol="0" anchor="ctr">
+            <a:spAutoFit/>
+          </a:bodyPr>
+          <a:lstStyle>
+            <a:defPPr/>
+          </a:lstStyle>
+          <a:p>
+            <a:r>
+              <a:rPr lang="en-US" sz="3098">
                 <a:solidFill>
                   <a:srgbClr val="000000"/>
                 </a:solidFill>
@@ -4902,36 +5235,37 @@
             <a:off x="1158240" y="4918518"/>
             <a:ext cx="3717085" cy="479971"/>
           </a:xfrm>
-          <a:prstGeom prst="rect"/>
-          <a:noFill/>
-        </p:spPr>
-        <p:style>
-          <a:lnRef idx="2">
-            <a:srgbClr val="000000">
-              <a:alpha val="0"/>
-            </a:srgbClr>
-          </a:lnRef>
-          <a:fillRef idx="1">
-            <a:schemeClr val="accent1"/>
-          </a:fillRef>
-          <a:effectRef idx="0">
-            <a:schemeClr val="accent1"/>
-          </a:effectRef>
-          <a:fontRef idx="minor">
-            <a:schemeClr val="lt1"/>
-          </a:fontRef>
-        </p:style>
-        <p:txBody>
-          <a:bodyPr wrap="none" lIns="0" tIns="0" rtlCol="0" anchor="ctr">
-            <a:spAutoFit/>
-          </a:bodyPr>
-          <a:lstStyle>
-            <a:defPPr/>
-          </a:lstStyle>
-          <a:p>
-            <a:pPr/>
-            <a:r>
-              <a:rPr lang="en-US" sz="3096" dirty="1">
+          <a:prstGeom prst="rect">
+            <a:avLst/>
+          </a:prstGeom>
+          <a:noFill/>
+        </p:spPr>
+        <p:style>
+          <a:lnRef idx="2">
+            <a:srgbClr val="000000">
+              <a:alpha val="0"/>
+            </a:srgbClr>
+          </a:lnRef>
+          <a:fillRef idx="1">
+            <a:schemeClr val="accent1"/>
+          </a:fillRef>
+          <a:effectRef idx="0">
+            <a:schemeClr val="accent1"/>
+          </a:effectRef>
+          <a:fontRef idx="minor">
+            <a:schemeClr val="lt1"/>
+          </a:fontRef>
+        </p:style>
+        <p:txBody>
+          <a:bodyPr wrap="none" lIns="0" tIns="0" rtlCol="0" anchor="ctr">
+            <a:spAutoFit/>
+          </a:bodyPr>
+          <a:lstStyle>
+            <a:defPPr/>
+          </a:lstStyle>
+          <a:p>
+            <a:r>
+              <a:rPr lang="en-US" sz="3096">
                 <a:solidFill>
                   <a:srgbClr val="000000"/>
                 </a:solidFill>
@@ -4953,36 +5287,37 @@
             <a:off x="4871339" y="4918518"/>
             <a:ext cx="201972" cy="479971"/>
           </a:xfrm>
-          <a:prstGeom prst="rect"/>
-          <a:noFill/>
-        </p:spPr>
-        <p:style>
-          <a:lnRef idx="2">
-            <a:srgbClr val="000000">
-              <a:alpha val="0"/>
-            </a:srgbClr>
-          </a:lnRef>
-          <a:fillRef idx="1">
-            <a:schemeClr val="accent1"/>
-          </a:fillRef>
-          <a:effectRef idx="0">
-            <a:schemeClr val="accent1"/>
-          </a:effectRef>
-          <a:fontRef idx="minor">
-            <a:schemeClr val="lt1"/>
-          </a:fontRef>
-        </p:style>
-        <p:txBody>
-          <a:bodyPr wrap="none" lIns="0" tIns="0" rtlCol="0" anchor="ctr">
-            <a:spAutoFit/>
-          </a:bodyPr>
-          <a:lstStyle>
-            <a:defPPr/>
-          </a:lstStyle>
-          <a:p>
-            <a:pPr/>
-            <a:r>
-              <a:rPr lang="en-US" sz="3096" i="1" dirty="1">
+          <a:prstGeom prst="rect">
+            <a:avLst/>
+          </a:prstGeom>
+          <a:noFill/>
+        </p:spPr>
+        <p:style>
+          <a:lnRef idx="2">
+            <a:srgbClr val="000000">
+              <a:alpha val="0"/>
+            </a:srgbClr>
+          </a:lnRef>
+          <a:fillRef idx="1">
+            <a:schemeClr val="accent1"/>
+          </a:fillRef>
+          <a:effectRef idx="0">
+            <a:schemeClr val="accent1"/>
+          </a:effectRef>
+          <a:fontRef idx="minor">
+            <a:schemeClr val="lt1"/>
+          </a:fontRef>
+        </p:style>
+        <p:txBody>
+          <a:bodyPr wrap="none" lIns="0" tIns="0" rtlCol="0" anchor="ctr">
+            <a:spAutoFit/>
+          </a:bodyPr>
+          <a:lstStyle>
+            <a:defPPr/>
+          </a:lstStyle>
+          <a:p>
+            <a:r>
+              <a:rPr lang="en-US" sz="3096" i="1">
                 <a:solidFill>
                   <a:srgbClr val="000000"/>
                 </a:solidFill>
@@ -5004,36 +5339,37 @@
             <a:off x="5074031" y="4918518"/>
             <a:ext cx="647192" cy="479971"/>
           </a:xfrm>
-          <a:prstGeom prst="rect"/>
-          <a:noFill/>
-        </p:spPr>
-        <p:style>
-          <a:lnRef idx="2">
-            <a:srgbClr val="000000">
-              <a:alpha val="0"/>
-            </a:srgbClr>
-          </a:lnRef>
-          <a:fillRef idx="1">
-            <a:schemeClr val="accent1"/>
-          </a:fillRef>
-          <a:effectRef idx="0">
-            <a:schemeClr val="accent1"/>
-          </a:effectRef>
-          <a:fontRef idx="minor">
-            <a:schemeClr val="lt1"/>
-          </a:fontRef>
-        </p:style>
-        <p:txBody>
-          <a:bodyPr wrap="none" lIns="0" tIns="0" rtlCol="0" anchor="ctr">
-            <a:spAutoFit/>
-          </a:bodyPr>
-          <a:lstStyle>
-            <a:defPPr/>
-          </a:lstStyle>
-          <a:p>
-            <a:pPr/>
-            <a:r>
-              <a:rPr lang="en-US" sz="3096" dirty="1">
+          <a:prstGeom prst="rect">
+            <a:avLst/>
+          </a:prstGeom>
+          <a:noFill/>
+        </p:spPr>
+        <p:style>
+          <a:lnRef idx="2">
+            <a:srgbClr val="000000">
+              <a:alpha val="0"/>
+            </a:srgbClr>
+          </a:lnRef>
+          <a:fillRef idx="1">
+            <a:schemeClr val="accent1"/>
+          </a:fillRef>
+          <a:effectRef idx="0">
+            <a:schemeClr val="accent1"/>
+          </a:effectRef>
+          <a:fontRef idx="minor">
+            <a:schemeClr val="lt1"/>
+          </a:fontRef>
+        </p:style>
+        <p:txBody>
+          <a:bodyPr wrap="none" lIns="0" tIns="0" rtlCol="0" anchor="ctr">
+            <a:spAutoFit/>
+          </a:bodyPr>
+          <a:lstStyle>
+            <a:defPPr/>
+          </a:lstStyle>
+          <a:p>
+            <a:r>
+              <a:rPr lang="en-US" sz="3096">
                 <a:solidFill>
                   <a:srgbClr val="000000"/>
                 </a:solidFill>
@@ -5055,36 +5391,37 @@
             <a:off x="5723255" y="4932227"/>
             <a:ext cx="1513252" cy="460388"/>
           </a:xfrm>
-          <a:prstGeom prst="rect"/>
-          <a:noFill/>
-        </p:spPr>
-        <p:style>
-          <a:lnRef idx="2">
-            <a:srgbClr val="000000">
-              <a:alpha val="0"/>
-            </a:srgbClr>
-          </a:lnRef>
-          <a:fillRef idx="1">
-            <a:schemeClr val="accent1"/>
-          </a:fillRef>
-          <a:effectRef idx="0">
-            <a:schemeClr val="accent1"/>
-          </a:effectRef>
-          <a:fontRef idx="minor">
-            <a:schemeClr val="lt1"/>
-          </a:fontRef>
-        </p:style>
-        <p:txBody>
-          <a:bodyPr wrap="none" lIns="0" tIns="0" rtlCol="0" anchor="ctr">
-            <a:spAutoFit/>
-          </a:bodyPr>
-          <a:lstStyle>
-            <a:defPPr/>
-          </a:lstStyle>
-          <a:p>
-            <a:pPr/>
-            <a:r>
-              <a:rPr lang="en-US" sz="3096" dirty="1">
+          <a:prstGeom prst="rect">
+            <a:avLst/>
+          </a:prstGeom>
+          <a:noFill/>
+        </p:spPr>
+        <p:style>
+          <a:lnRef idx="2">
+            <a:srgbClr val="000000">
+              <a:alpha val="0"/>
+            </a:srgbClr>
+          </a:lnRef>
+          <a:fillRef idx="1">
+            <a:schemeClr val="accent1"/>
+          </a:fillRef>
+          <a:effectRef idx="0">
+            <a:schemeClr val="accent1"/>
+          </a:effectRef>
+          <a:fontRef idx="minor">
+            <a:schemeClr val="lt1"/>
+          </a:fontRef>
+        </p:style>
+        <p:txBody>
+          <a:bodyPr wrap="none" lIns="0" tIns="0" rtlCol="0" anchor="ctr">
+            <a:spAutoFit/>
+          </a:bodyPr>
+          <a:lstStyle>
+            <a:defPPr/>
+          </a:lstStyle>
+          <a:p>
+            <a:r>
+              <a:rPr lang="en-US" sz="3096">
                 <a:solidFill>
                   <a:srgbClr val="000000"/>
                 </a:solidFill>
@@ -5106,36 +5443,37 @@
             <a:off x="7238365" y="4918518"/>
             <a:ext cx="99066" cy="479971"/>
           </a:xfrm>
-          <a:prstGeom prst="rect"/>
-          <a:noFill/>
-        </p:spPr>
-        <p:style>
-          <a:lnRef idx="2">
-            <a:srgbClr val="000000">
-              <a:alpha val="0"/>
-            </a:srgbClr>
-          </a:lnRef>
-          <a:fillRef idx="1">
-            <a:schemeClr val="accent1"/>
-          </a:fillRef>
-          <a:effectRef idx="0">
-            <a:schemeClr val="accent1"/>
-          </a:effectRef>
-          <a:fontRef idx="minor">
-            <a:schemeClr val="lt1"/>
-          </a:fontRef>
-        </p:style>
-        <p:txBody>
-          <a:bodyPr wrap="none" lIns="0" tIns="0" rtlCol="0" anchor="ctr">
-            <a:spAutoFit/>
-          </a:bodyPr>
-          <a:lstStyle>
-            <a:defPPr/>
-          </a:lstStyle>
-          <a:p>
-            <a:pPr/>
-            <a:r>
-              <a:rPr lang="en-US" sz="3096" dirty="1">
+          <a:prstGeom prst="rect">
+            <a:avLst/>
+          </a:prstGeom>
+          <a:noFill/>
+        </p:spPr>
+        <p:style>
+          <a:lnRef idx="2">
+            <a:srgbClr val="000000">
+              <a:alpha val="0"/>
+            </a:srgbClr>
+          </a:lnRef>
+          <a:fillRef idx="1">
+            <a:schemeClr val="accent1"/>
+          </a:fillRef>
+          <a:effectRef idx="0">
+            <a:schemeClr val="accent1"/>
+          </a:effectRef>
+          <a:fontRef idx="minor">
+            <a:schemeClr val="lt1"/>
+          </a:fontRef>
+        </p:style>
+        <p:txBody>
+          <a:bodyPr wrap="none" lIns="0" tIns="0" rtlCol="0" anchor="ctr">
+            <a:spAutoFit/>
+          </a:bodyPr>
+          <a:lstStyle>
+            <a:defPPr/>
+          </a:lstStyle>
+          <a:p>
+            <a:r>
+              <a:rPr lang="en-US" sz="3096">
                 <a:solidFill>
                   <a:srgbClr val="000000"/>
                 </a:solidFill>
@@ -5148,12 +5486,15 @@
       </p:sp>
     </p:spTree>
   </p:cSld>
+  <p:clrMapOvr>
+    <a:masterClrMapping/>
+  </p:clrMapOvr>
 </p:sld>
 </file>
 
 <file path=ppt/slides/slide4.xml><?xml version="1.0" encoding="utf-8"?>
 <p:sld xmlns:a="http://schemas.openxmlformats.org/drawingml/2006/main" xmlns:r="http://schemas.openxmlformats.org/officeDocument/2006/relationships" xmlns:p="http://schemas.openxmlformats.org/presentationml/2006/main">
-  <p:cSld name="">
+  <p:cSld>
     <p:spTree>
       <p:nvGrpSpPr>
         <p:cNvPr id="1" name=""/>
@@ -5170,52 +5511,6 @@
       </p:grpSpPr>
       <p:sp>
         <p:nvSpPr>
-          <p:cNvPr id="2" name="New shape"/>
-          <p:cNvSpPr/>
-          <p:nvPr/>
-        </p:nvSpPr>
-        <p:spPr>
-          <a:xfrm>
-            <a:off x="0" y="-1"/>
-            <a:ext cx="12192000" cy="6857999"/>
-          </a:xfrm>
-          <a:prstGeom prst="rect"/>
-          <a:solidFill>
-            <a:srgbClr val="FFFFFF"/>
-          </a:solidFill>
-          <a:ln w="0">
-            <a:noFill/>
-          </a:ln>
-        </p:spPr>
-        <p:style>
-          <a:lnRef idx="2">
-            <a:schemeClr val="accent1">
-              <a:shade val="50000"/>
-            </a:schemeClr>
-          </a:lnRef>
-          <a:fillRef idx="1">
-            <a:schemeClr val="accent1"/>
-          </a:fillRef>
-          <a:effectRef idx="0">
-            <a:schemeClr val="accent1"/>
-          </a:effectRef>
-          <a:fontRef idx="minor">
-            <a:schemeClr val="lt1"/>
-          </a:fontRef>
-        </p:style>
-        <p:txBody>
-          <a:bodyPr rtlCol="0" anchor="ctr"/>
-          <a:lstStyle>
-            <a:defPPr/>
-          </a:lstStyle>
-          <a:p>
-            <a:pPr/>
-            <a:endParaRPr lang="en-US"/>
-          </a:p>
-        </p:txBody>
-      </p:sp>
-      <p:sp>
-        <p:nvSpPr>
           <p:cNvPr id="3" name="New shape"/>
           <p:cNvSpPr/>
           <p:nvPr/>
@@ -5225,36 +5520,37 @@
             <a:off x="929640" y="703804"/>
             <a:ext cx="2217411" cy="683121"/>
           </a:xfrm>
-          <a:prstGeom prst="rect"/>
-          <a:noFill/>
-        </p:spPr>
-        <p:style>
-          <a:lnRef idx="2">
-            <a:srgbClr val="000000">
-              <a:alpha val="0"/>
-            </a:srgbClr>
-          </a:lnRef>
-          <a:fillRef idx="1">
-            <a:schemeClr val="accent1"/>
-          </a:fillRef>
-          <a:effectRef idx="0">
-            <a:schemeClr val="accent1"/>
-          </a:effectRef>
-          <a:fontRef idx="minor">
-            <a:schemeClr val="lt1"/>
-          </a:fontRef>
-        </p:style>
-        <p:txBody>
-          <a:bodyPr wrap="none" lIns="0" tIns="0" rtlCol="0" anchor="ctr">
-            <a:spAutoFit/>
-          </a:bodyPr>
-          <a:lstStyle>
-            <a:defPPr/>
-          </a:lstStyle>
-          <a:p>
-            <a:pPr/>
-            <a:r>
-              <a:rPr lang="en-US" sz="4406" dirty="1">
+          <a:prstGeom prst="rect">
+            <a:avLst/>
+          </a:prstGeom>
+          <a:noFill/>
+        </p:spPr>
+        <p:style>
+          <a:lnRef idx="2">
+            <a:srgbClr val="000000">
+              <a:alpha val="0"/>
+            </a:srgbClr>
+          </a:lnRef>
+          <a:fillRef idx="1">
+            <a:schemeClr val="accent1"/>
+          </a:fillRef>
+          <a:effectRef idx="0">
+            <a:schemeClr val="accent1"/>
+          </a:effectRef>
+          <a:fontRef idx="minor">
+            <a:schemeClr val="lt1"/>
+          </a:fontRef>
+        </p:style>
+        <p:txBody>
+          <a:bodyPr wrap="none" lIns="0" tIns="0" rtlCol="0" anchor="ctr">
+            <a:spAutoFit/>
+          </a:bodyPr>
+          <a:lstStyle>
+            <a:defPPr/>
+          </a:lstStyle>
+          <a:p>
+            <a:r>
+              <a:rPr lang="en-US" sz="4406">
                 <a:solidFill>
                   <a:srgbClr val="00AFEF"/>
                 </a:solidFill>
@@ -5276,36 +5572,37 @@
             <a:off x="3238754" y="1817135"/>
             <a:ext cx="2306075" cy="446469"/>
           </a:xfrm>
-          <a:prstGeom prst="rect"/>
-          <a:noFill/>
-        </p:spPr>
-        <p:style>
-          <a:lnRef idx="2">
-            <a:srgbClr val="000000">
-              <a:alpha val="0"/>
-            </a:srgbClr>
-          </a:lnRef>
-          <a:fillRef idx="1">
-            <a:schemeClr val="accent1"/>
-          </a:fillRef>
-          <a:effectRef idx="0">
-            <a:schemeClr val="accent1"/>
-          </a:effectRef>
-          <a:fontRef idx="minor">
-            <a:schemeClr val="lt1"/>
-          </a:fontRef>
-        </p:style>
-        <p:txBody>
-          <a:bodyPr wrap="none" lIns="0" tIns="0" rtlCol="0" anchor="ctr">
-            <a:spAutoFit/>
-          </a:bodyPr>
-          <a:lstStyle>
-            <a:defPPr/>
-          </a:lstStyle>
-          <a:p>
-            <a:pPr/>
-            <a:r>
-              <a:rPr lang="en-US" sz="3002" dirty="1">
+          <a:prstGeom prst="rect">
+            <a:avLst/>
+          </a:prstGeom>
+          <a:noFill/>
+        </p:spPr>
+        <p:style>
+          <a:lnRef idx="2">
+            <a:srgbClr val="000000">
+              <a:alpha val="0"/>
+            </a:srgbClr>
+          </a:lnRef>
+          <a:fillRef idx="1">
+            <a:schemeClr val="accent1"/>
+          </a:fillRef>
+          <a:effectRef idx="0">
+            <a:schemeClr val="accent1"/>
+          </a:effectRef>
+          <a:fontRef idx="minor">
+            <a:schemeClr val="lt1"/>
+          </a:fontRef>
+        </p:style>
+        <p:txBody>
+          <a:bodyPr wrap="none" lIns="0" tIns="0" rtlCol="0" anchor="ctr">
+            <a:spAutoFit/>
+          </a:bodyPr>
+          <a:lstStyle>
+            <a:defPPr/>
+          </a:lstStyle>
+          <a:p>
+            <a:r>
+              <a:rPr lang="en-US" sz="3002">
                 <a:solidFill>
                   <a:srgbClr val="000000"/>
                 </a:solidFill>
@@ -5327,36 +5624,37 @@
             <a:off x="3238754" y="2355610"/>
             <a:ext cx="3142134" cy="446112"/>
           </a:xfrm>
-          <a:prstGeom prst="rect"/>
-          <a:noFill/>
-        </p:spPr>
-        <p:style>
-          <a:lnRef idx="2">
-            <a:srgbClr val="000000">
-              <a:alpha val="0"/>
-            </a:srgbClr>
-          </a:lnRef>
-          <a:fillRef idx="1">
-            <a:schemeClr val="accent1"/>
-          </a:fillRef>
-          <a:effectRef idx="0">
-            <a:schemeClr val="accent1"/>
-          </a:effectRef>
-          <a:fontRef idx="minor">
-            <a:schemeClr val="lt1"/>
-          </a:fontRef>
-        </p:style>
-        <p:txBody>
-          <a:bodyPr wrap="none" lIns="0" tIns="0" rtlCol="0" anchor="ctr">
-            <a:spAutoFit/>
-          </a:bodyPr>
-          <a:lstStyle>
-            <a:defPPr/>
-          </a:lstStyle>
-          <a:p>
-            <a:pPr/>
-            <a:r>
-              <a:rPr lang="en-US" sz="3000" dirty="1">
+          <a:prstGeom prst="rect">
+            <a:avLst/>
+          </a:prstGeom>
+          <a:noFill/>
+        </p:spPr>
+        <p:style>
+          <a:lnRef idx="2">
+            <a:srgbClr val="000000">
+              <a:alpha val="0"/>
+            </a:srgbClr>
+          </a:lnRef>
+          <a:fillRef idx="1">
+            <a:schemeClr val="accent1"/>
+          </a:fillRef>
+          <a:effectRef idx="0">
+            <a:schemeClr val="accent1"/>
+          </a:effectRef>
+          <a:fontRef idx="minor">
+            <a:schemeClr val="lt1"/>
+          </a:fontRef>
+        </p:style>
+        <p:txBody>
+          <a:bodyPr wrap="none" lIns="0" tIns="0" rtlCol="0" anchor="ctr">
+            <a:spAutoFit/>
+          </a:bodyPr>
+          <a:lstStyle>
+            <a:defPPr/>
+          </a:lstStyle>
+          <a:p>
+            <a:r>
+              <a:rPr lang="en-US" sz="3000">
                 <a:solidFill>
                   <a:srgbClr val="000000"/>
                 </a:solidFill>
@@ -5378,36 +5676,37 @@
             <a:off x="3238754" y="2893582"/>
             <a:ext cx="3980036" cy="446112"/>
           </a:xfrm>
-          <a:prstGeom prst="rect"/>
-          <a:noFill/>
-        </p:spPr>
-        <p:style>
-          <a:lnRef idx="2">
-            <a:srgbClr val="000000">
-              <a:alpha val="0"/>
-            </a:srgbClr>
-          </a:lnRef>
-          <a:fillRef idx="1">
-            <a:schemeClr val="accent1"/>
-          </a:fillRef>
-          <a:effectRef idx="0">
-            <a:schemeClr val="accent1"/>
-          </a:effectRef>
-          <a:fontRef idx="minor">
-            <a:schemeClr val="lt1"/>
-          </a:fontRef>
-        </p:style>
-        <p:txBody>
-          <a:bodyPr wrap="none" lIns="0" tIns="0" rtlCol="0" anchor="ctr">
-            <a:spAutoFit/>
-          </a:bodyPr>
-          <a:lstStyle>
-            <a:defPPr/>
-          </a:lstStyle>
-          <a:p>
-            <a:pPr/>
-            <a:r>
-              <a:rPr lang="en-US" sz="3000" dirty="1">
+          <a:prstGeom prst="rect">
+            <a:avLst/>
+          </a:prstGeom>
+          <a:noFill/>
+        </p:spPr>
+        <p:style>
+          <a:lnRef idx="2">
+            <a:srgbClr val="000000">
+              <a:alpha val="0"/>
+            </a:srgbClr>
+          </a:lnRef>
+          <a:fillRef idx="1">
+            <a:schemeClr val="accent1"/>
+          </a:fillRef>
+          <a:effectRef idx="0">
+            <a:schemeClr val="accent1"/>
+          </a:effectRef>
+          <a:fontRef idx="minor">
+            <a:schemeClr val="lt1"/>
+          </a:fontRef>
+        </p:style>
+        <p:txBody>
+          <a:bodyPr wrap="none" lIns="0" tIns="0" rtlCol="0" anchor="ctr">
+            <a:spAutoFit/>
+          </a:bodyPr>
+          <a:lstStyle>
+            <a:defPPr/>
+          </a:lstStyle>
+          <a:p>
+            <a:r>
+              <a:rPr lang="en-US" sz="3000">
                 <a:solidFill>
                   <a:srgbClr val="000000"/>
                 </a:solidFill>
@@ -5429,36 +5728,37 @@
             <a:off x="3238754" y="3433459"/>
             <a:ext cx="4817938" cy="446112"/>
           </a:xfrm>
-          <a:prstGeom prst="rect"/>
-          <a:noFill/>
-        </p:spPr>
-        <p:style>
-          <a:lnRef idx="2">
-            <a:srgbClr val="000000">
-              <a:alpha val="0"/>
-            </a:srgbClr>
-          </a:lnRef>
-          <a:fillRef idx="1">
-            <a:schemeClr val="accent1"/>
-          </a:fillRef>
-          <a:effectRef idx="0">
-            <a:schemeClr val="accent1"/>
-          </a:effectRef>
-          <a:fontRef idx="minor">
-            <a:schemeClr val="lt1"/>
-          </a:fontRef>
-        </p:style>
-        <p:txBody>
-          <a:bodyPr wrap="none" lIns="0" tIns="0" rtlCol="0" anchor="ctr">
-            <a:spAutoFit/>
-          </a:bodyPr>
-          <a:lstStyle>
-            <a:defPPr/>
-          </a:lstStyle>
-          <a:p>
-            <a:pPr/>
-            <a:r>
-              <a:rPr lang="en-US" sz="3000" dirty="1">
+          <a:prstGeom prst="rect">
+            <a:avLst/>
+          </a:prstGeom>
+          <a:noFill/>
+        </p:spPr>
+        <p:style>
+          <a:lnRef idx="2">
+            <a:srgbClr val="000000">
+              <a:alpha val="0"/>
+            </a:srgbClr>
+          </a:lnRef>
+          <a:fillRef idx="1">
+            <a:schemeClr val="accent1"/>
+          </a:fillRef>
+          <a:effectRef idx="0">
+            <a:schemeClr val="accent1"/>
+          </a:effectRef>
+          <a:fontRef idx="minor">
+            <a:schemeClr val="lt1"/>
+          </a:fontRef>
+        </p:style>
+        <p:txBody>
+          <a:bodyPr wrap="none" lIns="0" tIns="0" rtlCol="0" anchor="ctr">
+            <a:spAutoFit/>
+          </a:bodyPr>
+          <a:lstStyle>
+            <a:defPPr/>
+          </a:lstStyle>
+          <a:p>
+            <a:r>
+              <a:rPr lang="en-US" sz="3000">
                 <a:solidFill>
                   <a:srgbClr val="000000"/>
                 </a:solidFill>
@@ -5480,36 +5780,37 @@
             <a:off x="3238754" y="3971431"/>
             <a:ext cx="5655841" cy="446112"/>
           </a:xfrm>
-          <a:prstGeom prst="rect"/>
-          <a:noFill/>
-        </p:spPr>
-        <p:style>
-          <a:lnRef idx="2">
-            <a:srgbClr val="000000">
-              <a:alpha val="0"/>
-            </a:srgbClr>
-          </a:lnRef>
-          <a:fillRef idx="1">
-            <a:schemeClr val="accent1"/>
-          </a:fillRef>
-          <a:effectRef idx="0">
-            <a:schemeClr val="accent1"/>
-          </a:effectRef>
-          <a:fontRef idx="minor">
-            <a:schemeClr val="lt1"/>
-          </a:fontRef>
-        </p:style>
-        <p:txBody>
-          <a:bodyPr wrap="none" lIns="0" tIns="0" rtlCol="0" anchor="ctr">
-            <a:spAutoFit/>
-          </a:bodyPr>
-          <a:lstStyle>
-            <a:defPPr/>
-          </a:lstStyle>
-          <a:p>
-            <a:pPr/>
-            <a:r>
-              <a:rPr lang="en-US" sz="3000" dirty="1">
+          <a:prstGeom prst="rect">
+            <a:avLst/>
+          </a:prstGeom>
+          <a:noFill/>
+        </p:spPr>
+        <p:style>
+          <a:lnRef idx="2">
+            <a:srgbClr val="000000">
+              <a:alpha val="0"/>
+            </a:srgbClr>
+          </a:lnRef>
+          <a:fillRef idx="1">
+            <a:schemeClr val="accent1"/>
+          </a:fillRef>
+          <a:effectRef idx="0">
+            <a:schemeClr val="accent1"/>
+          </a:effectRef>
+          <a:fontRef idx="minor">
+            <a:schemeClr val="lt1"/>
+          </a:fontRef>
+        </p:style>
+        <p:txBody>
+          <a:bodyPr wrap="none" lIns="0" tIns="0" rtlCol="0" anchor="ctr">
+            <a:spAutoFit/>
+          </a:bodyPr>
+          <a:lstStyle>
+            <a:defPPr/>
+          </a:lstStyle>
+          <a:p>
+            <a:r>
+              <a:rPr lang="en-US" sz="3000">
                 <a:solidFill>
                   <a:srgbClr val="000000"/>
                 </a:solidFill>
@@ -5531,36 +5832,37 @@
             <a:off x="3238754" y="4509153"/>
             <a:ext cx="628929" cy="446469"/>
           </a:xfrm>
-          <a:prstGeom prst="rect"/>
-          <a:noFill/>
-        </p:spPr>
-        <p:style>
-          <a:lnRef idx="2">
-            <a:srgbClr val="000000">
-              <a:alpha val="0"/>
-            </a:srgbClr>
-          </a:lnRef>
-          <a:fillRef idx="1">
-            <a:schemeClr val="accent1"/>
-          </a:fillRef>
-          <a:effectRef idx="0">
-            <a:schemeClr val="accent1"/>
-          </a:effectRef>
-          <a:fontRef idx="minor">
-            <a:schemeClr val="lt1"/>
-          </a:fontRef>
-        </p:style>
-        <p:txBody>
-          <a:bodyPr wrap="none" lIns="0" tIns="0" rtlCol="0" anchor="ctr">
-            <a:spAutoFit/>
-          </a:bodyPr>
-          <a:lstStyle>
-            <a:defPPr/>
-          </a:lstStyle>
-          <a:p>
-            <a:pPr/>
-            <a:r>
-              <a:rPr lang="en-US" sz="3002" dirty="1">
+          <a:prstGeom prst="rect">
+            <a:avLst/>
+          </a:prstGeom>
+          <a:noFill/>
+        </p:spPr>
+        <p:style>
+          <a:lnRef idx="2">
+            <a:srgbClr val="000000">
+              <a:alpha val="0"/>
+            </a:srgbClr>
+          </a:lnRef>
+          <a:fillRef idx="1">
+            <a:schemeClr val="accent1"/>
+          </a:fillRef>
+          <a:effectRef idx="0">
+            <a:schemeClr val="accent1"/>
+          </a:effectRef>
+          <a:fontRef idx="minor">
+            <a:schemeClr val="lt1"/>
+          </a:fontRef>
+        </p:style>
+        <p:txBody>
+          <a:bodyPr wrap="none" lIns="0" tIns="0" rtlCol="0" anchor="ctr">
+            <a:spAutoFit/>
+          </a:bodyPr>
+          <a:lstStyle>
+            <a:defPPr/>
+          </a:lstStyle>
+          <a:p>
+            <a:r>
+              <a:rPr lang="en-US" sz="3002">
                 <a:solidFill>
                   <a:srgbClr val="000000"/>
                 </a:solidFill>
@@ -5573,12 +5875,15 @@
       </p:sp>
     </p:spTree>
   </p:cSld>
+  <p:clrMapOvr>
+    <a:masterClrMapping/>
+  </p:clrMapOvr>
 </p:sld>
 </file>
 
 <file path=ppt/slides/slide5.xml><?xml version="1.0" encoding="utf-8"?>
 <p:sld xmlns:a="http://schemas.openxmlformats.org/drawingml/2006/main" xmlns:r="http://schemas.openxmlformats.org/officeDocument/2006/relationships" xmlns:p="http://schemas.openxmlformats.org/presentationml/2006/main">
-  <p:cSld name="">
+  <p:cSld>
     <p:spTree>
       <p:nvGrpSpPr>
         <p:cNvPr id="1" name=""/>
@@ -5595,52 +5900,6 @@
       </p:grpSpPr>
       <p:sp>
         <p:nvSpPr>
-          <p:cNvPr id="2" name="New shape"/>
-          <p:cNvSpPr/>
-          <p:nvPr/>
-        </p:nvSpPr>
-        <p:spPr>
-          <a:xfrm>
-            <a:off x="0" y="-1"/>
-            <a:ext cx="12192000" cy="6857999"/>
-          </a:xfrm>
-          <a:prstGeom prst="rect"/>
-          <a:solidFill>
-            <a:srgbClr val="FFFFFF"/>
-          </a:solidFill>
-          <a:ln w="0">
-            <a:noFill/>
-          </a:ln>
-        </p:spPr>
-        <p:style>
-          <a:lnRef idx="2">
-            <a:schemeClr val="accent1">
-              <a:shade val="50000"/>
-            </a:schemeClr>
-          </a:lnRef>
-          <a:fillRef idx="1">
-            <a:schemeClr val="accent1"/>
-          </a:fillRef>
-          <a:effectRef idx="0">
-            <a:schemeClr val="accent1"/>
-          </a:effectRef>
-          <a:fontRef idx="minor">
-            <a:schemeClr val="lt1"/>
-          </a:fontRef>
-        </p:style>
-        <p:txBody>
-          <a:bodyPr rtlCol="0" anchor="ctr"/>
-          <a:lstStyle>
-            <a:defPPr/>
-          </a:lstStyle>
-          <a:p>
-            <a:pPr/>
-            <a:endParaRPr lang="en-US"/>
-          </a:p>
-        </p:txBody>
-      </p:sp>
-      <p:sp>
-        <p:nvSpPr>
           <p:cNvPr id="3" name="New shape"/>
           <p:cNvSpPr/>
           <p:nvPr/>
@@ -5650,36 +5909,37 @@
             <a:off x="929640" y="703804"/>
             <a:ext cx="2217411" cy="683121"/>
           </a:xfrm>
-          <a:prstGeom prst="rect"/>
-          <a:noFill/>
-        </p:spPr>
-        <p:style>
-          <a:lnRef idx="2">
-            <a:srgbClr val="000000">
-              <a:alpha val="0"/>
-            </a:srgbClr>
-          </a:lnRef>
-          <a:fillRef idx="1">
-            <a:schemeClr val="accent1"/>
-          </a:fillRef>
-          <a:effectRef idx="0">
-            <a:schemeClr val="accent1"/>
-          </a:effectRef>
-          <a:fontRef idx="minor">
-            <a:schemeClr val="lt1"/>
-          </a:fontRef>
-        </p:style>
-        <p:txBody>
-          <a:bodyPr wrap="none" lIns="0" tIns="0" rtlCol="0" anchor="ctr">
-            <a:spAutoFit/>
-          </a:bodyPr>
-          <a:lstStyle>
-            <a:defPPr/>
-          </a:lstStyle>
-          <a:p>
-            <a:pPr/>
-            <a:r>
-              <a:rPr lang="en-US" sz="4406" dirty="1">
+          <a:prstGeom prst="rect">
+            <a:avLst/>
+          </a:prstGeom>
+          <a:noFill/>
+        </p:spPr>
+        <p:style>
+          <a:lnRef idx="2">
+            <a:srgbClr val="000000">
+              <a:alpha val="0"/>
+            </a:srgbClr>
+          </a:lnRef>
+          <a:fillRef idx="1">
+            <a:schemeClr val="accent1"/>
+          </a:fillRef>
+          <a:effectRef idx="0">
+            <a:schemeClr val="accent1"/>
+          </a:effectRef>
+          <a:fontRef idx="minor">
+            <a:schemeClr val="lt1"/>
+          </a:fontRef>
+        </p:style>
+        <p:txBody>
+          <a:bodyPr wrap="none" lIns="0" tIns="0" rtlCol="0" anchor="ctr">
+            <a:spAutoFit/>
+          </a:bodyPr>
+          <a:lstStyle>
+            <a:defPPr/>
+          </a:lstStyle>
+          <a:p>
+            <a:r>
+              <a:rPr lang="en-US" sz="4406">
                 <a:solidFill>
                   <a:srgbClr val="00AFEF"/>
                 </a:solidFill>
@@ -5701,36 +5961,37 @@
             <a:off x="3238754" y="1817135"/>
             <a:ext cx="2306075" cy="446469"/>
           </a:xfrm>
-          <a:prstGeom prst="rect"/>
-          <a:noFill/>
-        </p:spPr>
-        <p:style>
-          <a:lnRef idx="2">
-            <a:srgbClr val="000000">
-              <a:alpha val="0"/>
-            </a:srgbClr>
-          </a:lnRef>
-          <a:fillRef idx="1">
-            <a:schemeClr val="accent1"/>
-          </a:fillRef>
-          <a:effectRef idx="0">
-            <a:schemeClr val="accent1"/>
-          </a:effectRef>
-          <a:fontRef idx="minor">
-            <a:schemeClr val="lt1"/>
-          </a:fontRef>
-        </p:style>
-        <p:txBody>
-          <a:bodyPr wrap="none" lIns="0" tIns="0" rtlCol="0" anchor="ctr">
-            <a:spAutoFit/>
-          </a:bodyPr>
-          <a:lstStyle>
-            <a:defPPr/>
-          </a:lstStyle>
-          <a:p>
-            <a:pPr/>
-            <a:r>
-              <a:rPr lang="en-US" sz="3002" dirty="1">
+          <a:prstGeom prst="rect">
+            <a:avLst/>
+          </a:prstGeom>
+          <a:noFill/>
+        </p:spPr>
+        <p:style>
+          <a:lnRef idx="2">
+            <a:srgbClr val="000000">
+              <a:alpha val="0"/>
+            </a:srgbClr>
+          </a:lnRef>
+          <a:fillRef idx="1">
+            <a:schemeClr val="accent1"/>
+          </a:fillRef>
+          <a:effectRef idx="0">
+            <a:schemeClr val="accent1"/>
+          </a:effectRef>
+          <a:fontRef idx="minor">
+            <a:schemeClr val="lt1"/>
+          </a:fontRef>
+        </p:style>
+        <p:txBody>
+          <a:bodyPr wrap="none" lIns="0" tIns="0" rtlCol="0" anchor="ctr">
+            <a:spAutoFit/>
+          </a:bodyPr>
+          <a:lstStyle>
+            <a:defPPr/>
+          </a:lstStyle>
+          <a:p>
+            <a:r>
+              <a:rPr lang="en-US" sz="3002">
                 <a:solidFill>
                   <a:srgbClr val="000000"/>
                 </a:solidFill>
@@ -5752,36 +6013,37 @@
             <a:off x="3238754" y="2355610"/>
             <a:ext cx="2932658" cy="446112"/>
           </a:xfrm>
-          <a:prstGeom prst="rect"/>
-          <a:noFill/>
-        </p:spPr>
-        <p:style>
-          <a:lnRef idx="2">
-            <a:srgbClr val="000000">
-              <a:alpha val="0"/>
-            </a:srgbClr>
-          </a:lnRef>
-          <a:fillRef idx="1">
-            <a:schemeClr val="accent1"/>
-          </a:fillRef>
-          <a:effectRef idx="0">
-            <a:schemeClr val="accent1"/>
-          </a:effectRef>
-          <a:fontRef idx="minor">
-            <a:schemeClr val="lt1"/>
-          </a:fontRef>
-        </p:style>
-        <p:txBody>
-          <a:bodyPr wrap="none" lIns="0" tIns="0" rtlCol="0" anchor="ctr">
-            <a:spAutoFit/>
-          </a:bodyPr>
-          <a:lstStyle>
-            <a:defPPr/>
-          </a:lstStyle>
-          <a:p>
-            <a:pPr/>
-            <a:r>
-              <a:rPr lang="en-US" sz="3000" dirty="1">
+          <a:prstGeom prst="rect">
+            <a:avLst/>
+          </a:prstGeom>
+          <a:noFill/>
+        </p:spPr>
+        <p:style>
+          <a:lnRef idx="2">
+            <a:srgbClr val="000000">
+              <a:alpha val="0"/>
+            </a:srgbClr>
+          </a:lnRef>
+          <a:fillRef idx="1">
+            <a:schemeClr val="accent1"/>
+          </a:fillRef>
+          <a:effectRef idx="0">
+            <a:schemeClr val="accent1"/>
+          </a:effectRef>
+          <a:fontRef idx="minor">
+            <a:schemeClr val="lt1"/>
+          </a:fontRef>
+        </p:style>
+        <p:txBody>
+          <a:bodyPr wrap="none" lIns="0" tIns="0" rtlCol="0" anchor="ctr">
+            <a:spAutoFit/>
+          </a:bodyPr>
+          <a:lstStyle>
+            <a:defPPr/>
+          </a:lstStyle>
+          <a:p>
+            <a:r>
+              <a:rPr lang="en-US" sz="3000">
                 <a:solidFill>
                   <a:srgbClr val="000000"/>
                 </a:solidFill>
@@ -5803,36 +6065,37 @@
             <a:off x="6171311" y="2355610"/>
             <a:ext cx="1466329" cy="446112"/>
           </a:xfrm>
-          <a:prstGeom prst="rect"/>
-          <a:noFill/>
-        </p:spPr>
-        <p:style>
-          <a:lnRef idx="2">
-            <a:srgbClr val="000000">
-              <a:alpha val="0"/>
-            </a:srgbClr>
-          </a:lnRef>
-          <a:fillRef idx="1">
-            <a:schemeClr val="accent1"/>
-          </a:fillRef>
-          <a:effectRef idx="0">
-            <a:schemeClr val="accent1"/>
-          </a:effectRef>
-          <a:fontRef idx="minor">
-            <a:schemeClr val="lt1"/>
-          </a:fontRef>
-        </p:style>
-        <p:txBody>
-          <a:bodyPr wrap="none" lIns="0" tIns="0" rtlCol="0" anchor="ctr">
-            <a:spAutoFit/>
-          </a:bodyPr>
-          <a:lstStyle>
-            <a:defPPr/>
-          </a:lstStyle>
-          <a:p>
-            <a:pPr/>
-            <a:r>
-              <a:rPr lang="en-US" sz="3000" dirty="1">
+          <a:prstGeom prst="rect">
+            <a:avLst/>
+          </a:prstGeom>
+          <a:noFill/>
+        </p:spPr>
+        <p:style>
+          <a:lnRef idx="2">
+            <a:srgbClr val="000000">
+              <a:alpha val="0"/>
+            </a:srgbClr>
+          </a:lnRef>
+          <a:fillRef idx="1">
+            <a:schemeClr val="accent1"/>
+          </a:fillRef>
+          <a:effectRef idx="0">
+            <a:schemeClr val="accent1"/>
+          </a:effectRef>
+          <a:fontRef idx="minor">
+            <a:schemeClr val="lt1"/>
+          </a:fontRef>
+        </p:style>
+        <p:txBody>
+          <a:bodyPr wrap="none" lIns="0" tIns="0" rtlCol="0" anchor="ctr">
+            <a:spAutoFit/>
+          </a:bodyPr>
+          <a:lstStyle>
+            <a:defPPr/>
+          </a:lstStyle>
+          <a:p>
+            <a:r>
+              <a:rPr lang="en-US" sz="3000">
                 <a:solidFill>
                   <a:srgbClr val="FF0000"/>
                 </a:solidFill>
@@ -5854,36 +6117,37 @@
             <a:off x="3238754" y="2893582"/>
             <a:ext cx="3980036" cy="446112"/>
           </a:xfrm>
-          <a:prstGeom prst="rect"/>
-          <a:noFill/>
-        </p:spPr>
-        <p:style>
-          <a:lnRef idx="2">
-            <a:srgbClr val="000000">
-              <a:alpha val="0"/>
-            </a:srgbClr>
-          </a:lnRef>
-          <a:fillRef idx="1">
-            <a:schemeClr val="accent1"/>
-          </a:fillRef>
-          <a:effectRef idx="0">
-            <a:schemeClr val="accent1"/>
-          </a:effectRef>
-          <a:fontRef idx="minor">
-            <a:schemeClr val="lt1"/>
-          </a:fontRef>
-        </p:style>
-        <p:txBody>
-          <a:bodyPr wrap="none" lIns="0" tIns="0" rtlCol="0" anchor="ctr">
-            <a:spAutoFit/>
-          </a:bodyPr>
-          <a:lstStyle>
-            <a:defPPr/>
-          </a:lstStyle>
-          <a:p>
-            <a:pPr/>
-            <a:r>
-              <a:rPr lang="en-US" sz="3000" dirty="1">
+          <a:prstGeom prst="rect">
+            <a:avLst/>
+          </a:prstGeom>
+          <a:noFill/>
+        </p:spPr>
+        <p:style>
+          <a:lnRef idx="2">
+            <a:srgbClr val="000000">
+              <a:alpha val="0"/>
+            </a:srgbClr>
+          </a:lnRef>
+          <a:fillRef idx="1">
+            <a:schemeClr val="accent1"/>
+          </a:fillRef>
+          <a:effectRef idx="0">
+            <a:schemeClr val="accent1"/>
+          </a:effectRef>
+          <a:fontRef idx="minor">
+            <a:schemeClr val="lt1"/>
+          </a:fontRef>
+        </p:style>
+        <p:txBody>
+          <a:bodyPr wrap="none" lIns="0" tIns="0" rtlCol="0" anchor="ctr">
+            <a:spAutoFit/>
+          </a:bodyPr>
+          <a:lstStyle>
+            <a:defPPr/>
+          </a:lstStyle>
+          <a:p>
+            <a:r>
+              <a:rPr lang="en-US" sz="3000">
                 <a:solidFill>
                   <a:srgbClr val="000000"/>
                 </a:solidFill>
@@ -5905,36 +6169,37 @@
             <a:off x="3238754" y="3433459"/>
             <a:ext cx="4817938" cy="446112"/>
           </a:xfrm>
-          <a:prstGeom prst="rect"/>
-          <a:noFill/>
-        </p:spPr>
-        <p:style>
-          <a:lnRef idx="2">
-            <a:srgbClr val="000000">
-              <a:alpha val="0"/>
-            </a:srgbClr>
-          </a:lnRef>
-          <a:fillRef idx="1">
-            <a:schemeClr val="accent1"/>
-          </a:fillRef>
-          <a:effectRef idx="0">
-            <a:schemeClr val="accent1"/>
-          </a:effectRef>
-          <a:fontRef idx="minor">
-            <a:schemeClr val="lt1"/>
-          </a:fontRef>
-        </p:style>
-        <p:txBody>
-          <a:bodyPr wrap="none" lIns="0" tIns="0" rtlCol="0" anchor="ctr">
-            <a:spAutoFit/>
-          </a:bodyPr>
-          <a:lstStyle>
-            <a:defPPr/>
-          </a:lstStyle>
-          <a:p>
-            <a:pPr/>
-            <a:r>
-              <a:rPr lang="en-US" sz="3000" dirty="1">
+          <a:prstGeom prst="rect">
+            <a:avLst/>
+          </a:prstGeom>
+          <a:noFill/>
+        </p:spPr>
+        <p:style>
+          <a:lnRef idx="2">
+            <a:srgbClr val="000000">
+              <a:alpha val="0"/>
+            </a:srgbClr>
+          </a:lnRef>
+          <a:fillRef idx="1">
+            <a:schemeClr val="accent1"/>
+          </a:fillRef>
+          <a:effectRef idx="0">
+            <a:schemeClr val="accent1"/>
+          </a:effectRef>
+          <a:fontRef idx="minor">
+            <a:schemeClr val="lt1"/>
+          </a:fontRef>
+        </p:style>
+        <p:txBody>
+          <a:bodyPr wrap="none" lIns="0" tIns="0" rtlCol="0" anchor="ctr">
+            <a:spAutoFit/>
+          </a:bodyPr>
+          <a:lstStyle>
+            <a:defPPr/>
+          </a:lstStyle>
+          <a:p>
+            <a:r>
+              <a:rPr lang="en-US" sz="3000">
                 <a:solidFill>
                   <a:srgbClr val="000000"/>
                 </a:solidFill>
@@ -5956,36 +6221,37 @@
             <a:off x="3238754" y="3971431"/>
             <a:ext cx="5655841" cy="446112"/>
           </a:xfrm>
-          <a:prstGeom prst="rect"/>
-          <a:noFill/>
-        </p:spPr>
-        <p:style>
-          <a:lnRef idx="2">
-            <a:srgbClr val="000000">
-              <a:alpha val="0"/>
-            </a:srgbClr>
-          </a:lnRef>
-          <a:fillRef idx="1">
-            <a:schemeClr val="accent1"/>
-          </a:fillRef>
-          <a:effectRef idx="0">
-            <a:schemeClr val="accent1"/>
-          </a:effectRef>
-          <a:fontRef idx="minor">
-            <a:schemeClr val="lt1"/>
-          </a:fontRef>
-        </p:style>
-        <p:txBody>
-          <a:bodyPr wrap="none" lIns="0" tIns="0" rtlCol="0" anchor="ctr">
-            <a:spAutoFit/>
-          </a:bodyPr>
-          <a:lstStyle>
-            <a:defPPr/>
-          </a:lstStyle>
-          <a:p>
-            <a:pPr/>
-            <a:r>
-              <a:rPr lang="en-US" sz="3000" dirty="1">
+          <a:prstGeom prst="rect">
+            <a:avLst/>
+          </a:prstGeom>
+          <a:noFill/>
+        </p:spPr>
+        <p:style>
+          <a:lnRef idx="2">
+            <a:srgbClr val="000000">
+              <a:alpha val="0"/>
+            </a:srgbClr>
+          </a:lnRef>
+          <a:fillRef idx="1">
+            <a:schemeClr val="accent1"/>
+          </a:fillRef>
+          <a:effectRef idx="0">
+            <a:schemeClr val="accent1"/>
+          </a:effectRef>
+          <a:fontRef idx="minor">
+            <a:schemeClr val="lt1"/>
+          </a:fontRef>
+        </p:style>
+        <p:txBody>
+          <a:bodyPr wrap="none" lIns="0" tIns="0" rtlCol="0" anchor="ctr">
+            <a:spAutoFit/>
+          </a:bodyPr>
+          <a:lstStyle>
+            <a:defPPr/>
+          </a:lstStyle>
+          <a:p>
+            <a:r>
+              <a:rPr lang="en-US" sz="3000">
                 <a:solidFill>
                   <a:srgbClr val="000000"/>
                 </a:solidFill>
@@ -6007,36 +6273,37 @@
             <a:off x="3238754" y="4509153"/>
             <a:ext cx="628929" cy="446469"/>
           </a:xfrm>
-          <a:prstGeom prst="rect"/>
-          <a:noFill/>
-        </p:spPr>
-        <p:style>
-          <a:lnRef idx="2">
-            <a:srgbClr val="000000">
-              <a:alpha val="0"/>
-            </a:srgbClr>
-          </a:lnRef>
-          <a:fillRef idx="1">
-            <a:schemeClr val="accent1"/>
-          </a:fillRef>
-          <a:effectRef idx="0">
-            <a:schemeClr val="accent1"/>
-          </a:effectRef>
-          <a:fontRef idx="minor">
-            <a:schemeClr val="lt1"/>
-          </a:fontRef>
-        </p:style>
-        <p:txBody>
-          <a:bodyPr wrap="none" lIns="0" tIns="0" rtlCol="0" anchor="ctr">
-            <a:spAutoFit/>
-          </a:bodyPr>
-          <a:lstStyle>
-            <a:defPPr/>
-          </a:lstStyle>
-          <a:p>
-            <a:pPr/>
-            <a:r>
-              <a:rPr lang="en-US" sz="3002" dirty="1">
+          <a:prstGeom prst="rect">
+            <a:avLst/>
+          </a:prstGeom>
+          <a:noFill/>
+        </p:spPr>
+        <p:style>
+          <a:lnRef idx="2">
+            <a:srgbClr val="000000">
+              <a:alpha val="0"/>
+            </a:srgbClr>
+          </a:lnRef>
+          <a:fillRef idx="1">
+            <a:schemeClr val="accent1"/>
+          </a:fillRef>
+          <a:effectRef idx="0">
+            <a:schemeClr val="accent1"/>
+          </a:effectRef>
+          <a:fontRef idx="minor">
+            <a:schemeClr val="lt1"/>
+          </a:fontRef>
+        </p:style>
+        <p:txBody>
+          <a:bodyPr wrap="none" lIns="0" tIns="0" rtlCol="0" anchor="ctr">
+            <a:spAutoFit/>
+          </a:bodyPr>
+          <a:lstStyle>
+            <a:defPPr/>
+          </a:lstStyle>
+          <a:p>
+            <a:r>
+              <a:rPr lang="en-US" sz="3002">
                 <a:solidFill>
                   <a:srgbClr val="000000"/>
                 </a:solidFill>
@@ -6049,12 +6316,15 @@
       </p:sp>
     </p:spTree>
   </p:cSld>
+  <p:clrMapOvr>
+    <a:masterClrMapping/>
+  </p:clrMapOvr>
 </p:sld>
 </file>
 
 <file path=ppt/slides/slide6.xml><?xml version="1.0" encoding="utf-8"?>
 <p:sld xmlns:a="http://schemas.openxmlformats.org/drawingml/2006/main" xmlns:r="http://schemas.openxmlformats.org/officeDocument/2006/relationships" xmlns:p="http://schemas.openxmlformats.org/presentationml/2006/main">
-  <p:cSld name="">
+  <p:cSld>
     <p:spTree>
       <p:nvGrpSpPr>
         <p:cNvPr id="1" name=""/>
@@ -6071,52 +6341,6 @@
       </p:grpSpPr>
       <p:sp>
         <p:nvSpPr>
-          <p:cNvPr id="2" name="New shape"/>
-          <p:cNvSpPr/>
-          <p:nvPr/>
-        </p:nvSpPr>
-        <p:spPr>
-          <a:xfrm>
-            <a:off x="0" y="-1"/>
-            <a:ext cx="12192000" cy="6857999"/>
-          </a:xfrm>
-          <a:prstGeom prst="rect"/>
-          <a:solidFill>
-            <a:srgbClr val="FFFFFF"/>
-          </a:solidFill>
-          <a:ln w="0">
-            <a:noFill/>
-          </a:ln>
-        </p:spPr>
-        <p:style>
-          <a:lnRef idx="2">
-            <a:schemeClr val="accent1">
-              <a:shade val="50000"/>
-            </a:schemeClr>
-          </a:lnRef>
-          <a:fillRef idx="1">
-            <a:schemeClr val="accent1"/>
-          </a:fillRef>
-          <a:effectRef idx="0">
-            <a:schemeClr val="accent1"/>
-          </a:effectRef>
-          <a:fontRef idx="minor">
-            <a:schemeClr val="lt1"/>
-          </a:fontRef>
-        </p:style>
-        <p:txBody>
-          <a:bodyPr rtlCol="0" anchor="ctr"/>
-          <a:lstStyle>
-            <a:defPPr/>
-          </a:lstStyle>
-          <a:p>
-            <a:pPr/>
-            <a:endParaRPr lang="en-US"/>
-          </a:p>
-        </p:txBody>
-      </p:sp>
-      <p:sp>
-        <p:nvSpPr>
           <p:cNvPr id="3" name="New shape"/>
           <p:cNvSpPr/>
           <p:nvPr/>
@@ -6126,36 +6350,37 @@
             <a:off x="929640" y="703804"/>
             <a:ext cx="2217411" cy="683121"/>
           </a:xfrm>
-          <a:prstGeom prst="rect"/>
-          <a:noFill/>
-        </p:spPr>
-        <p:style>
-          <a:lnRef idx="2">
-            <a:srgbClr val="000000">
-              <a:alpha val="0"/>
-            </a:srgbClr>
-          </a:lnRef>
-          <a:fillRef idx="1">
-            <a:schemeClr val="accent1"/>
-          </a:fillRef>
-          <a:effectRef idx="0">
-            <a:schemeClr val="accent1"/>
-          </a:effectRef>
-          <a:fontRef idx="minor">
-            <a:schemeClr val="lt1"/>
-          </a:fontRef>
-        </p:style>
-        <p:txBody>
-          <a:bodyPr wrap="none" lIns="0" tIns="0" rtlCol="0" anchor="ctr">
-            <a:spAutoFit/>
-          </a:bodyPr>
-          <a:lstStyle>
-            <a:defPPr/>
-          </a:lstStyle>
-          <a:p>
-            <a:pPr/>
-            <a:r>
-              <a:rPr lang="en-US" sz="4406" dirty="1">
+          <a:prstGeom prst="rect">
+            <a:avLst/>
+          </a:prstGeom>
+          <a:noFill/>
+        </p:spPr>
+        <p:style>
+          <a:lnRef idx="2">
+            <a:srgbClr val="000000">
+              <a:alpha val="0"/>
+            </a:srgbClr>
+          </a:lnRef>
+          <a:fillRef idx="1">
+            <a:schemeClr val="accent1"/>
+          </a:fillRef>
+          <a:effectRef idx="0">
+            <a:schemeClr val="accent1"/>
+          </a:effectRef>
+          <a:fontRef idx="minor">
+            <a:schemeClr val="lt1"/>
+          </a:fontRef>
+        </p:style>
+        <p:txBody>
+          <a:bodyPr wrap="none" lIns="0" tIns="0" rtlCol="0" anchor="ctr">
+            <a:spAutoFit/>
+          </a:bodyPr>
+          <a:lstStyle>
+            <a:defPPr/>
+          </a:lstStyle>
+          <a:p>
+            <a:r>
+              <a:rPr lang="en-US" sz="4406">
                 <a:solidFill>
                   <a:srgbClr val="00AFEF"/>
                 </a:solidFill>
@@ -6177,36 +6402,37 @@
             <a:off x="3238754" y="1817135"/>
             <a:ext cx="2306075" cy="446469"/>
           </a:xfrm>
-          <a:prstGeom prst="rect"/>
-          <a:noFill/>
-        </p:spPr>
-        <p:style>
-          <a:lnRef idx="2">
-            <a:srgbClr val="000000">
-              <a:alpha val="0"/>
-            </a:srgbClr>
-          </a:lnRef>
-          <a:fillRef idx="1">
-            <a:schemeClr val="accent1"/>
-          </a:fillRef>
-          <a:effectRef idx="0">
-            <a:schemeClr val="accent1"/>
-          </a:effectRef>
-          <a:fontRef idx="minor">
-            <a:schemeClr val="lt1"/>
-          </a:fontRef>
-        </p:style>
-        <p:txBody>
-          <a:bodyPr wrap="none" lIns="0" tIns="0" rtlCol="0" anchor="ctr">
-            <a:spAutoFit/>
-          </a:bodyPr>
-          <a:lstStyle>
-            <a:defPPr/>
-          </a:lstStyle>
-          <a:p>
-            <a:pPr/>
-            <a:r>
-              <a:rPr lang="en-US" sz="3002" dirty="1">
+          <a:prstGeom prst="rect">
+            <a:avLst/>
+          </a:prstGeom>
+          <a:noFill/>
+        </p:spPr>
+        <p:style>
+          <a:lnRef idx="2">
+            <a:srgbClr val="000000">
+              <a:alpha val="0"/>
+            </a:srgbClr>
+          </a:lnRef>
+          <a:fillRef idx="1">
+            <a:schemeClr val="accent1"/>
+          </a:fillRef>
+          <a:effectRef idx="0">
+            <a:schemeClr val="accent1"/>
+          </a:effectRef>
+          <a:fontRef idx="minor">
+            <a:schemeClr val="lt1"/>
+          </a:fontRef>
+        </p:style>
+        <p:txBody>
+          <a:bodyPr wrap="none" lIns="0" tIns="0" rtlCol="0" anchor="ctr">
+            <a:spAutoFit/>
+          </a:bodyPr>
+          <a:lstStyle>
+            <a:defPPr/>
+          </a:lstStyle>
+          <a:p>
+            <a:r>
+              <a:rPr lang="en-US" sz="3002">
                 <a:solidFill>
                   <a:srgbClr val="000000"/>
                 </a:solidFill>
@@ -6228,36 +6454,37 @@
             <a:off x="3238754" y="2355610"/>
             <a:ext cx="4398987" cy="446112"/>
           </a:xfrm>
-          <a:prstGeom prst="rect"/>
-          <a:noFill/>
-        </p:spPr>
-        <p:style>
-          <a:lnRef idx="2">
-            <a:srgbClr val="000000">
-              <a:alpha val="0"/>
-            </a:srgbClr>
-          </a:lnRef>
-          <a:fillRef idx="1">
-            <a:schemeClr val="accent1"/>
-          </a:fillRef>
-          <a:effectRef idx="0">
-            <a:schemeClr val="accent1"/>
-          </a:effectRef>
-          <a:fontRef idx="minor">
-            <a:schemeClr val="lt1"/>
-          </a:fontRef>
-        </p:style>
-        <p:txBody>
-          <a:bodyPr wrap="none" lIns="0" tIns="0" rtlCol="0" anchor="ctr">
-            <a:spAutoFit/>
-          </a:bodyPr>
-          <a:lstStyle>
-            <a:defPPr/>
-          </a:lstStyle>
-          <a:p>
-            <a:pPr/>
-            <a:r>
-              <a:rPr lang="en-US" sz="3000" dirty="1">
+          <a:prstGeom prst="rect">
+            <a:avLst/>
+          </a:prstGeom>
+          <a:noFill/>
+        </p:spPr>
+        <p:style>
+          <a:lnRef idx="2">
+            <a:srgbClr val="000000">
+              <a:alpha val="0"/>
+            </a:srgbClr>
+          </a:lnRef>
+          <a:fillRef idx="1">
+            <a:schemeClr val="accent1"/>
+          </a:fillRef>
+          <a:effectRef idx="0">
+            <a:schemeClr val="accent1"/>
+          </a:effectRef>
+          <a:fontRef idx="minor">
+            <a:schemeClr val="lt1"/>
+          </a:fontRef>
+        </p:style>
+        <p:txBody>
+          <a:bodyPr wrap="none" lIns="0" tIns="0" rtlCol="0" anchor="ctr">
+            <a:spAutoFit/>
+          </a:bodyPr>
+          <a:lstStyle>
+            <a:defPPr/>
+          </a:lstStyle>
+          <a:p>
+            <a:r>
+              <a:rPr lang="en-US" sz="3000">
                 <a:solidFill>
                   <a:srgbClr val="000000"/>
                 </a:solidFill>
@@ -6279,36 +6506,37 @@
             <a:off x="3238754" y="2893582"/>
             <a:ext cx="2932658" cy="446112"/>
           </a:xfrm>
-          <a:prstGeom prst="rect"/>
-          <a:noFill/>
-        </p:spPr>
-        <p:style>
-          <a:lnRef idx="2">
-            <a:srgbClr val="000000">
-              <a:alpha val="0"/>
-            </a:srgbClr>
-          </a:lnRef>
-          <a:fillRef idx="1">
-            <a:schemeClr val="accent1"/>
-          </a:fillRef>
-          <a:effectRef idx="0">
-            <a:schemeClr val="accent1"/>
-          </a:effectRef>
-          <a:fontRef idx="minor">
-            <a:schemeClr val="lt1"/>
-          </a:fontRef>
-        </p:style>
-        <p:txBody>
-          <a:bodyPr wrap="none" lIns="0" tIns="0" rtlCol="0" anchor="ctr">
-            <a:spAutoFit/>
-          </a:bodyPr>
-          <a:lstStyle>
-            <a:defPPr/>
-          </a:lstStyle>
-          <a:p>
-            <a:pPr/>
-            <a:r>
-              <a:rPr lang="en-US" sz="3000" dirty="1">
+          <a:prstGeom prst="rect">
+            <a:avLst/>
+          </a:prstGeom>
+          <a:noFill/>
+        </p:spPr>
+        <p:style>
+          <a:lnRef idx="2">
+            <a:srgbClr val="000000">
+              <a:alpha val="0"/>
+            </a:srgbClr>
+          </a:lnRef>
+          <a:fillRef idx="1">
+            <a:schemeClr val="accent1"/>
+          </a:fillRef>
+          <a:effectRef idx="0">
+            <a:schemeClr val="accent1"/>
+          </a:effectRef>
+          <a:fontRef idx="minor">
+            <a:schemeClr val="lt1"/>
+          </a:fontRef>
+        </p:style>
+        <p:txBody>
+          <a:bodyPr wrap="none" lIns="0" tIns="0" rtlCol="0" anchor="ctr">
+            <a:spAutoFit/>
+          </a:bodyPr>
+          <a:lstStyle>
+            <a:defPPr/>
+          </a:lstStyle>
+          <a:p>
+            <a:r>
+              <a:rPr lang="en-US" sz="3000">
                 <a:solidFill>
                   <a:srgbClr val="000000"/>
                 </a:solidFill>
@@ -6330,36 +6558,37 @@
             <a:off x="6171311" y="2893582"/>
             <a:ext cx="1466329" cy="446112"/>
           </a:xfrm>
-          <a:prstGeom prst="rect"/>
-          <a:noFill/>
-        </p:spPr>
-        <p:style>
-          <a:lnRef idx="2">
-            <a:srgbClr val="000000">
-              <a:alpha val="0"/>
-            </a:srgbClr>
-          </a:lnRef>
-          <a:fillRef idx="1">
-            <a:schemeClr val="accent1"/>
-          </a:fillRef>
-          <a:effectRef idx="0">
-            <a:schemeClr val="accent1"/>
-          </a:effectRef>
-          <a:fontRef idx="minor">
-            <a:schemeClr val="lt1"/>
-          </a:fontRef>
-        </p:style>
-        <p:txBody>
-          <a:bodyPr wrap="none" lIns="0" tIns="0" rtlCol="0" anchor="ctr">
-            <a:spAutoFit/>
-          </a:bodyPr>
-          <a:lstStyle>
-            <a:defPPr/>
-          </a:lstStyle>
-          <a:p>
-            <a:pPr/>
-            <a:r>
-              <a:rPr lang="en-US" sz="3000" dirty="1">
+          <a:prstGeom prst="rect">
+            <a:avLst/>
+          </a:prstGeom>
+          <a:noFill/>
+        </p:spPr>
+        <p:style>
+          <a:lnRef idx="2">
+            <a:srgbClr val="000000">
+              <a:alpha val="0"/>
+            </a:srgbClr>
+          </a:lnRef>
+          <a:fillRef idx="1">
+            <a:schemeClr val="accent1"/>
+          </a:fillRef>
+          <a:effectRef idx="0">
+            <a:schemeClr val="accent1"/>
+          </a:effectRef>
+          <a:fontRef idx="minor">
+            <a:schemeClr val="lt1"/>
+          </a:fontRef>
+        </p:style>
+        <p:txBody>
+          <a:bodyPr wrap="none" lIns="0" tIns="0" rtlCol="0" anchor="ctr">
+            <a:spAutoFit/>
+          </a:bodyPr>
+          <a:lstStyle>
+            <a:defPPr/>
+          </a:lstStyle>
+          <a:p>
+            <a:r>
+              <a:rPr lang="en-US" sz="3000">
                 <a:solidFill>
                   <a:srgbClr val="FF0000"/>
                 </a:solidFill>
@@ -6381,36 +6610,37 @@
             <a:off x="3238754" y="3433459"/>
             <a:ext cx="4817938" cy="446112"/>
           </a:xfrm>
-          <a:prstGeom prst="rect"/>
-          <a:noFill/>
-        </p:spPr>
-        <p:style>
-          <a:lnRef idx="2">
-            <a:srgbClr val="000000">
-              <a:alpha val="0"/>
-            </a:srgbClr>
-          </a:lnRef>
-          <a:fillRef idx="1">
-            <a:schemeClr val="accent1"/>
-          </a:fillRef>
-          <a:effectRef idx="0">
-            <a:schemeClr val="accent1"/>
-          </a:effectRef>
-          <a:fontRef idx="minor">
-            <a:schemeClr val="lt1"/>
-          </a:fontRef>
-        </p:style>
-        <p:txBody>
-          <a:bodyPr wrap="none" lIns="0" tIns="0" rtlCol="0" anchor="ctr">
-            <a:spAutoFit/>
-          </a:bodyPr>
-          <a:lstStyle>
-            <a:defPPr/>
-          </a:lstStyle>
-          <a:p>
-            <a:pPr/>
-            <a:r>
-              <a:rPr lang="en-US" sz="3000" dirty="1">
+          <a:prstGeom prst="rect">
+            <a:avLst/>
+          </a:prstGeom>
+          <a:noFill/>
+        </p:spPr>
+        <p:style>
+          <a:lnRef idx="2">
+            <a:srgbClr val="000000">
+              <a:alpha val="0"/>
+            </a:srgbClr>
+          </a:lnRef>
+          <a:fillRef idx="1">
+            <a:schemeClr val="accent1"/>
+          </a:fillRef>
+          <a:effectRef idx="0">
+            <a:schemeClr val="accent1"/>
+          </a:effectRef>
+          <a:fontRef idx="minor">
+            <a:schemeClr val="lt1"/>
+          </a:fontRef>
+        </p:style>
+        <p:txBody>
+          <a:bodyPr wrap="none" lIns="0" tIns="0" rtlCol="0" anchor="ctr">
+            <a:spAutoFit/>
+          </a:bodyPr>
+          <a:lstStyle>
+            <a:defPPr/>
+          </a:lstStyle>
+          <a:p>
+            <a:r>
+              <a:rPr lang="en-US" sz="3000">
                 <a:solidFill>
                   <a:srgbClr val="000000"/>
                 </a:solidFill>
@@ -6432,36 +6662,37 @@
             <a:off x="3238754" y="3971431"/>
             <a:ext cx="5655841" cy="446112"/>
           </a:xfrm>
-          <a:prstGeom prst="rect"/>
-          <a:noFill/>
-        </p:spPr>
-        <p:style>
-          <a:lnRef idx="2">
-            <a:srgbClr val="000000">
-              <a:alpha val="0"/>
-            </a:srgbClr>
-          </a:lnRef>
-          <a:fillRef idx="1">
-            <a:schemeClr val="accent1"/>
-          </a:fillRef>
-          <a:effectRef idx="0">
-            <a:schemeClr val="accent1"/>
-          </a:effectRef>
-          <a:fontRef idx="minor">
-            <a:schemeClr val="lt1"/>
-          </a:fontRef>
-        </p:style>
-        <p:txBody>
-          <a:bodyPr wrap="none" lIns="0" tIns="0" rtlCol="0" anchor="ctr">
-            <a:spAutoFit/>
-          </a:bodyPr>
-          <a:lstStyle>
-            <a:defPPr/>
-          </a:lstStyle>
-          <a:p>
-            <a:pPr/>
-            <a:r>
-              <a:rPr lang="en-US" sz="3000" dirty="1">
+          <a:prstGeom prst="rect">
+            <a:avLst/>
+          </a:prstGeom>
+          <a:noFill/>
+        </p:spPr>
+        <p:style>
+          <a:lnRef idx="2">
+            <a:srgbClr val="000000">
+              <a:alpha val="0"/>
+            </a:srgbClr>
+          </a:lnRef>
+          <a:fillRef idx="1">
+            <a:schemeClr val="accent1"/>
+          </a:fillRef>
+          <a:effectRef idx="0">
+            <a:schemeClr val="accent1"/>
+          </a:effectRef>
+          <a:fontRef idx="minor">
+            <a:schemeClr val="lt1"/>
+          </a:fontRef>
+        </p:style>
+        <p:txBody>
+          <a:bodyPr wrap="none" lIns="0" tIns="0" rtlCol="0" anchor="ctr">
+            <a:spAutoFit/>
+          </a:bodyPr>
+          <a:lstStyle>
+            <a:defPPr/>
+          </a:lstStyle>
+          <a:p>
+            <a:r>
+              <a:rPr lang="en-US" sz="3000">
                 <a:solidFill>
                   <a:srgbClr val="000000"/>
                 </a:solidFill>
@@ -6483,36 +6714,37 @@
             <a:off x="3238754" y="4509153"/>
             <a:ext cx="628929" cy="446469"/>
           </a:xfrm>
-          <a:prstGeom prst="rect"/>
-          <a:noFill/>
-        </p:spPr>
-        <p:style>
-          <a:lnRef idx="2">
-            <a:srgbClr val="000000">
-              <a:alpha val="0"/>
-            </a:srgbClr>
-          </a:lnRef>
-          <a:fillRef idx="1">
-            <a:schemeClr val="accent1"/>
-          </a:fillRef>
-          <a:effectRef idx="0">
-            <a:schemeClr val="accent1"/>
-          </a:effectRef>
-          <a:fontRef idx="minor">
-            <a:schemeClr val="lt1"/>
-          </a:fontRef>
-        </p:style>
-        <p:txBody>
-          <a:bodyPr wrap="none" lIns="0" tIns="0" rtlCol="0" anchor="ctr">
-            <a:spAutoFit/>
-          </a:bodyPr>
-          <a:lstStyle>
-            <a:defPPr/>
-          </a:lstStyle>
-          <a:p>
-            <a:pPr/>
-            <a:r>
-              <a:rPr lang="en-US" sz="3002" dirty="1">
+          <a:prstGeom prst="rect">
+            <a:avLst/>
+          </a:prstGeom>
+          <a:noFill/>
+        </p:spPr>
+        <p:style>
+          <a:lnRef idx="2">
+            <a:srgbClr val="000000">
+              <a:alpha val="0"/>
+            </a:srgbClr>
+          </a:lnRef>
+          <a:fillRef idx="1">
+            <a:schemeClr val="accent1"/>
+          </a:fillRef>
+          <a:effectRef idx="0">
+            <a:schemeClr val="accent1"/>
+          </a:effectRef>
+          <a:fontRef idx="minor">
+            <a:schemeClr val="lt1"/>
+          </a:fontRef>
+        </p:style>
+        <p:txBody>
+          <a:bodyPr wrap="none" lIns="0" tIns="0" rtlCol="0" anchor="ctr">
+            <a:spAutoFit/>
+          </a:bodyPr>
+          <a:lstStyle>
+            <a:defPPr/>
+          </a:lstStyle>
+          <a:p>
+            <a:r>
+              <a:rPr lang="en-US" sz="3002">
                 <a:solidFill>
                   <a:srgbClr val="000000"/>
                 </a:solidFill>
@@ -6525,12 +6757,15 @@
       </p:sp>
     </p:spTree>
   </p:cSld>
+  <p:clrMapOvr>
+    <a:masterClrMapping/>
+  </p:clrMapOvr>
 </p:sld>
 </file>
 
 <file path=ppt/slides/slide7.xml><?xml version="1.0" encoding="utf-8"?>
 <p:sld xmlns:a="http://schemas.openxmlformats.org/drawingml/2006/main" xmlns:r="http://schemas.openxmlformats.org/officeDocument/2006/relationships" xmlns:p="http://schemas.openxmlformats.org/presentationml/2006/main">
-  <p:cSld name="">
+  <p:cSld>
     <p:spTree>
       <p:nvGrpSpPr>
         <p:cNvPr id="1" name=""/>
@@ -6547,52 +6782,6 @@
       </p:grpSpPr>
       <p:sp>
         <p:nvSpPr>
-          <p:cNvPr id="2" name="New shape"/>
-          <p:cNvSpPr/>
-          <p:nvPr/>
-        </p:nvSpPr>
-        <p:spPr>
-          <a:xfrm>
-            <a:off x="0" y="-1"/>
-            <a:ext cx="12192000" cy="6857999"/>
-          </a:xfrm>
-          <a:prstGeom prst="rect"/>
-          <a:solidFill>
-            <a:srgbClr val="FFFFFF"/>
-          </a:solidFill>
-          <a:ln w="0">
-            <a:noFill/>
-          </a:ln>
-        </p:spPr>
-        <p:style>
-          <a:lnRef idx="2">
-            <a:schemeClr val="accent1">
-              <a:shade val="50000"/>
-            </a:schemeClr>
-          </a:lnRef>
-          <a:fillRef idx="1">
-            <a:schemeClr val="accent1"/>
-          </a:fillRef>
-          <a:effectRef idx="0">
-            <a:schemeClr val="accent1"/>
-          </a:effectRef>
-          <a:fontRef idx="minor">
-            <a:schemeClr val="lt1"/>
-          </a:fontRef>
-        </p:style>
-        <p:txBody>
-          <a:bodyPr rtlCol="0" anchor="ctr"/>
-          <a:lstStyle>
-            <a:defPPr/>
-          </a:lstStyle>
-          <a:p>
-            <a:pPr/>
-            <a:endParaRPr lang="en-US"/>
-          </a:p>
-        </p:txBody>
-      </p:sp>
-      <p:sp>
-        <p:nvSpPr>
           <p:cNvPr id="3" name="New shape"/>
           <p:cNvSpPr/>
           <p:nvPr/>
@@ -6602,36 +6791,37 @@
             <a:off x="929640" y="703804"/>
             <a:ext cx="2217411" cy="683121"/>
           </a:xfrm>
-          <a:prstGeom prst="rect"/>
-          <a:noFill/>
-        </p:spPr>
-        <p:style>
-          <a:lnRef idx="2">
-            <a:srgbClr val="000000">
-              <a:alpha val="0"/>
-            </a:srgbClr>
-          </a:lnRef>
-          <a:fillRef idx="1">
-            <a:schemeClr val="accent1"/>
-          </a:fillRef>
-          <a:effectRef idx="0">
-            <a:schemeClr val="accent1"/>
-          </a:effectRef>
-          <a:fontRef idx="minor">
-            <a:schemeClr val="lt1"/>
-          </a:fontRef>
-        </p:style>
-        <p:txBody>
-          <a:bodyPr wrap="none" lIns="0" tIns="0" rtlCol="0" anchor="ctr">
-            <a:spAutoFit/>
-          </a:bodyPr>
-          <a:lstStyle>
-            <a:defPPr/>
-          </a:lstStyle>
-          <a:p>
-            <a:pPr/>
-            <a:r>
-              <a:rPr lang="en-US" sz="4406" dirty="1">
+          <a:prstGeom prst="rect">
+            <a:avLst/>
+          </a:prstGeom>
+          <a:noFill/>
+        </p:spPr>
+        <p:style>
+          <a:lnRef idx="2">
+            <a:srgbClr val="000000">
+              <a:alpha val="0"/>
+            </a:srgbClr>
+          </a:lnRef>
+          <a:fillRef idx="1">
+            <a:schemeClr val="accent1"/>
+          </a:fillRef>
+          <a:effectRef idx="0">
+            <a:schemeClr val="accent1"/>
+          </a:effectRef>
+          <a:fontRef idx="minor">
+            <a:schemeClr val="lt1"/>
+          </a:fontRef>
+        </p:style>
+        <p:txBody>
+          <a:bodyPr wrap="none" lIns="0" tIns="0" rtlCol="0" anchor="ctr">
+            <a:spAutoFit/>
+          </a:bodyPr>
+          <a:lstStyle>
+            <a:defPPr/>
+          </a:lstStyle>
+          <a:p>
+            <a:r>
+              <a:rPr lang="en-US" sz="4406">
                 <a:solidFill>
                   <a:srgbClr val="00AFEF"/>
                 </a:solidFill>
@@ -6653,36 +6843,37 @@
             <a:off x="3238754" y="1817135"/>
             <a:ext cx="2306075" cy="446469"/>
           </a:xfrm>
-          <a:prstGeom prst="rect"/>
-          <a:noFill/>
-        </p:spPr>
-        <p:style>
-          <a:lnRef idx="2">
-            <a:srgbClr val="000000">
-              <a:alpha val="0"/>
-            </a:srgbClr>
-          </a:lnRef>
-          <a:fillRef idx="1">
-            <a:schemeClr val="accent1"/>
-          </a:fillRef>
-          <a:effectRef idx="0">
-            <a:schemeClr val="accent1"/>
-          </a:effectRef>
-          <a:fontRef idx="minor">
-            <a:schemeClr val="lt1"/>
-          </a:fontRef>
-        </p:style>
-        <p:txBody>
-          <a:bodyPr wrap="none" lIns="0" tIns="0" rtlCol="0" anchor="ctr">
-            <a:spAutoFit/>
-          </a:bodyPr>
-          <a:lstStyle>
-            <a:defPPr/>
-          </a:lstStyle>
-          <a:p>
-            <a:pPr/>
-            <a:r>
-              <a:rPr lang="en-US" sz="3002" dirty="1">
+          <a:prstGeom prst="rect">
+            <a:avLst/>
+          </a:prstGeom>
+          <a:noFill/>
+        </p:spPr>
+        <p:style>
+          <a:lnRef idx="2">
+            <a:srgbClr val="000000">
+              <a:alpha val="0"/>
+            </a:srgbClr>
+          </a:lnRef>
+          <a:fillRef idx="1">
+            <a:schemeClr val="accent1"/>
+          </a:fillRef>
+          <a:effectRef idx="0">
+            <a:schemeClr val="accent1"/>
+          </a:effectRef>
+          <a:fontRef idx="minor">
+            <a:schemeClr val="lt1"/>
+          </a:fontRef>
+        </p:style>
+        <p:txBody>
+          <a:bodyPr wrap="none" lIns="0" tIns="0" rtlCol="0" anchor="ctr">
+            <a:spAutoFit/>
+          </a:bodyPr>
+          <a:lstStyle>
+            <a:defPPr/>
+          </a:lstStyle>
+          <a:p>
+            <a:r>
+              <a:rPr lang="en-US" sz="3002">
                 <a:solidFill>
                   <a:srgbClr val="000000"/>
                 </a:solidFill>
@@ -6704,36 +6895,37 @@
             <a:off x="3238754" y="2355610"/>
             <a:ext cx="4398987" cy="446112"/>
           </a:xfrm>
-          <a:prstGeom prst="rect"/>
-          <a:noFill/>
-        </p:spPr>
-        <p:style>
-          <a:lnRef idx="2">
-            <a:srgbClr val="000000">
-              <a:alpha val="0"/>
-            </a:srgbClr>
-          </a:lnRef>
-          <a:fillRef idx="1">
-            <a:schemeClr val="accent1"/>
-          </a:fillRef>
-          <a:effectRef idx="0">
-            <a:schemeClr val="accent1"/>
-          </a:effectRef>
-          <a:fontRef idx="minor">
-            <a:schemeClr val="lt1"/>
-          </a:fontRef>
-        </p:style>
-        <p:txBody>
-          <a:bodyPr wrap="none" lIns="0" tIns="0" rtlCol="0" anchor="ctr">
-            <a:spAutoFit/>
-          </a:bodyPr>
-          <a:lstStyle>
-            <a:defPPr/>
-          </a:lstStyle>
-          <a:p>
-            <a:pPr/>
-            <a:r>
-              <a:rPr lang="en-US" sz="3000" dirty="1">
+          <a:prstGeom prst="rect">
+            <a:avLst/>
+          </a:prstGeom>
+          <a:noFill/>
+        </p:spPr>
+        <p:style>
+          <a:lnRef idx="2">
+            <a:srgbClr val="000000">
+              <a:alpha val="0"/>
+            </a:srgbClr>
+          </a:lnRef>
+          <a:fillRef idx="1">
+            <a:schemeClr val="accent1"/>
+          </a:fillRef>
+          <a:effectRef idx="0">
+            <a:schemeClr val="accent1"/>
+          </a:effectRef>
+          <a:fontRef idx="minor">
+            <a:schemeClr val="lt1"/>
+          </a:fontRef>
+        </p:style>
+        <p:txBody>
+          <a:bodyPr wrap="none" lIns="0" tIns="0" rtlCol="0" anchor="ctr">
+            <a:spAutoFit/>
+          </a:bodyPr>
+          <a:lstStyle>
+            <a:defPPr/>
+          </a:lstStyle>
+          <a:p>
+            <a:r>
+              <a:rPr lang="en-US" sz="3000">
                 <a:solidFill>
                   <a:srgbClr val="000000"/>
                 </a:solidFill>
@@ -6755,36 +6947,37 @@
             <a:off x="3238754" y="2893582"/>
             <a:ext cx="4398987" cy="446112"/>
           </a:xfrm>
-          <a:prstGeom prst="rect"/>
-          <a:noFill/>
-        </p:spPr>
-        <p:style>
-          <a:lnRef idx="2">
-            <a:srgbClr val="000000">
-              <a:alpha val="0"/>
-            </a:srgbClr>
-          </a:lnRef>
-          <a:fillRef idx="1">
-            <a:schemeClr val="accent1"/>
-          </a:fillRef>
-          <a:effectRef idx="0">
-            <a:schemeClr val="accent1"/>
-          </a:effectRef>
-          <a:fontRef idx="minor">
-            <a:schemeClr val="lt1"/>
-          </a:fontRef>
-        </p:style>
-        <p:txBody>
-          <a:bodyPr wrap="none" lIns="0" tIns="0" rtlCol="0" anchor="ctr">
-            <a:spAutoFit/>
-          </a:bodyPr>
-          <a:lstStyle>
-            <a:defPPr/>
-          </a:lstStyle>
-          <a:p>
-            <a:pPr/>
-            <a:r>
-              <a:rPr lang="en-US" sz="3000" dirty="1">
+          <a:prstGeom prst="rect">
+            <a:avLst/>
+          </a:prstGeom>
+          <a:noFill/>
+        </p:spPr>
+        <p:style>
+          <a:lnRef idx="2">
+            <a:srgbClr val="000000">
+              <a:alpha val="0"/>
+            </a:srgbClr>
+          </a:lnRef>
+          <a:fillRef idx="1">
+            <a:schemeClr val="accent1"/>
+          </a:fillRef>
+          <a:effectRef idx="0">
+            <a:schemeClr val="accent1"/>
+          </a:effectRef>
+          <a:fontRef idx="minor">
+            <a:schemeClr val="lt1"/>
+          </a:fontRef>
+        </p:style>
+        <p:txBody>
+          <a:bodyPr wrap="none" lIns="0" tIns="0" rtlCol="0" anchor="ctr">
+            <a:spAutoFit/>
+          </a:bodyPr>
+          <a:lstStyle>
+            <a:defPPr/>
+          </a:lstStyle>
+          <a:p>
+            <a:r>
+              <a:rPr lang="en-US" sz="3000">
                 <a:solidFill>
                   <a:srgbClr val="000000"/>
                 </a:solidFill>
@@ -6806,36 +6999,37 @@
             <a:off x="3238754" y="3433459"/>
             <a:ext cx="2932658" cy="446112"/>
           </a:xfrm>
-          <a:prstGeom prst="rect"/>
-          <a:noFill/>
-        </p:spPr>
-        <p:style>
-          <a:lnRef idx="2">
-            <a:srgbClr val="000000">
-              <a:alpha val="0"/>
-            </a:srgbClr>
-          </a:lnRef>
-          <a:fillRef idx="1">
-            <a:schemeClr val="accent1"/>
-          </a:fillRef>
-          <a:effectRef idx="0">
-            <a:schemeClr val="accent1"/>
-          </a:effectRef>
-          <a:fontRef idx="minor">
-            <a:schemeClr val="lt1"/>
-          </a:fontRef>
-        </p:style>
-        <p:txBody>
-          <a:bodyPr wrap="none" lIns="0" tIns="0" rtlCol="0" anchor="ctr">
-            <a:spAutoFit/>
-          </a:bodyPr>
-          <a:lstStyle>
-            <a:defPPr/>
-          </a:lstStyle>
-          <a:p>
-            <a:pPr/>
-            <a:r>
-              <a:rPr lang="en-US" sz="3000" dirty="1">
+          <a:prstGeom prst="rect">
+            <a:avLst/>
+          </a:prstGeom>
+          <a:noFill/>
+        </p:spPr>
+        <p:style>
+          <a:lnRef idx="2">
+            <a:srgbClr val="000000">
+              <a:alpha val="0"/>
+            </a:srgbClr>
+          </a:lnRef>
+          <a:fillRef idx="1">
+            <a:schemeClr val="accent1"/>
+          </a:fillRef>
+          <a:effectRef idx="0">
+            <a:schemeClr val="accent1"/>
+          </a:effectRef>
+          <a:fontRef idx="minor">
+            <a:schemeClr val="lt1"/>
+          </a:fontRef>
+        </p:style>
+        <p:txBody>
+          <a:bodyPr wrap="none" lIns="0" tIns="0" rtlCol="0" anchor="ctr">
+            <a:spAutoFit/>
+          </a:bodyPr>
+          <a:lstStyle>
+            <a:defPPr/>
+          </a:lstStyle>
+          <a:p>
+            <a:r>
+              <a:rPr lang="en-US" sz="3000">
                 <a:solidFill>
                   <a:srgbClr val="000000"/>
                 </a:solidFill>
@@ -6857,36 +7051,37 @@
             <a:off x="6171311" y="3433459"/>
             <a:ext cx="1466329" cy="446112"/>
           </a:xfrm>
-          <a:prstGeom prst="rect"/>
-          <a:noFill/>
-        </p:spPr>
-        <p:style>
-          <a:lnRef idx="2">
-            <a:srgbClr val="000000">
-              <a:alpha val="0"/>
-            </a:srgbClr>
-          </a:lnRef>
-          <a:fillRef idx="1">
-            <a:schemeClr val="accent1"/>
-          </a:fillRef>
-          <a:effectRef idx="0">
-            <a:schemeClr val="accent1"/>
-          </a:effectRef>
-          <a:fontRef idx="minor">
-            <a:schemeClr val="lt1"/>
-          </a:fontRef>
-        </p:style>
-        <p:txBody>
-          <a:bodyPr wrap="none" lIns="0" tIns="0" rtlCol="0" anchor="ctr">
-            <a:spAutoFit/>
-          </a:bodyPr>
-          <a:lstStyle>
-            <a:defPPr/>
-          </a:lstStyle>
-          <a:p>
-            <a:pPr/>
-            <a:r>
-              <a:rPr lang="en-US" sz="3000" dirty="1">
+          <a:prstGeom prst="rect">
+            <a:avLst/>
+          </a:prstGeom>
+          <a:noFill/>
+        </p:spPr>
+        <p:style>
+          <a:lnRef idx="2">
+            <a:srgbClr val="000000">
+              <a:alpha val="0"/>
+            </a:srgbClr>
+          </a:lnRef>
+          <a:fillRef idx="1">
+            <a:schemeClr val="accent1"/>
+          </a:fillRef>
+          <a:effectRef idx="0">
+            <a:schemeClr val="accent1"/>
+          </a:effectRef>
+          <a:fontRef idx="minor">
+            <a:schemeClr val="lt1"/>
+          </a:fontRef>
+        </p:style>
+        <p:txBody>
+          <a:bodyPr wrap="none" lIns="0" tIns="0" rtlCol="0" anchor="ctr">
+            <a:spAutoFit/>
+          </a:bodyPr>
+          <a:lstStyle>
+            <a:defPPr/>
+          </a:lstStyle>
+          <a:p>
+            <a:r>
+              <a:rPr lang="en-US" sz="3000">
                 <a:solidFill>
                   <a:srgbClr val="FF0000"/>
                 </a:solidFill>
@@ -6908,36 +7103,37 @@
             <a:off x="3238754" y="3971431"/>
             <a:ext cx="5655841" cy="446112"/>
           </a:xfrm>
-          <a:prstGeom prst="rect"/>
-          <a:noFill/>
-        </p:spPr>
-        <p:style>
-          <a:lnRef idx="2">
-            <a:srgbClr val="000000">
-              <a:alpha val="0"/>
-            </a:srgbClr>
-          </a:lnRef>
-          <a:fillRef idx="1">
-            <a:schemeClr val="accent1"/>
-          </a:fillRef>
-          <a:effectRef idx="0">
-            <a:schemeClr val="accent1"/>
-          </a:effectRef>
-          <a:fontRef idx="minor">
-            <a:schemeClr val="lt1"/>
-          </a:fontRef>
-        </p:style>
-        <p:txBody>
-          <a:bodyPr wrap="none" lIns="0" tIns="0" rtlCol="0" anchor="ctr">
-            <a:spAutoFit/>
-          </a:bodyPr>
-          <a:lstStyle>
-            <a:defPPr/>
-          </a:lstStyle>
-          <a:p>
-            <a:pPr/>
-            <a:r>
-              <a:rPr lang="en-US" sz="3000" dirty="1">
+          <a:prstGeom prst="rect">
+            <a:avLst/>
+          </a:prstGeom>
+          <a:noFill/>
+        </p:spPr>
+        <p:style>
+          <a:lnRef idx="2">
+            <a:srgbClr val="000000">
+              <a:alpha val="0"/>
+            </a:srgbClr>
+          </a:lnRef>
+          <a:fillRef idx="1">
+            <a:schemeClr val="accent1"/>
+          </a:fillRef>
+          <a:effectRef idx="0">
+            <a:schemeClr val="accent1"/>
+          </a:effectRef>
+          <a:fontRef idx="minor">
+            <a:schemeClr val="lt1"/>
+          </a:fontRef>
+        </p:style>
+        <p:txBody>
+          <a:bodyPr wrap="none" lIns="0" tIns="0" rtlCol="0" anchor="ctr">
+            <a:spAutoFit/>
+          </a:bodyPr>
+          <a:lstStyle>
+            <a:defPPr/>
+          </a:lstStyle>
+          <a:p>
+            <a:r>
+              <a:rPr lang="en-US" sz="3000">
                 <a:solidFill>
                   <a:srgbClr val="000000"/>
                 </a:solidFill>
@@ -6959,36 +7155,37 @@
             <a:off x="3238754" y="4509153"/>
             <a:ext cx="628929" cy="446469"/>
           </a:xfrm>
-          <a:prstGeom prst="rect"/>
-          <a:noFill/>
-        </p:spPr>
-        <p:style>
-          <a:lnRef idx="2">
-            <a:srgbClr val="000000">
-              <a:alpha val="0"/>
-            </a:srgbClr>
-          </a:lnRef>
-          <a:fillRef idx="1">
-            <a:schemeClr val="accent1"/>
-          </a:fillRef>
-          <a:effectRef idx="0">
-            <a:schemeClr val="accent1"/>
-          </a:effectRef>
-          <a:fontRef idx="minor">
-            <a:schemeClr val="lt1"/>
-          </a:fontRef>
-        </p:style>
-        <p:txBody>
-          <a:bodyPr wrap="none" lIns="0" tIns="0" rtlCol="0" anchor="ctr">
-            <a:spAutoFit/>
-          </a:bodyPr>
-          <a:lstStyle>
-            <a:defPPr/>
-          </a:lstStyle>
-          <a:p>
-            <a:pPr/>
-            <a:r>
-              <a:rPr lang="en-US" sz="3002" dirty="1">
+          <a:prstGeom prst="rect">
+            <a:avLst/>
+          </a:prstGeom>
+          <a:noFill/>
+        </p:spPr>
+        <p:style>
+          <a:lnRef idx="2">
+            <a:srgbClr val="000000">
+              <a:alpha val="0"/>
+            </a:srgbClr>
+          </a:lnRef>
+          <a:fillRef idx="1">
+            <a:schemeClr val="accent1"/>
+          </a:fillRef>
+          <a:effectRef idx="0">
+            <a:schemeClr val="accent1"/>
+          </a:effectRef>
+          <a:fontRef idx="minor">
+            <a:schemeClr val="lt1"/>
+          </a:fontRef>
+        </p:style>
+        <p:txBody>
+          <a:bodyPr wrap="none" lIns="0" tIns="0" rtlCol="0" anchor="ctr">
+            <a:spAutoFit/>
+          </a:bodyPr>
+          <a:lstStyle>
+            <a:defPPr/>
+          </a:lstStyle>
+          <a:p>
+            <a:r>
+              <a:rPr lang="en-US" sz="3002">
                 <a:solidFill>
                   <a:srgbClr val="000000"/>
                 </a:solidFill>
@@ -7001,12 +7198,15 @@
       </p:sp>
     </p:spTree>
   </p:cSld>
+  <p:clrMapOvr>
+    <a:masterClrMapping/>
+  </p:clrMapOvr>
 </p:sld>
 </file>
 
 <file path=ppt/slides/slide8.xml><?xml version="1.0" encoding="utf-8"?>
 <p:sld xmlns:a="http://schemas.openxmlformats.org/drawingml/2006/main" xmlns:r="http://schemas.openxmlformats.org/officeDocument/2006/relationships" xmlns:p="http://schemas.openxmlformats.org/presentationml/2006/main">
-  <p:cSld name="">
+  <p:cSld>
     <p:spTree>
       <p:nvGrpSpPr>
         <p:cNvPr id="1" name=""/>
@@ -7023,52 +7223,6 @@
       </p:grpSpPr>
       <p:sp>
         <p:nvSpPr>
-          <p:cNvPr id="2" name="New shape"/>
-          <p:cNvSpPr/>
-          <p:nvPr/>
-        </p:nvSpPr>
-        <p:spPr>
-          <a:xfrm>
-            <a:off x="0" y="-1"/>
-            <a:ext cx="12192000" cy="6857999"/>
-          </a:xfrm>
-          <a:prstGeom prst="rect"/>
-          <a:solidFill>
-            <a:srgbClr val="FFFFFF"/>
-          </a:solidFill>
-          <a:ln w="0">
-            <a:noFill/>
-          </a:ln>
-        </p:spPr>
-        <p:style>
-          <a:lnRef idx="2">
-            <a:schemeClr val="accent1">
-              <a:shade val="50000"/>
-            </a:schemeClr>
-          </a:lnRef>
-          <a:fillRef idx="1">
-            <a:schemeClr val="accent1"/>
-          </a:fillRef>
-          <a:effectRef idx="0">
-            <a:schemeClr val="accent1"/>
-          </a:effectRef>
-          <a:fontRef idx="minor">
-            <a:schemeClr val="lt1"/>
-          </a:fontRef>
-        </p:style>
-        <p:txBody>
-          <a:bodyPr rtlCol="0" anchor="ctr"/>
-          <a:lstStyle>
-            <a:defPPr/>
-          </a:lstStyle>
-          <a:p>
-            <a:pPr/>
-            <a:endParaRPr lang="en-US"/>
-          </a:p>
-        </p:txBody>
-      </p:sp>
-      <p:sp>
-        <p:nvSpPr>
           <p:cNvPr id="3" name="New shape"/>
           <p:cNvSpPr/>
           <p:nvPr/>
@@ -7078,36 +7232,37 @@
             <a:off x="929640" y="703804"/>
             <a:ext cx="2217411" cy="683121"/>
           </a:xfrm>
-          <a:prstGeom prst="rect"/>
-          <a:noFill/>
-        </p:spPr>
-        <p:style>
-          <a:lnRef idx="2">
-            <a:srgbClr val="000000">
-              <a:alpha val="0"/>
-            </a:srgbClr>
-          </a:lnRef>
-          <a:fillRef idx="1">
-            <a:schemeClr val="accent1"/>
-          </a:fillRef>
-          <a:effectRef idx="0">
-            <a:schemeClr val="accent1"/>
-          </a:effectRef>
-          <a:fontRef idx="minor">
-            <a:schemeClr val="lt1"/>
-          </a:fontRef>
-        </p:style>
-        <p:txBody>
-          <a:bodyPr wrap="none" lIns="0" tIns="0" rtlCol="0" anchor="ctr">
-            <a:spAutoFit/>
-          </a:bodyPr>
-          <a:lstStyle>
-            <a:defPPr/>
-          </a:lstStyle>
-          <a:p>
-            <a:pPr/>
-            <a:r>
-              <a:rPr lang="en-US" sz="4406" dirty="1">
+          <a:prstGeom prst="rect">
+            <a:avLst/>
+          </a:prstGeom>
+          <a:noFill/>
+        </p:spPr>
+        <p:style>
+          <a:lnRef idx="2">
+            <a:srgbClr val="000000">
+              <a:alpha val="0"/>
+            </a:srgbClr>
+          </a:lnRef>
+          <a:fillRef idx="1">
+            <a:schemeClr val="accent1"/>
+          </a:fillRef>
+          <a:effectRef idx="0">
+            <a:schemeClr val="accent1"/>
+          </a:effectRef>
+          <a:fontRef idx="minor">
+            <a:schemeClr val="lt1"/>
+          </a:fontRef>
+        </p:style>
+        <p:txBody>
+          <a:bodyPr wrap="none" lIns="0" tIns="0" rtlCol="0" anchor="ctr">
+            <a:spAutoFit/>
+          </a:bodyPr>
+          <a:lstStyle>
+            <a:defPPr/>
+          </a:lstStyle>
+          <a:p>
+            <a:r>
+              <a:rPr lang="en-US" sz="4406">
                 <a:solidFill>
                   <a:srgbClr val="00AFEF"/>
                 </a:solidFill>
@@ -7129,36 +7284,37 @@
             <a:off x="3238754" y="1817135"/>
             <a:ext cx="2306075" cy="446469"/>
           </a:xfrm>
-          <a:prstGeom prst="rect"/>
-          <a:noFill/>
-        </p:spPr>
-        <p:style>
-          <a:lnRef idx="2">
-            <a:srgbClr val="000000">
-              <a:alpha val="0"/>
-            </a:srgbClr>
-          </a:lnRef>
-          <a:fillRef idx="1">
-            <a:schemeClr val="accent1"/>
-          </a:fillRef>
-          <a:effectRef idx="0">
-            <a:schemeClr val="accent1"/>
-          </a:effectRef>
-          <a:fontRef idx="minor">
-            <a:schemeClr val="lt1"/>
-          </a:fontRef>
-        </p:style>
-        <p:txBody>
-          <a:bodyPr wrap="none" lIns="0" tIns="0" rtlCol="0" anchor="ctr">
-            <a:spAutoFit/>
-          </a:bodyPr>
-          <a:lstStyle>
-            <a:defPPr/>
-          </a:lstStyle>
-          <a:p>
-            <a:pPr/>
-            <a:r>
-              <a:rPr lang="en-US" sz="3002" dirty="1">
+          <a:prstGeom prst="rect">
+            <a:avLst/>
+          </a:prstGeom>
+          <a:noFill/>
+        </p:spPr>
+        <p:style>
+          <a:lnRef idx="2">
+            <a:srgbClr val="000000">
+              <a:alpha val="0"/>
+            </a:srgbClr>
+          </a:lnRef>
+          <a:fillRef idx="1">
+            <a:schemeClr val="accent1"/>
+          </a:fillRef>
+          <a:effectRef idx="0">
+            <a:schemeClr val="accent1"/>
+          </a:effectRef>
+          <a:fontRef idx="minor">
+            <a:schemeClr val="lt1"/>
+          </a:fontRef>
+        </p:style>
+        <p:txBody>
+          <a:bodyPr wrap="none" lIns="0" tIns="0" rtlCol="0" anchor="ctr">
+            <a:spAutoFit/>
+          </a:bodyPr>
+          <a:lstStyle>
+            <a:defPPr/>
+          </a:lstStyle>
+          <a:p>
+            <a:r>
+              <a:rPr lang="en-US" sz="3002">
                 <a:solidFill>
                   <a:srgbClr val="000000"/>
                 </a:solidFill>
@@ -7180,36 +7336,37 @@
             <a:off x="3238754" y="2355610"/>
             <a:ext cx="4398987" cy="446112"/>
           </a:xfrm>
-          <a:prstGeom prst="rect"/>
-          <a:noFill/>
-        </p:spPr>
-        <p:style>
-          <a:lnRef idx="2">
-            <a:srgbClr val="000000">
-              <a:alpha val="0"/>
-            </a:srgbClr>
-          </a:lnRef>
-          <a:fillRef idx="1">
-            <a:schemeClr val="accent1"/>
-          </a:fillRef>
-          <a:effectRef idx="0">
-            <a:schemeClr val="accent1"/>
-          </a:effectRef>
-          <a:fontRef idx="minor">
-            <a:schemeClr val="lt1"/>
-          </a:fontRef>
-        </p:style>
-        <p:txBody>
-          <a:bodyPr wrap="none" lIns="0" tIns="0" rtlCol="0" anchor="ctr">
-            <a:spAutoFit/>
-          </a:bodyPr>
-          <a:lstStyle>
-            <a:defPPr/>
-          </a:lstStyle>
-          <a:p>
-            <a:pPr/>
-            <a:r>
-              <a:rPr lang="en-US" sz="3000" dirty="1">
+          <a:prstGeom prst="rect">
+            <a:avLst/>
+          </a:prstGeom>
+          <a:noFill/>
+        </p:spPr>
+        <p:style>
+          <a:lnRef idx="2">
+            <a:srgbClr val="000000">
+              <a:alpha val="0"/>
+            </a:srgbClr>
+          </a:lnRef>
+          <a:fillRef idx="1">
+            <a:schemeClr val="accent1"/>
+          </a:fillRef>
+          <a:effectRef idx="0">
+            <a:schemeClr val="accent1"/>
+          </a:effectRef>
+          <a:fontRef idx="minor">
+            <a:schemeClr val="lt1"/>
+          </a:fontRef>
+        </p:style>
+        <p:txBody>
+          <a:bodyPr wrap="none" lIns="0" tIns="0" rtlCol="0" anchor="ctr">
+            <a:spAutoFit/>
+          </a:bodyPr>
+          <a:lstStyle>
+            <a:defPPr/>
+          </a:lstStyle>
+          <a:p>
+            <a:r>
+              <a:rPr lang="en-US" sz="3000">
                 <a:solidFill>
                   <a:srgbClr val="000000"/>
                 </a:solidFill>
@@ -7231,36 +7388,37 @@
             <a:off x="3238754" y="2893582"/>
             <a:ext cx="4398987" cy="446112"/>
           </a:xfrm>
-          <a:prstGeom prst="rect"/>
-          <a:noFill/>
-        </p:spPr>
-        <p:style>
-          <a:lnRef idx="2">
-            <a:srgbClr val="000000">
-              <a:alpha val="0"/>
-            </a:srgbClr>
-          </a:lnRef>
-          <a:fillRef idx="1">
-            <a:schemeClr val="accent1"/>
-          </a:fillRef>
-          <a:effectRef idx="0">
-            <a:schemeClr val="accent1"/>
-          </a:effectRef>
-          <a:fontRef idx="minor">
-            <a:schemeClr val="lt1"/>
-          </a:fontRef>
-        </p:style>
-        <p:txBody>
-          <a:bodyPr wrap="none" lIns="0" tIns="0" rtlCol="0" anchor="ctr">
-            <a:spAutoFit/>
-          </a:bodyPr>
-          <a:lstStyle>
-            <a:defPPr/>
-          </a:lstStyle>
-          <a:p>
-            <a:pPr/>
-            <a:r>
-              <a:rPr lang="en-US" sz="3000" dirty="1">
+          <a:prstGeom prst="rect">
+            <a:avLst/>
+          </a:prstGeom>
+          <a:noFill/>
+        </p:spPr>
+        <p:style>
+          <a:lnRef idx="2">
+            <a:srgbClr val="000000">
+              <a:alpha val="0"/>
+            </a:srgbClr>
+          </a:lnRef>
+          <a:fillRef idx="1">
+            <a:schemeClr val="accent1"/>
+          </a:fillRef>
+          <a:effectRef idx="0">
+            <a:schemeClr val="accent1"/>
+          </a:effectRef>
+          <a:fontRef idx="minor">
+            <a:schemeClr val="lt1"/>
+          </a:fontRef>
+        </p:style>
+        <p:txBody>
+          <a:bodyPr wrap="none" lIns="0" tIns="0" rtlCol="0" anchor="ctr">
+            <a:spAutoFit/>
+          </a:bodyPr>
+          <a:lstStyle>
+            <a:defPPr/>
+          </a:lstStyle>
+          <a:p>
+            <a:r>
+              <a:rPr lang="en-US" sz="3000">
                 <a:solidFill>
                   <a:srgbClr val="000000"/>
                 </a:solidFill>
@@ -7282,36 +7440,37 @@
             <a:off x="3238754" y="3433459"/>
             <a:ext cx="4398987" cy="446112"/>
           </a:xfrm>
-          <a:prstGeom prst="rect"/>
-          <a:noFill/>
-        </p:spPr>
-        <p:style>
-          <a:lnRef idx="2">
-            <a:srgbClr val="000000">
-              <a:alpha val="0"/>
-            </a:srgbClr>
-          </a:lnRef>
-          <a:fillRef idx="1">
-            <a:schemeClr val="accent1"/>
-          </a:fillRef>
-          <a:effectRef idx="0">
-            <a:schemeClr val="accent1"/>
-          </a:effectRef>
-          <a:fontRef idx="minor">
-            <a:schemeClr val="lt1"/>
-          </a:fontRef>
-        </p:style>
-        <p:txBody>
-          <a:bodyPr wrap="none" lIns="0" tIns="0" rtlCol="0" anchor="ctr">
-            <a:spAutoFit/>
-          </a:bodyPr>
-          <a:lstStyle>
-            <a:defPPr/>
-          </a:lstStyle>
-          <a:p>
-            <a:pPr/>
-            <a:r>
-              <a:rPr lang="en-US" sz="3000" dirty="1">
+          <a:prstGeom prst="rect">
+            <a:avLst/>
+          </a:prstGeom>
+          <a:noFill/>
+        </p:spPr>
+        <p:style>
+          <a:lnRef idx="2">
+            <a:srgbClr val="000000">
+              <a:alpha val="0"/>
+            </a:srgbClr>
+          </a:lnRef>
+          <a:fillRef idx="1">
+            <a:schemeClr val="accent1"/>
+          </a:fillRef>
+          <a:effectRef idx="0">
+            <a:schemeClr val="accent1"/>
+          </a:effectRef>
+          <a:fontRef idx="minor">
+            <a:schemeClr val="lt1"/>
+          </a:fontRef>
+        </p:style>
+        <p:txBody>
+          <a:bodyPr wrap="none" lIns="0" tIns="0" rtlCol="0" anchor="ctr">
+            <a:spAutoFit/>
+          </a:bodyPr>
+          <a:lstStyle>
+            <a:defPPr/>
+          </a:lstStyle>
+          <a:p>
+            <a:r>
+              <a:rPr lang="en-US" sz="3000">
                 <a:solidFill>
                   <a:srgbClr val="000000"/>
                 </a:solidFill>
@@ -7333,36 +7492,37 @@
             <a:off x="3238754" y="3971431"/>
             <a:ext cx="2932658" cy="446112"/>
           </a:xfrm>
-          <a:prstGeom prst="rect"/>
-          <a:noFill/>
-        </p:spPr>
-        <p:style>
-          <a:lnRef idx="2">
-            <a:srgbClr val="000000">
-              <a:alpha val="0"/>
-            </a:srgbClr>
-          </a:lnRef>
-          <a:fillRef idx="1">
-            <a:schemeClr val="accent1"/>
-          </a:fillRef>
-          <a:effectRef idx="0">
-            <a:schemeClr val="accent1"/>
-          </a:effectRef>
-          <a:fontRef idx="minor">
-            <a:schemeClr val="lt1"/>
-          </a:fontRef>
-        </p:style>
-        <p:txBody>
-          <a:bodyPr wrap="none" lIns="0" tIns="0" rtlCol="0" anchor="ctr">
-            <a:spAutoFit/>
-          </a:bodyPr>
-          <a:lstStyle>
-            <a:defPPr/>
-          </a:lstStyle>
-          <a:p>
-            <a:pPr/>
-            <a:r>
-              <a:rPr lang="en-US" sz="3000" dirty="1">
+          <a:prstGeom prst="rect">
+            <a:avLst/>
+          </a:prstGeom>
+          <a:noFill/>
+        </p:spPr>
+        <p:style>
+          <a:lnRef idx="2">
+            <a:srgbClr val="000000">
+              <a:alpha val="0"/>
+            </a:srgbClr>
+          </a:lnRef>
+          <a:fillRef idx="1">
+            <a:schemeClr val="accent1"/>
+          </a:fillRef>
+          <a:effectRef idx="0">
+            <a:schemeClr val="accent1"/>
+          </a:effectRef>
+          <a:fontRef idx="minor">
+            <a:schemeClr val="lt1"/>
+          </a:fontRef>
+        </p:style>
+        <p:txBody>
+          <a:bodyPr wrap="none" lIns="0" tIns="0" rtlCol="0" anchor="ctr">
+            <a:spAutoFit/>
+          </a:bodyPr>
+          <a:lstStyle>
+            <a:defPPr/>
+          </a:lstStyle>
+          <a:p>
+            <a:r>
+              <a:rPr lang="en-US" sz="3000">
                 <a:solidFill>
                   <a:srgbClr val="000000"/>
                 </a:solidFill>
@@ -7384,36 +7544,37 @@
             <a:off x="6171311" y="3971431"/>
             <a:ext cx="1466329" cy="446112"/>
           </a:xfrm>
-          <a:prstGeom prst="rect"/>
-          <a:noFill/>
-        </p:spPr>
-        <p:style>
-          <a:lnRef idx="2">
-            <a:srgbClr val="000000">
-              <a:alpha val="0"/>
-            </a:srgbClr>
-          </a:lnRef>
-          <a:fillRef idx="1">
-            <a:schemeClr val="accent1"/>
-          </a:fillRef>
-          <a:effectRef idx="0">
-            <a:schemeClr val="accent1"/>
-          </a:effectRef>
-          <a:fontRef idx="minor">
-            <a:schemeClr val="lt1"/>
-          </a:fontRef>
-        </p:style>
-        <p:txBody>
-          <a:bodyPr wrap="none" lIns="0" tIns="0" rtlCol="0" anchor="ctr">
-            <a:spAutoFit/>
-          </a:bodyPr>
-          <a:lstStyle>
-            <a:defPPr/>
-          </a:lstStyle>
-          <a:p>
-            <a:pPr/>
-            <a:r>
-              <a:rPr lang="en-US" sz="3000" dirty="1">
+          <a:prstGeom prst="rect">
+            <a:avLst/>
+          </a:prstGeom>
+          <a:noFill/>
+        </p:spPr>
+        <p:style>
+          <a:lnRef idx="2">
+            <a:srgbClr val="000000">
+              <a:alpha val="0"/>
+            </a:srgbClr>
+          </a:lnRef>
+          <a:fillRef idx="1">
+            <a:schemeClr val="accent1"/>
+          </a:fillRef>
+          <a:effectRef idx="0">
+            <a:schemeClr val="accent1"/>
+          </a:effectRef>
+          <a:fontRef idx="minor">
+            <a:schemeClr val="lt1"/>
+          </a:fontRef>
+        </p:style>
+        <p:txBody>
+          <a:bodyPr wrap="none" lIns="0" tIns="0" rtlCol="0" anchor="ctr">
+            <a:spAutoFit/>
+          </a:bodyPr>
+          <a:lstStyle>
+            <a:defPPr/>
+          </a:lstStyle>
+          <a:p>
+            <a:r>
+              <a:rPr lang="en-US" sz="3000">
                 <a:solidFill>
                   <a:srgbClr val="FF0000"/>
                 </a:solidFill>
@@ -7435,36 +7596,37 @@
             <a:off x="3238754" y="4509153"/>
             <a:ext cx="628929" cy="446469"/>
           </a:xfrm>
-          <a:prstGeom prst="rect"/>
-          <a:noFill/>
-        </p:spPr>
-        <p:style>
-          <a:lnRef idx="2">
-            <a:srgbClr val="000000">
-              <a:alpha val="0"/>
-            </a:srgbClr>
-          </a:lnRef>
-          <a:fillRef idx="1">
-            <a:schemeClr val="accent1"/>
-          </a:fillRef>
-          <a:effectRef idx="0">
-            <a:schemeClr val="accent1"/>
-          </a:effectRef>
-          <a:fontRef idx="minor">
-            <a:schemeClr val="lt1"/>
-          </a:fontRef>
-        </p:style>
-        <p:txBody>
-          <a:bodyPr wrap="none" lIns="0" tIns="0" rtlCol="0" anchor="ctr">
-            <a:spAutoFit/>
-          </a:bodyPr>
-          <a:lstStyle>
-            <a:defPPr/>
-          </a:lstStyle>
-          <a:p>
-            <a:pPr/>
-            <a:r>
-              <a:rPr lang="en-US" sz="3002" dirty="1">
+          <a:prstGeom prst="rect">
+            <a:avLst/>
+          </a:prstGeom>
+          <a:noFill/>
+        </p:spPr>
+        <p:style>
+          <a:lnRef idx="2">
+            <a:srgbClr val="000000">
+              <a:alpha val="0"/>
+            </a:srgbClr>
+          </a:lnRef>
+          <a:fillRef idx="1">
+            <a:schemeClr val="accent1"/>
+          </a:fillRef>
+          <a:effectRef idx="0">
+            <a:schemeClr val="accent1"/>
+          </a:effectRef>
+          <a:fontRef idx="minor">
+            <a:schemeClr val="lt1"/>
+          </a:fontRef>
+        </p:style>
+        <p:txBody>
+          <a:bodyPr wrap="none" lIns="0" tIns="0" rtlCol="0" anchor="ctr">
+            <a:spAutoFit/>
+          </a:bodyPr>
+          <a:lstStyle>
+            <a:defPPr/>
+          </a:lstStyle>
+          <a:p>
+            <a:r>
+              <a:rPr lang="en-US" sz="3002">
                 <a:solidFill>
                   <a:srgbClr val="000000"/>
                 </a:solidFill>
@@ -7477,12 +7639,15 @@
       </p:sp>
     </p:spTree>
   </p:cSld>
+  <p:clrMapOvr>
+    <a:masterClrMapping/>
+  </p:clrMapOvr>
 </p:sld>
 </file>
 
 <file path=ppt/slides/slide9.xml><?xml version="1.0" encoding="utf-8"?>
 <p:sld xmlns:a="http://schemas.openxmlformats.org/drawingml/2006/main" xmlns:r="http://schemas.openxmlformats.org/officeDocument/2006/relationships" xmlns:p="http://schemas.openxmlformats.org/presentationml/2006/main">
-  <p:cSld name="">
+  <p:cSld>
     <p:spTree>
       <p:nvGrpSpPr>
         <p:cNvPr id="1" name=""/>
@@ -7499,52 +7664,6 @@
       </p:grpSpPr>
       <p:sp>
         <p:nvSpPr>
-          <p:cNvPr id="2" name="New shape"/>
-          <p:cNvSpPr/>
-          <p:nvPr/>
-        </p:nvSpPr>
-        <p:spPr>
-          <a:xfrm>
-            <a:off x="0" y="-1"/>
-            <a:ext cx="12192000" cy="6857999"/>
-          </a:xfrm>
-          <a:prstGeom prst="rect"/>
-          <a:solidFill>
-            <a:srgbClr val="FFFFFF"/>
-          </a:solidFill>
-          <a:ln w="0">
-            <a:noFill/>
-          </a:ln>
-        </p:spPr>
-        <p:style>
-          <a:lnRef idx="2">
-            <a:schemeClr val="accent1">
-              <a:shade val="50000"/>
-            </a:schemeClr>
-          </a:lnRef>
-          <a:fillRef idx="1">
-            <a:schemeClr val="accent1"/>
-          </a:fillRef>
-          <a:effectRef idx="0">
-            <a:schemeClr val="accent1"/>
-          </a:effectRef>
-          <a:fontRef idx="minor">
-            <a:schemeClr val="lt1"/>
-          </a:fontRef>
-        </p:style>
-        <p:txBody>
-          <a:bodyPr rtlCol="0" anchor="ctr"/>
-          <a:lstStyle>
-            <a:defPPr/>
-          </a:lstStyle>
-          <a:p>
-            <a:pPr/>
-            <a:endParaRPr lang="en-US"/>
-          </a:p>
-        </p:txBody>
-      </p:sp>
-      <p:sp>
-        <p:nvSpPr>
           <p:cNvPr id="3" name="New shape"/>
           <p:cNvSpPr/>
           <p:nvPr/>
@@ -7554,36 +7673,37 @@
             <a:off x="929640" y="703804"/>
             <a:ext cx="2217411" cy="683121"/>
           </a:xfrm>
-          <a:prstGeom prst="rect"/>
-          <a:noFill/>
-        </p:spPr>
-        <p:style>
-          <a:lnRef idx="2">
-            <a:srgbClr val="000000">
-              <a:alpha val="0"/>
-            </a:srgbClr>
-          </a:lnRef>
-          <a:fillRef idx="1">
-            <a:schemeClr val="accent1"/>
-          </a:fillRef>
-          <a:effectRef idx="0">
-            <a:schemeClr val="accent1"/>
-          </a:effectRef>
-          <a:fontRef idx="minor">
-            <a:schemeClr val="lt1"/>
-          </a:fontRef>
-        </p:style>
-        <p:txBody>
-          <a:bodyPr wrap="none" lIns="0" tIns="0" rtlCol="0" anchor="ctr">
-            <a:spAutoFit/>
-          </a:bodyPr>
-          <a:lstStyle>
-            <a:defPPr/>
-          </a:lstStyle>
-          <a:p>
-            <a:pPr/>
-            <a:r>
-              <a:rPr lang="en-US" sz="4406" dirty="1">
+          <a:prstGeom prst="rect">
+            <a:avLst/>
+          </a:prstGeom>
+          <a:noFill/>
+        </p:spPr>
+        <p:style>
+          <a:lnRef idx="2">
+            <a:srgbClr val="000000">
+              <a:alpha val="0"/>
+            </a:srgbClr>
+          </a:lnRef>
+          <a:fillRef idx="1">
+            <a:schemeClr val="accent1"/>
+          </a:fillRef>
+          <a:effectRef idx="0">
+            <a:schemeClr val="accent1"/>
+          </a:effectRef>
+          <a:fontRef idx="minor">
+            <a:schemeClr val="lt1"/>
+          </a:fontRef>
+        </p:style>
+        <p:txBody>
+          <a:bodyPr wrap="none" lIns="0" tIns="0" rtlCol="0" anchor="ctr">
+            <a:spAutoFit/>
+          </a:bodyPr>
+          <a:lstStyle>
+            <a:defPPr/>
+          </a:lstStyle>
+          <a:p>
+            <a:r>
+              <a:rPr lang="en-US" sz="4406">
                 <a:solidFill>
                   <a:srgbClr val="00AFEF"/>
                 </a:solidFill>
@@ -7605,36 +7725,37 @@
             <a:off x="3238754" y="2893582"/>
             <a:ext cx="4817938" cy="446112"/>
           </a:xfrm>
-          <a:prstGeom prst="rect"/>
-          <a:noFill/>
-        </p:spPr>
-        <p:style>
-          <a:lnRef idx="2">
-            <a:srgbClr val="000000">
-              <a:alpha val="0"/>
-            </a:srgbClr>
-          </a:lnRef>
-          <a:fillRef idx="1">
-            <a:schemeClr val="accent1"/>
-          </a:fillRef>
-          <a:effectRef idx="0">
-            <a:schemeClr val="accent1"/>
-          </a:effectRef>
-          <a:fontRef idx="minor">
-            <a:schemeClr val="lt1"/>
-          </a:fontRef>
-        </p:style>
-        <p:txBody>
-          <a:bodyPr wrap="none" lIns="0" tIns="0" rtlCol="0" anchor="ctr">
-            <a:spAutoFit/>
-          </a:bodyPr>
-          <a:lstStyle>
-            <a:defPPr/>
-          </a:lstStyle>
-          <a:p>
-            <a:pPr/>
-            <a:r>
-              <a:rPr lang="en-US" sz="3000" dirty="1">
+          <a:prstGeom prst="rect">
+            <a:avLst/>
+          </a:prstGeom>
+          <a:noFill/>
+        </p:spPr>
+        <p:style>
+          <a:lnRef idx="2">
+            <a:srgbClr val="000000">
+              <a:alpha val="0"/>
+            </a:srgbClr>
+          </a:lnRef>
+          <a:fillRef idx="1">
+            <a:schemeClr val="accent1"/>
+          </a:fillRef>
+          <a:effectRef idx="0">
+            <a:schemeClr val="accent1"/>
+          </a:effectRef>
+          <a:fontRef idx="minor">
+            <a:schemeClr val="lt1"/>
+          </a:fontRef>
+        </p:style>
+        <p:txBody>
+          <a:bodyPr wrap="none" lIns="0" tIns="0" rtlCol="0" anchor="ctr">
+            <a:spAutoFit/>
+          </a:bodyPr>
+          <a:lstStyle>
+            <a:defPPr/>
+          </a:lstStyle>
+          <a:p>
+            <a:r>
+              <a:rPr lang="en-US" sz="3000">
                 <a:solidFill>
                   <a:srgbClr val="000000"/>
                 </a:solidFill>
@@ -7647,6 +7768,9 @@
       </p:sp>
     </p:spTree>
   </p:cSld>
+  <p:clrMapOvr>
+    <a:masterClrMapping/>
+  </p:clrMapOvr>
 </p:sld>
 </file>
 
@@ -7798,7 +7922,7 @@
       <a:effectStyleLst>
         <a:effectStyle>
           <a:effectLst>
-            <a:outerShdw blurRad="40000" dir="5400000" dist="20000">
+            <a:outerShdw blurRad="40000" dist="20000" dir="5400000">
               <a:srgbClr val="000000">
                 <a:alpha val="38000"/>
               </a:srgbClr>
@@ -7807,7 +7931,7 @@
         </a:effectStyle>
         <a:effectStyle>
           <a:effectLst>
-            <a:outerShdw blurRad="40000" dir="5400000" dist="20000">
+            <a:outerShdw blurRad="40000" dist="20000" dir="5400000">
               <a:srgbClr val="000000">
                 <a:alpha val="38000"/>
               </a:srgbClr>
@@ -7816,7 +7940,7 @@
         </a:effectStyle>
         <a:effectStyle>
           <a:effectLst>
-            <a:outerShdw blurRad="40000" dir="5400000" dist="20000">
+            <a:outerShdw blurRad="40000" dist="20000" dir="5400000">
               <a:srgbClr val="000000">
                 <a:alpha val="38000"/>
               </a:srgbClr>
@@ -7838,5 +7962,6 @@
     </a:fmtScheme>
   </a:themeElements>
   <a:objectDefaults/>
+  <a:extraClrSchemeLst/>
 </a:theme>
 </file>